--- a/projects/WaferEngine-staging/meetings/2026-07-26.pptx
+++ b/projects/WaferEngine-staging/meetings/2026-07-26.pptx
@@ -26,6 +26,7 @@
     <p:sldId id="271" r:id="rId22"/>
     <p:sldId id="272" r:id="rId23"/>
     <p:sldId id="273" r:id="rId24"/>
+    <p:sldId id="274" r:id="rId25"/>
   </p:sldIdLst>
   <p:sldSz cx="18288000" cy="10287000"/>
   <p:notesSz cx="10287000" cy="18288000"/>
@@ -333,6 +334,52 @@
           <a:lstStyle/>
           <a:p>
             <a:r>
+              <a:t>S1 passed two gates in simulation: bit-identical to the pre-change build over 48 records, and bit-identical again with four slots and the active set mapped to slots 3 and 0, with the unused slots still exactly zero. Capacity is not exercised at this geometry. The code is still uncommitted in the working tree.</a:t>
+            </a:r>
+          </a:p>
+        </p:txBody>
+      </p:sp>
+    </p:spTree>
+  </p:cSld>
+  <p:clrMapOvr>
+    <a:masterClrMapping/>
+  </p:clrMapOvr>
+</p:notes>
+</file>
+
+<file path=ppt/notesSlides/notesSlide11.xml><?xml version="1.0" encoding="utf-8"?>
+<p:notes xmlns:a="http://schemas.openxmlformats.org/drawingml/2006/main" xmlns:p="http://schemas.openxmlformats.org/presentationml/2006/main" xmlns:r="http://schemas.openxmlformats.org/officeDocument/2006/relationships">
+  <p:cSld>
+    <p:spTree>
+      <p:nvGrpSpPr>
+        <p:cNvPr id="1" name=""/>
+        <p:cNvGrpSpPr/>
+        <p:nvPr/>
+      </p:nvGrpSpPr>
+      <p:grpSpPr>
+        <a:xfrm>
+          <a:off x="0" y="0"/>
+          <a:ext cx="0" cy="0"/>
+          <a:chOff x="0" y="0"/>
+          <a:chExt cx="0" cy="0"/>
+        </a:xfrm>
+      </p:grpSpPr>
+      <p:sp>
+        <p:nvSpPr>
+          <p:cNvPr id="2" name="Notes Placeholder"/>
+          <p:cNvSpPr>
+            <a:spLocks noGrp="1"/>
+          </p:cNvSpPr>
+          <p:nvPr>
+            <p:ph type="body" idx="1"/>
+          </p:nvPr>
+        </p:nvSpPr>
+        <p:spPr/>
+        <p:txBody>
+          <a:bodyPr/>
+          <a:lstStyle/>
+          <a:p>
+            <a:r>
               <a:t>Paging would chop the attention inner loop into roughly 16 short pieces at 256 tokens and 16-token pages, which is why M1 does not start there.</a:t>
             </a:r>
           </a:p>
@@ -425,7 +472,7 @@
           <a:lstStyle/>
           <a:p>
             <a:r>
-              <a:t>The two device sweeps completed on 21 July, one day after last week's deck, so they are new here.</a:t>
+              <a:t>The two device sweeps completed on 21 July, one day after last week's deck. The two reversals: the device now gets one slot per lane rather than a single slot number, because eviction victims are not contiguous across lanes; and per-slot lengths stay on the host rather than being counted on the device.</a:t>
             </a:r>
           </a:p>
         </p:txBody>
@@ -609,7 +656,7 @@
           <a:lstStyle/>
           <a:p>
             <a:r>
-              <a:t>Same configuration, pipelined against non-pipelined, was 17,149 to 13,096 cycles per token, a 24% saving. Correctness held at 9.8e-5 against the oracle.</a:t>
+              <a:t>The two effects cannot be switched on and off independently in the kernel: dropping the picking stage without also dropping the drain that feeds it unbalances the fabric and hangs. So they have to be told apart by the shape of the curve on the next slide.</a:t>
             </a:r>
           </a:p>
         </p:txBody>
@@ -655,7 +702,7 @@
           <a:lstStyle/>
           <a:p>
             <a:r>
-              <a:t>Batch is a scheduling subset of the slots, not a storage axis. A slot-by-batch grid would over-allocate.</a:t>
+              <a:t>Same configuration, pipelined against non-pipelined, was 17,149 to 13,096 cycles per token, a 24% saving. Correctness held at 9.8e-5 against the oracle.</a:t>
             </a:r>
           </a:p>
         </p:txBody>
@@ -701,7 +748,7 @@
           <a:lstStyle/>
           <a:p>
             <a:r>
-              <a:t>No M1 code yet. Every subtask lands as a provable no-op first, then a failing config, then real behaviour.</a:t>
+              <a:t>Batch is a scheduling subset of the slots, not a storage axis. A slot-by-batch grid would over-allocate.</a:t>
             </a:r>
           </a:p>
         </p:txBody>
@@ -1566,7 +1613,7 @@
                 </a:solidFill>
                 <a:latin typeface="Arial"/>
               </a:rPr>
-              <a:t>FORCE-DECODE, SIMULATOR</a:t>
+              <a:t>HOW IT WORKS</a:t>
             </a:r>
           </a:p>
         </p:txBody>
@@ -1605,14 +1652,14 @@
                 </a:solidFill>
                 <a:latin typeface="Arial"/>
               </a:rPr>
-              <a:t>The saving comes from work skipped, not from a fuller pipeline</a:t>
+              <a:t>Two reasons a forced step could be cheaper</a:t>
             </a:r>
           </a:p>
         </p:txBody>
       </p:sp>
       <p:pic>
         <p:nvPicPr>
-          <p:cNvPr id="4" name="figure" descr="fig_fsweep.png"/>
+          <p:cNvPr id="4" name="figure" descr="fig_mechanism.png"/>
           <p:cNvPicPr>
             <a:picLocks noChangeAspect="1"/>
           </p:cNvPicPr>
@@ -1626,8 +1673,8 @@
         </p:blipFill>
         <p:spPr>
           <a:xfrm>
-            <a:off x="2430276" y="2484882"/>
-            <a:ext cx="13427446" cy="5271516"/>
+            <a:off x="1974738" y="2484882"/>
+            <a:ext cx="14338523" cy="5271516"/>
           </a:xfrm>
           <a:prstGeom prst="rect">
             <a:avLst/>
@@ -1668,7 +1715,7 @@
                 </a:solidFill>
                 <a:latin typeface="Arial"/>
               </a:rPr>
-              <a:t>Toy layout: 2x2 blocks, width 64, vocabulary 24. A forced step costs about 28% of a plain step here, roughly 806 cycles against 2,856.</a:t>
+              <a:t>A plain step cannot start until the one before it has picked its token. Supplying the token removes that stage, and removes the wait along with it.</a:t>
             </a:r>
           </a:p>
         </p:txBody>
@@ -1725,7 +1772,7 @@
                 </a:solidFill>
                 <a:latin typeface="Arial"/>
               </a:rPr>
-              <a:t>FINDING</a:t>
+              <a:t>FORCE-DECODE, SIMULATOR</a:t>
             </a:r>
           </a:p>
         </p:txBody>
@@ -1764,55 +1811,35 @@
                 </a:solidFill>
                 <a:latin typeface="Arial"/>
               </a:rPr>
-              <a:t>This partly falsified what we expected</a:t>
-            </a:r>
-          </a:p>
-        </p:txBody>
-      </p:sp>
-      <p:sp>
-        <p:nvSpPr>
-          <p:cNvPr id="4" name="dot"/>
-          <p:cNvSpPr/>
-          <p:nvPr/>
-        </p:nvSpPr>
-        <p:spPr>
-          <a:xfrm>
-            <a:off x="987552" y="2612898"/>
-            <a:ext cx="109728" cy="109728"/>
-          </a:xfrm>
-          <a:prstGeom prst="ellipse">
-            <a:avLst/>
-          </a:prstGeom>
-          <a:solidFill>
-            <a:srgbClr val="6D28D9"/>
-          </a:solidFill>
-          <a:ln>
-            <a:noFill/>
-          </a:ln>
-          <a:effectLst/>
-        </p:spPr>
-        <p:style>
-          <a:lnRef idx="1">
-            <a:schemeClr val="accent1"/>
-          </a:lnRef>
-          <a:fillRef idx="3">
-            <a:schemeClr val="accent1"/>
-          </a:fillRef>
-          <a:effectRef idx="2">
-            <a:schemeClr val="accent1"/>
-          </a:effectRef>
-          <a:fontRef idx="minor">
-            <a:schemeClr val="lt1"/>
-          </a:fontRef>
-        </p:style>
-        <p:txBody>
-          <a:bodyPr rtlCol="0" anchor="ctr"/>
-          <a:lstStyle/>
-          <a:p>
-            <a:pPr algn="ctr"/>
-          </a:p>
-        </p:txBody>
-      </p:sp>
+              <a:t>The line is straight, so it is skipped work, not overlap</a:t>
+            </a:r>
+          </a:p>
+        </p:txBody>
+      </p:sp>
+      <p:pic>
+        <p:nvPicPr>
+          <p:cNvPr id="4" name="figure" descr="fig_fsweep.png"/>
+          <p:cNvPicPr>
+            <a:picLocks noChangeAspect="1"/>
+          </p:cNvPicPr>
+          <p:nvPr/>
+        </p:nvPicPr>
+        <p:blipFill>
+          <a:blip r:embed="rId2"/>
+          <a:stretch>
+            <a:fillRect/>
+          </a:stretch>
+        </p:blipFill>
+        <p:spPr>
+          <a:xfrm>
+            <a:off x="2430276" y="2484882"/>
+            <a:ext cx="13427446" cy="5271516"/>
+          </a:xfrm>
+          <a:prstGeom prst="rect">
+            <a:avLst/>
+          </a:prstGeom>
+        </p:spPr>
+      </p:pic>
       <p:sp>
         <p:nvSpPr>
           <p:cNvPr id="5" name="TextBox 4"/>
@@ -1821,282 +1848,33 @@
         </p:nvSpPr>
         <p:spPr>
           <a:xfrm>
-            <a:off x="1353312" y="2484882"/>
-            <a:ext cx="15947136" cy="804672"/>
-          </a:xfrm>
-          <a:prstGeom prst="rect">
-            <a:avLst/>
-          </a:prstGeom>
-          <a:noFill/>
-        </p:spPr>
-        <p:txBody>
-          <a:bodyPr wrap="square" lIns="0" rIns="0" tIns="0" bIns="0" anchor="t">
-            <a:spAutoFit/>
-          </a:bodyPr>
-          <a:lstStyle/>
-          <a:p>
-            <a:pPr algn="l">
-              <a:lnSpc>
-                <a:spcPct val="132000"/>
-              </a:lnSpc>
-            </a:pPr>
-            <a:r>
-              <a:rPr sz="2400" b="0" u="none" i="0">
-                <a:solidFill>
-                  <a:srgbClr val="18181B"/>
-                </a:solidFill>
-                <a:latin typeface="Arial"/>
-              </a:rPr>
-              <a:t>We expected the gain to come from layer pipelining: forced tokens let the front of the model run ahead and fill the pipeline.</a:t>
-            </a:r>
-          </a:p>
-        </p:txBody>
-      </p:sp>
-      <p:sp>
-        <p:nvSpPr>
-          <p:cNvPr id="6" name="dot"/>
-          <p:cNvSpPr/>
-          <p:nvPr/>
-        </p:nvSpPr>
-        <p:spPr>
-          <a:xfrm>
-            <a:off x="987552" y="3728465"/>
-            <a:ext cx="109728" cy="109728"/>
-          </a:xfrm>
-          <a:prstGeom prst="ellipse">
-            <a:avLst/>
-          </a:prstGeom>
-          <a:solidFill>
-            <a:srgbClr val="6D28D9"/>
-          </a:solidFill>
-          <a:ln>
-            <a:noFill/>
-          </a:ln>
-          <a:effectLst/>
-        </p:spPr>
-        <p:style>
-          <a:lnRef idx="1">
-            <a:schemeClr val="accent1"/>
-          </a:lnRef>
-          <a:fillRef idx="3">
-            <a:schemeClr val="accent1"/>
-          </a:fillRef>
-          <a:effectRef idx="2">
-            <a:schemeClr val="accent1"/>
-          </a:effectRef>
-          <a:fontRef idx="minor">
-            <a:schemeClr val="lt1"/>
-          </a:fontRef>
-        </p:style>
-        <p:txBody>
-          <a:bodyPr rtlCol="0" anchor="ctr"/>
-          <a:lstStyle/>
-          <a:p>
-            <a:pPr algn="ctr"/>
-          </a:p>
-        </p:txBody>
-      </p:sp>
-      <p:sp>
-        <p:nvSpPr>
-          <p:cNvPr id="7" name="TextBox 6"/>
-          <p:cNvSpPr txBox="1"/>
-          <p:nvPr/>
-        </p:nvSpPr>
-        <p:spPr>
-          <a:xfrm>
-            <a:off x="1353312" y="3600450"/>
-            <a:ext cx="15947136" cy="804672"/>
-          </a:xfrm>
-          <a:prstGeom prst="rect">
-            <a:avLst/>
-          </a:prstGeom>
-          <a:noFill/>
-        </p:spPr>
-        <p:txBody>
-          <a:bodyPr wrap="square" lIns="0" rIns="0" tIns="0" bIns="0" anchor="t">
-            <a:spAutoFit/>
-          </a:bodyPr>
-          <a:lstStyle/>
-          <a:p>
-            <a:pPr algn="l">
-              <a:lnSpc>
-                <a:spcPct val="132000"/>
-              </a:lnSpc>
-            </a:pPr>
-            <a:r>
-              <a:rPr sz="2400" b="0" u="none" i="0">
-                <a:solidFill>
-                  <a:srgbClr val="18181B"/>
-                </a:solidFill>
-                <a:latin typeface="Arial"/>
-              </a:rPr>
-              <a:t>A straight line rules that out. Pipelining would flatten once the pipeline is full; a constant saving per forced step means work is simply not being done.</a:t>
-            </a:r>
-          </a:p>
-        </p:txBody>
-      </p:sp>
-      <p:sp>
-        <p:nvSpPr>
-          <p:cNvPr id="8" name="dot"/>
-          <p:cNvSpPr/>
-          <p:nvPr/>
-        </p:nvSpPr>
-        <p:spPr>
-          <a:xfrm>
-            <a:off x="987552" y="4844033"/>
-            <a:ext cx="109728" cy="109728"/>
-          </a:xfrm>
-          <a:prstGeom prst="ellipse">
-            <a:avLst/>
-          </a:prstGeom>
-          <a:solidFill>
-            <a:srgbClr val="6D28D9"/>
-          </a:solidFill>
-          <a:ln>
-            <a:noFill/>
-          </a:ln>
-          <a:effectLst/>
-        </p:spPr>
-        <p:style>
-          <a:lnRef idx="1">
-            <a:schemeClr val="accent1"/>
-          </a:lnRef>
-          <a:fillRef idx="3">
-            <a:schemeClr val="accent1"/>
-          </a:fillRef>
-          <a:effectRef idx="2">
-            <a:schemeClr val="accent1"/>
-          </a:effectRef>
-          <a:fontRef idx="minor">
-            <a:schemeClr val="lt1"/>
-          </a:fontRef>
-        </p:style>
-        <p:txBody>
-          <a:bodyPr rtlCol="0" anchor="ctr"/>
-          <a:lstStyle/>
-          <a:p>
-            <a:pPr algn="ctr"/>
-          </a:p>
-        </p:txBody>
-      </p:sp>
-      <p:sp>
-        <p:nvSpPr>
-          <p:cNvPr id="9" name="TextBox 8"/>
-          <p:cNvSpPr txBox="1"/>
-          <p:nvPr/>
-        </p:nvSpPr>
-        <p:spPr>
-          <a:xfrm>
-            <a:off x="1353312" y="4716018"/>
-            <a:ext cx="15947136" cy="402336"/>
-          </a:xfrm>
-          <a:prstGeom prst="rect">
-            <a:avLst/>
-          </a:prstGeom>
-          <a:noFill/>
-        </p:spPr>
-        <p:txBody>
-          <a:bodyPr wrap="square" lIns="0" rIns="0" tIns="0" bIns="0" anchor="t">
-            <a:spAutoFit/>
-          </a:bodyPr>
-          <a:lstStyle/>
-          <a:p>
-            <a:pPr algn="l">
-              <a:lnSpc>
-                <a:spcPct val="132000"/>
-              </a:lnSpc>
-            </a:pPr>
-            <a:r>
-              <a:rPr sz="2400" b="0" u="none" i="0">
-                <a:solidFill>
-                  <a:srgbClr val="18181B"/>
-                </a:solidFill>
-                <a:latin typeface="Arial"/>
-              </a:rPr>
-              <a:t>Each forced step drops its sampling and output-projection stage, and that should grow with a real 128k vocabulary.</a:t>
-            </a:r>
-          </a:p>
-        </p:txBody>
-      </p:sp>
-      <p:sp>
-        <p:nvSpPr>
-          <p:cNvPr id="10" name="dot"/>
-          <p:cNvSpPr/>
-          <p:nvPr/>
-        </p:nvSpPr>
-        <p:spPr>
-          <a:xfrm>
-            <a:off x="987552" y="5557266"/>
-            <a:ext cx="109728" cy="109728"/>
-          </a:xfrm>
-          <a:prstGeom prst="ellipse">
-            <a:avLst/>
-          </a:prstGeom>
-          <a:solidFill>
-            <a:srgbClr val="6D28D9"/>
-          </a:solidFill>
-          <a:ln>
-            <a:noFill/>
-          </a:ln>
-          <a:effectLst/>
-        </p:spPr>
-        <p:style>
-          <a:lnRef idx="1">
-            <a:schemeClr val="accent1"/>
-          </a:lnRef>
-          <a:fillRef idx="3">
-            <a:schemeClr val="accent1"/>
-          </a:fillRef>
-          <a:effectRef idx="2">
-            <a:schemeClr val="accent1"/>
-          </a:effectRef>
-          <a:fontRef idx="minor">
-            <a:schemeClr val="lt1"/>
-          </a:fontRef>
-        </p:style>
-        <p:txBody>
-          <a:bodyPr rtlCol="0" anchor="ctr"/>
-          <a:lstStyle/>
-          <a:p>
-            <a:pPr algn="ctr"/>
-          </a:p>
-        </p:txBody>
-      </p:sp>
-      <p:sp>
-        <p:nvSpPr>
-          <p:cNvPr id="11" name="TextBox 10"/>
-          <p:cNvSpPr txBox="1"/>
-          <p:nvPr/>
-        </p:nvSpPr>
-        <p:spPr>
-          <a:xfrm>
-            <a:off x="1353312" y="5429250"/>
-            <a:ext cx="15947136" cy="402336"/>
-          </a:xfrm>
-          <a:prstGeom prst="rect">
-            <a:avLst/>
-          </a:prstGeom>
-          <a:noFill/>
-        </p:spPr>
-        <p:txBody>
-          <a:bodyPr wrap="square" lIns="0" rIns="0" tIns="0" bIns="0" anchor="t">
-            <a:spAutoFit/>
-          </a:bodyPr>
-          <a:lstStyle/>
-          <a:p>
-            <a:pPr algn="l">
-              <a:lnSpc>
-                <a:spcPct val="132000"/>
-              </a:lnSpc>
-            </a:pPr>
-            <a:r>
-              <a:rPr sz="2400" b="0" u="none" i="0">
-                <a:solidFill>
-                  <a:srgbClr val="18181B"/>
-                </a:solidFill>
-                <a:latin typeface="Arial"/>
-              </a:rPr>
-              <a:t>Still open: this layout has very little per-layer compute, so whether pipelining also helps at real scale is unmeasured.</a:t>
+            <a:off x="987552" y="8030718"/>
+            <a:ext cx="16312896" cy="326898"/>
+          </a:xfrm>
+          <a:prstGeom prst="rect">
+            <a:avLst/>
+          </a:prstGeom>
+          <a:noFill/>
+        </p:spPr>
+        <p:txBody>
+          <a:bodyPr wrap="square" lIns="0" rIns="0" tIns="0" bIns="0" anchor="t">
+            <a:spAutoFit/>
+          </a:bodyPr>
+          <a:lstStyle/>
+          <a:p>
+            <a:pPr algn="l">
+              <a:lnSpc>
+                <a:spcPct val="132000"/>
+              </a:lnSpc>
+            </a:pPr>
+            <a:r>
+              <a:rPr sz="1950" b="0" u="none" i="0">
+                <a:solidFill>
+                  <a:srgbClr val="A1A1AA"/>
+                </a:solidFill>
+                <a:latin typeface="Arial"/>
+              </a:rPr>
+              <a:t>Toy layout: 2x2 blocks, width 64, vocabulary 24. A forced step costs about 28% of a plain step here, roughly 806 cycles against 2,856.</a:t>
             </a:r>
           </a:p>
         </p:txBody>
@@ -2127,33 +1905,33 @@
         </p:nvSpPr>
         <p:spPr>
           <a:xfrm>
-            <a:off x="987552" y="3877056"/>
-            <a:ext cx="16312896" cy="1110996"/>
-          </a:xfrm>
-          <a:prstGeom prst="rect">
-            <a:avLst/>
-          </a:prstGeom>
-          <a:noFill/>
-        </p:spPr>
-        <p:txBody>
-          <a:bodyPr wrap="square" lIns="0" rIns="0" tIns="0" bIns="0" anchor="t">
-            <a:spAutoFit/>
-          </a:bodyPr>
-          <a:lstStyle/>
-          <a:p>
-            <a:pPr algn="l">
-              <a:lnSpc>
-                <a:spcPct val="108000"/>
-              </a:lnSpc>
-            </a:pPr>
-            <a:r>
-              <a:rPr sz="8100" b="1" u="none" i="0">
-                <a:solidFill>
-                  <a:srgbClr val="6D28D9"/>
-                </a:solidFill>
-                <a:latin typeface="Arial"/>
-              </a:rPr>
-              <a:t>03</a:t>
+            <a:off x="987552" y="914400"/>
+            <a:ext cx="16312896" cy="301752"/>
+          </a:xfrm>
+          <a:prstGeom prst="rect">
+            <a:avLst/>
+          </a:prstGeom>
+          <a:noFill/>
+        </p:spPr>
+        <p:txBody>
+          <a:bodyPr wrap="square" lIns="0" rIns="0" tIns="0" bIns="0" anchor="t">
+            <a:spAutoFit/>
+          </a:bodyPr>
+          <a:lstStyle/>
+          <a:p>
+            <a:pPr algn="l">
+              <a:lnSpc>
+                <a:spcPct val="132000"/>
+              </a:lnSpc>
+            </a:pPr>
+            <a:r>
+              <a:rPr sz="1800" b="0" u="none" i="0" spc="150">
+                <a:solidFill>
+                  <a:srgbClr val="A1A1AA"/>
+                </a:solidFill>
+                <a:latin typeface="Arial"/>
+              </a:rPr>
+              <a:t>FINDING</a:t>
             </a:r>
           </a:p>
         </p:txBody>
@@ -2166,7 +1944,7 @@
         </p:nvSpPr>
         <p:spPr>
           <a:xfrm>
-            <a:off x="987552" y="5239512"/>
+            <a:off x="987552" y="1371600"/>
             <a:ext cx="16312896" cy="674369"/>
           </a:xfrm>
           <a:prstGeom prst="rect">
@@ -2192,21 +1970,65 @@
                 </a:solidFill>
                 <a:latin typeface="Arial"/>
               </a:rPr>
-              <a:t>M1, and what to decide</a:t>
-            </a:r>
-          </a:p>
-        </p:txBody>
-      </p:sp>
-      <p:sp>
-        <p:nvSpPr>
-          <p:cNvPr id="4" name="TextBox 3"/>
-          <p:cNvSpPr txBox="1"/>
-          <p:nvPr/>
-        </p:nvSpPr>
-        <p:spPr>
-          <a:xfrm>
-            <a:off x="987552" y="6099048"/>
-            <a:ext cx="11887200" cy="402336"/>
+              <a:t>This partly falsified what we expected</a:t>
+            </a:r>
+          </a:p>
+        </p:txBody>
+      </p:sp>
+      <p:sp>
+        <p:nvSpPr>
+          <p:cNvPr id="4" name="dot"/>
+          <p:cNvSpPr/>
+          <p:nvPr/>
+        </p:nvSpPr>
+        <p:spPr>
+          <a:xfrm>
+            <a:off x="987552" y="2612898"/>
+            <a:ext cx="109728" cy="109728"/>
+          </a:xfrm>
+          <a:prstGeom prst="ellipse">
+            <a:avLst/>
+          </a:prstGeom>
+          <a:solidFill>
+            <a:srgbClr val="6D28D9"/>
+          </a:solidFill>
+          <a:ln>
+            <a:noFill/>
+          </a:ln>
+          <a:effectLst/>
+        </p:spPr>
+        <p:style>
+          <a:lnRef idx="1">
+            <a:schemeClr val="accent1"/>
+          </a:lnRef>
+          <a:fillRef idx="3">
+            <a:schemeClr val="accent1"/>
+          </a:fillRef>
+          <a:effectRef idx="2">
+            <a:schemeClr val="accent1"/>
+          </a:effectRef>
+          <a:fontRef idx="minor">
+            <a:schemeClr val="lt1"/>
+          </a:fontRef>
+        </p:style>
+        <p:txBody>
+          <a:bodyPr rtlCol="0" anchor="ctr"/>
+          <a:lstStyle/>
+          <a:p>
+            <a:pPr algn="ctr"/>
+          </a:p>
+        </p:txBody>
+      </p:sp>
+      <p:sp>
+        <p:nvSpPr>
+          <p:cNvPr id="5" name="TextBox 4"/>
+          <p:cNvSpPr txBox="1"/>
+          <p:nvPr/>
+        </p:nvSpPr>
+        <p:spPr>
+          <a:xfrm>
+            <a:off x="1353312" y="2484882"/>
+            <a:ext cx="15947136" cy="804672"/>
           </a:xfrm>
           <a:prstGeom prst="rect">
             <a:avLst/>
@@ -2227,11 +2049,260 @@
             <a:r>
               <a:rPr sz="2400" b="0" u="none" i="0">
                 <a:solidFill>
-                  <a:srgbClr val="52525B"/>
-                </a:solidFill>
-                <a:latin typeface="Arial"/>
-              </a:rPr>
-              <a:t>Several requests in one card, and the architecture questions behind it.</a:t>
+                  <a:srgbClr val="18181B"/>
+                </a:solidFill>
+                <a:latin typeface="Arial"/>
+              </a:rPr>
+              <a:t>We expected the gain to come from layer pipelining: forced tokens let the front of the model run ahead and fill the pipeline.</a:t>
+            </a:r>
+          </a:p>
+        </p:txBody>
+      </p:sp>
+      <p:sp>
+        <p:nvSpPr>
+          <p:cNvPr id="6" name="dot"/>
+          <p:cNvSpPr/>
+          <p:nvPr/>
+        </p:nvSpPr>
+        <p:spPr>
+          <a:xfrm>
+            <a:off x="987552" y="3728465"/>
+            <a:ext cx="109728" cy="109728"/>
+          </a:xfrm>
+          <a:prstGeom prst="ellipse">
+            <a:avLst/>
+          </a:prstGeom>
+          <a:solidFill>
+            <a:srgbClr val="6D28D9"/>
+          </a:solidFill>
+          <a:ln>
+            <a:noFill/>
+          </a:ln>
+          <a:effectLst/>
+        </p:spPr>
+        <p:style>
+          <a:lnRef idx="1">
+            <a:schemeClr val="accent1"/>
+          </a:lnRef>
+          <a:fillRef idx="3">
+            <a:schemeClr val="accent1"/>
+          </a:fillRef>
+          <a:effectRef idx="2">
+            <a:schemeClr val="accent1"/>
+          </a:effectRef>
+          <a:fontRef idx="minor">
+            <a:schemeClr val="lt1"/>
+          </a:fontRef>
+        </p:style>
+        <p:txBody>
+          <a:bodyPr rtlCol="0" anchor="ctr"/>
+          <a:lstStyle/>
+          <a:p>
+            <a:pPr algn="ctr"/>
+          </a:p>
+        </p:txBody>
+      </p:sp>
+      <p:sp>
+        <p:nvSpPr>
+          <p:cNvPr id="7" name="TextBox 6"/>
+          <p:cNvSpPr txBox="1"/>
+          <p:nvPr/>
+        </p:nvSpPr>
+        <p:spPr>
+          <a:xfrm>
+            <a:off x="1353312" y="3600450"/>
+            <a:ext cx="15947136" cy="804672"/>
+          </a:xfrm>
+          <a:prstGeom prst="rect">
+            <a:avLst/>
+          </a:prstGeom>
+          <a:noFill/>
+        </p:spPr>
+        <p:txBody>
+          <a:bodyPr wrap="square" lIns="0" rIns="0" tIns="0" bIns="0" anchor="t">
+            <a:spAutoFit/>
+          </a:bodyPr>
+          <a:lstStyle/>
+          <a:p>
+            <a:pPr algn="l">
+              <a:lnSpc>
+                <a:spcPct val="132000"/>
+              </a:lnSpc>
+            </a:pPr>
+            <a:r>
+              <a:rPr sz="2400" b="0" u="none" i="0">
+                <a:solidFill>
+                  <a:srgbClr val="18181B"/>
+                </a:solidFill>
+                <a:latin typeface="Arial"/>
+              </a:rPr>
+              <a:t>A straight line rules that out. Pipelining would flatten once the pipeline is full; a constant saving per forced step means work is simply not being done.</a:t>
+            </a:r>
+          </a:p>
+        </p:txBody>
+      </p:sp>
+      <p:sp>
+        <p:nvSpPr>
+          <p:cNvPr id="8" name="dot"/>
+          <p:cNvSpPr/>
+          <p:nvPr/>
+        </p:nvSpPr>
+        <p:spPr>
+          <a:xfrm>
+            <a:off x="987552" y="4844033"/>
+            <a:ext cx="109728" cy="109728"/>
+          </a:xfrm>
+          <a:prstGeom prst="ellipse">
+            <a:avLst/>
+          </a:prstGeom>
+          <a:solidFill>
+            <a:srgbClr val="6D28D9"/>
+          </a:solidFill>
+          <a:ln>
+            <a:noFill/>
+          </a:ln>
+          <a:effectLst/>
+        </p:spPr>
+        <p:style>
+          <a:lnRef idx="1">
+            <a:schemeClr val="accent1"/>
+          </a:lnRef>
+          <a:fillRef idx="3">
+            <a:schemeClr val="accent1"/>
+          </a:fillRef>
+          <a:effectRef idx="2">
+            <a:schemeClr val="accent1"/>
+          </a:effectRef>
+          <a:fontRef idx="minor">
+            <a:schemeClr val="lt1"/>
+          </a:fontRef>
+        </p:style>
+        <p:txBody>
+          <a:bodyPr rtlCol="0" anchor="ctr"/>
+          <a:lstStyle/>
+          <a:p>
+            <a:pPr algn="ctr"/>
+          </a:p>
+        </p:txBody>
+      </p:sp>
+      <p:sp>
+        <p:nvSpPr>
+          <p:cNvPr id="9" name="TextBox 8"/>
+          <p:cNvSpPr txBox="1"/>
+          <p:nvPr/>
+        </p:nvSpPr>
+        <p:spPr>
+          <a:xfrm>
+            <a:off x="1353312" y="4716018"/>
+            <a:ext cx="15947136" cy="402336"/>
+          </a:xfrm>
+          <a:prstGeom prst="rect">
+            <a:avLst/>
+          </a:prstGeom>
+          <a:noFill/>
+        </p:spPr>
+        <p:txBody>
+          <a:bodyPr wrap="square" lIns="0" rIns="0" tIns="0" bIns="0" anchor="t">
+            <a:spAutoFit/>
+          </a:bodyPr>
+          <a:lstStyle/>
+          <a:p>
+            <a:pPr algn="l">
+              <a:lnSpc>
+                <a:spcPct val="132000"/>
+              </a:lnSpc>
+            </a:pPr>
+            <a:r>
+              <a:rPr sz="2400" b="0" u="none" i="0">
+                <a:solidFill>
+                  <a:srgbClr val="18181B"/>
+                </a:solidFill>
+                <a:latin typeface="Arial"/>
+              </a:rPr>
+              <a:t>Each forced step drops its sampling and output-projection stage, and that should grow with a real 128k vocabulary.</a:t>
+            </a:r>
+          </a:p>
+        </p:txBody>
+      </p:sp>
+      <p:sp>
+        <p:nvSpPr>
+          <p:cNvPr id="10" name="dot"/>
+          <p:cNvSpPr/>
+          <p:nvPr/>
+        </p:nvSpPr>
+        <p:spPr>
+          <a:xfrm>
+            <a:off x="987552" y="5557266"/>
+            <a:ext cx="109728" cy="109728"/>
+          </a:xfrm>
+          <a:prstGeom prst="ellipse">
+            <a:avLst/>
+          </a:prstGeom>
+          <a:solidFill>
+            <a:srgbClr val="6D28D9"/>
+          </a:solidFill>
+          <a:ln>
+            <a:noFill/>
+          </a:ln>
+          <a:effectLst/>
+        </p:spPr>
+        <p:style>
+          <a:lnRef idx="1">
+            <a:schemeClr val="accent1"/>
+          </a:lnRef>
+          <a:fillRef idx="3">
+            <a:schemeClr val="accent1"/>
+          </a:fillRef>
+          <a:effectRef idx="2">
+            <a:schemeClr val="accent1"/>
+          </a:effectRef>
+          <a:fontRef idx="minor">
+            <a:schemeClr val="lt1"/>
+          </a:fontRef>
+        </p:style>
+        <p:txBody>
+          <a:bodyPr rtlCol="0" anchor="ctr"/>
+          <a:lstStyle/>
+          <a:p>
+            <a:pPr algn="ctr"/>
+          </a:p>
+        </p:txBody>
+      </p:sp>
+      <p:sp>
+        <p:nvSpPr>
+          <p:cNvPr id="11" name="TextBox 10"/>
+          <p:cNvSpPr txBox="1"/>
+          <p:nvPr/>
+        </p:nvSpPr>
+        <p:spPr>
+          <a:xfrm>
+            <a:off x="1353312" y="5429250"/>
+            <a:ext cx="15947136" cy="402336"/>
+          </a:xfrm>
+          <a:prstGeom prst="rect">
+            <a:avLst/>
+          </a:prstGeom>
+          <a:noFill/>
+        </p:spPr>
+        <p:txBody>
+          <a:bodyPr wrap="square" lIns="0" rIns="0" tIns="0" bIns="0" anchor="t">
+            <a:spAutoFit/>
+          </a:bodyPr>
+          <a:lstStyle/>
+          <a:p>
+            <a:pPr algn="l">
+              <a:lnSpc>
+                <a:spcPct val="132000"/>
+              </a:lnSpc>
+            </a:pPr>
+            <a:r>
+              <a:rPr sz="2400" b="0" u="none" i="0">
+                <a:solidFill>
+                  <a:srgbClr val="18181B"/>
+                </a:solidFill>
+                <a:latin typeface="Arial"/>
+              </a:rPr>
+              <a:t>Still open: this layout has very little per-layer compute, so whether pipelining also helps at real scale is unmeasured.</a:t>
             </a:r>
           </a:p>
         </p:txBody>
@@ -2262,33 +2333,33 @@
         </p:nvSpPr>
         <p:spPr>
           <a:xfrm>
-            <a:off x="987552" y="914400"/>
-            <a:ext cx="16312896" cy="301752"/>
-          </a:xfrm>
-          <a:prstGeom prst="rect">
-            <a:avLst/>
-          </a:prstGeom>
-          <a:noFill/>
-        </p:spPr>
-        <p:txBody>
-          <a:bodyPr wrap="square" lIns="0" rIns="0" tIns="0" bIns="0" anchor="t">
-            <a:spAutoFit/>
-          </a:bodyPr>
-          <a:lstStyle/>
-          <a:p>
-            <a:pPr algn="l">
-              <a:lnSpc>
-                <a:spcPct val="132000"/>
-              </a:lnSpc>
-            </a:pPr>
-            <a:r>
-              <a:rPr sz="1800" b="0" u="none" i="0" spc="150">
-                <a:solidFill>
-                  <a:srgbClr val="A1A1AA"/>
-                </a:solidFill>
-                <a:latin typeface="Arial"/>
-              </a:rPr>
-              <a:t>M1 CONTRACT</a:t>
+            <a:off x="987552" y="3877056"/>
+            <a:ext cx="16312896" cy="1110996"/>
+          </a:xfrm>
+          <a:prstGeom prst="rect">
+            <a:avLst/>
+          </a:prstGeom>
+          <a:noFill/>
+        </p:spPr>
+        <p:txBody>
+          <a:bodyPr wrap="square" lIns="0" rIns="0" tIns="0" bIns="0" anchor="t">
+            <a:spAutoFit/>
+          </a:bodyPr>
+          <a:lstStyle/>
+          <a:p>
+            <a:pPr algn="l">
+              <a:lnSpc>
+                <a:spcPct val="108000"/>
+              </a:lnSpc>
+            </a:pPr>
+            <a:r>
+              <a:rPr sz="8100" b="1" u="none" i="0">
+                <a:solidFill>
+                  <a:srgbClr val="6D28D9"/>
+                </a:solidFill>
+                <a:latin typeface="Arial"/>
+              </a:rPr>
+              <a:t>03</a:t>
             </a:r>
           </a:p>
         </p:txBody>
@@ -2301,7 +2372,7 @@
         </p:nvSpPr>
         <p:spPr>
           <a:xfrm>
-            <a:off x="987552" y="1371600"/>
+            <a:off x="987552" y="5239512"/>
             <a:ext cx="16312896" cy="674369"/>
           </a:xfrm>
           <a:prstGeom prst="rect">
@@ -2327,70 +2398,46 @@
                 </a:solidFill>
                 <a:latin typeface="Arial"/>
               </a:rPr>
-              <a:t>One number becomes two: capacity and compute</a:t>
-            </a:r>
-          </a:p>
-        </p:txBody>
-      </p:sp>
-      <p:pic>
-        <p:nvPicPr>
-          <p:cNvPr id="4" name="figure" descr="fig_slots.png"/>
-          <p:cNvPicPr>
-            <a:picLocks noChangeAspect="1"/>
-          </p:cNvPicPr>
-          <p:nvPr/>
-        </p:nvPicPr>
-        <p:blipFill>
-          <a:blip r:embed="rId2"/>
-          <a:stretch>
-            <a:fillRect/>
-          </a:stretch>
-        </p:blipFill>
-        <p:spPr>
-          <a:xfrm>
-            <a:off x="1974738" y="2484882"/>
-            <a:ext cx="14338523" cy="5271516"/>
-          </a:xfrm>
-          <a:prstGeom prst="rect">
-            <a:avLst/>
-          </a:prstGeom>
-        </p:spPr>
-      </p:pic>
-      <p:sp>
-        <p:nvSpPr>
-          <p:cNvPr id="5" name="TextBox 4"/>
-          <p:cNvSpPr txBox="1"/>
-          <p:nvPr/>
-        </p:nvSpPr>
-        <p:spPr>
-          <a:xfrm>
-            <a:off x="987552" y="8030718"/>
-            <a:ext cx="16312896" cy="326898"/>
-          </a:xfrm>
-          <a:prstGeom prst="rect">
-            <a:avLst/>
-          </a:prstGeom>
-          <a:noFill/>
-        </p:spPr>
-        <p:txBody>
-          <a:bodyPr wrap="square" lIns="0" rIns="0" tIns="0" bIns="0" anchor="t">
-            <a:spAutoFit/>
-          </a:bodyPr>
-          <a:lstStyle/>
-          <a:p>
-            <a:pPr algn="l">
-              <a:lnSpc>
-                <a:spcPct val="132000"/>
-              </a:lnSpc>
-            </a:pPr>
-            <a:r>
-              <a:rPr sz="1950" b="0" u="none" i="0">
-                <a:solidFill>
-                  <a:srgbClr val="A1A1AA"/>
-                </a:solidFill>
-                <a:latin typeface="Arial"/>
-              </a:rPr>
-              <a:t>Slots size the cache, batch sizes the compute. The device is told one new thing, which slot to use; everything else stays on the host.</a:t>
+              <a:t>M1, and what to decide</a:t>
+            </a:r>
+          </a:p>
+        </p:txBody>
+      </p:sp>
+      <p:sp>
+        <p:nvSpPr>
+          <p:cNvPr id="4" name="TextBox 3"/>
+          <p:cNvSpPr txBox="1"/>
+          <p:nvPr/>
+        </p:nvSpPr>
+        <p:spPr>
+          <a:xfrm>
+            <a:off x="987552" y="6099048"/>
+            <a:ext cx="11887200" cy="402336"/>
+          </a:xfrm>
+          <a:prstGeom prst="rect">
+            <a:avLst/>
+          </a:prstGeom>
+          <a:noFill/>
+        </p:spPr>
+        <p:txBody>
+          <a:bodyPr wrap="square" lIns="0" rIns="0" tIns="0" bIns="0" anchor="t">
+            <a:spAutoFit/>
+          </a:bodyPr>
+          <a:lstStyle/>
+          <a:p>
+            <a:pPr algn="l">
+              <a:lnSpc>
+                <a:spcPct val="132000"/>
+              </a:lnSpc>
+            </a:pPr>
+            <a:r>
+              <a:rPr sz="2400" b="0" u="none" i="0">
+                <a:solidFill>
+                  <a:srgbClr val="52525B"/>
+                </a:solidFill>
+                <a:latin typeface="Arial"/>
+              </a:rPr>
+              <a:t>Several requests in one card, and the architecture questions behind it.</a:t>
             </a:r>
           </a:p>
         </p:txBody>
@@ -2447,7 +2494,7 @@
                 </a:solidFill>
                 <a:latin typeface="Arial"/>
               </a:rPr>
-              <a:t>M1 PLAN</a:t>
+              <a:t>M1 CONTRACT</a:t>
             </a:r>
           </a:p>
         </p:txBody>
@@ -2486,2431 +2533,70 @@
                 </a:solidFill>
                 <a:latin typeface="Arial"/>
               </a:rPr>
-              <a:t>Six subtasks, each landing switched off first</a:t>
-            </a:r>
-          </a:p>
-        </p:txBody>
-      </p:sp>
-      <p:sp>
-        <p:nvSpPr>
-          <p:cNvPr id="4" name="TextBox 3"/>
-          <p:cNvSpPr txBox="1"/>
-          <p:nvPr/>
-        </p:nvSpPr>
-        <p:spPr>
-          <a:xfrm>
-            <a:off x="987552" y="2484882"/>
-            <a:ext cx="1748536" cy="326898"/>
-          </a:xfrm>
-          <a:prstGeom prst="rect">
-            <a:avLst/>
-          </a:prstGeom>
-          <a:noFill/>
-        </p:spPr>
-        <p:txBody>
-          <a:bodyPr wrap="square" lIns="0" rIns="0" tIns="0" bIns="0" anchor="t">
-            <a:spAutoFit/>
-          </a:bodyPr>
-          <a:lstStyle/>
-          <a:p>
-            <a:pPr algn="l">
-              <a:lnSpc>
-                <a:spcPct val="132000"/>
-              </a:lnSpc>
-            </a:pPr>
-            <a:r>
-              <a:rPr sz="1950" b="0" u="none" i="0" spc="150">
+              <a:t>One number becomes two: capacity and compute</a:t>
+            </a:r>
+          </a:p>
+        </p:txBody>
+      </p:sp>
+      <p:pic>
+        <p:nvPicPr>
+          <p:cNvPr id="4" name="figure" descr="fig_slots.png"/>
+          <p:cNvPicPr>
+            <a:picLocks noChangeAspect="1"/>
+          </p:cNvPicPr>
+          <p:nvPr/>
+        </p:nvPicPr>
+        <p:blipFill>
+          <a:blip r:embed="rId2"/>
+          <a:stretch>
+            <a:fillRect/>
+          </a:stretch>
+        </p:blipFill>
+        <p:spPr>
+          <a:xfrm>
+            <a:off x="1974738" y="2484882"/>
+            <a:ext cx="14338523" cy="5271516"/>
+          </a:xfrm>
+          <a:prstGeom prst="rect">
+            <a:avLst/>
+          </a:prstGeom>
+        </p:spPr>
+      </p:pic>
+      <p:sp>
+        <p:nvSpPr>
+          <p:cNvPr id="5" name="TextBox 4"/>
+          <p:cNvSpPr txBox="1"/>
+          <p:nvPr/>
+        </p:nvSpPr>
+        <p:spPr>
+          <a:xfrm>
+            <a:off x="987552" y="8030718"/>
+            <a:ext cx="16312896" cy="326898"/>
+          </a:xfrm>
+          <a:prstGeom prst="rect">
+            <a:avLst/>
+          </a:prstGeom>
+          <a:noFill/>
+        </p:spPr>
+        <p:txBody>
+          <a:bodyPr wrap="square" lIns="0" rIns="0" tIns="0" bIns="0" anchor="t">
+            <a:spAutoFit/>
+          </a:bodyPr>
+          <a:lstStyle/>
+          <a:p>
+            <a:pPr algn="l">
+              <a:lnSpc>
+                <a:spcPct val="132000"/>
+              </a:lnSpc>
+            </a:pPr>
+            <a:r>
+              <a:rPr sz="1950" b="0" u="none" i="0">
                 <a:solidFill>
                   <a:srgbClr val="A1A1AA"/>
                 </a:solidFill>
                 <a:latin typeface="Arial"/>
               </a:rPr>
-              <a:t>STEP</a:t>
-            </a:r>
-          </a:p>
-        </p:txBody>
-      </p:sp>
-      <p:sp>
-        <p:nvSpPr>
-          <p:cNvPr id="5" name="TextBox 4"/>
-          <p:cNvSpPr txBox="1"/>
-          <p:nvPr/>
-        </p:nvSpPr>
-        <p:spPr>
-          <a:xfrm>
-            <a:off x="2928112" y="2484882"/>
-            <a:ext cx="5945022" cy="326898"/>
-          </a:xfrm>
-          <a:prstGeom prst="rect">
-            <a:avLst/>
-          </a:prstGeom>
-          <a:noFill/>
-        </p:spPr>
-        <p:txBody>
-          <a:bodyPr wrap="square" lIns="0" rIns="0" tIns="0" bIns="0" anchor="t">
-            <a:spAutoFit/>
-          </a:bodyPr>
-          <a:lstStyle/>
-          <a:p>
-            <a:pPr algn="l">
-              <a:lnSpc>
-                <a:spcPct val="132000"/>
-              </a:lnSpc>
-            </a:pPr>
-            <a:r>
-              <a:rPr sz="1950" b="0" u="none" i="0" spc="150">
-                <a:solidFill>
-                  <a:srgbClr val="A1A1AA"/>
-                </a:solidFill>
-                <a:latin typeface="Arial"/>
-              </a:rPr>
-              <a:t>WHAT IT DELIVERS</a:t>
-            </a:r>
-          </a:p>
-        </p:txBody>
-      </p:sp>
-      <p:sp>
-        <p:nvSpPr>
-          <p:cNvPr id="6" name="TextBox 5"/>
-          <p:cNvSpPr txBox="1"/>
-          <p:nvPr/>
-        </p:nvSpPr>
-        <p:spPr>
-          <a:xfrm>
-            <a:off x="9065158" y="2484882"/>
-            <a:ext cx="2797657" cy="326898"/>
-          </a:xfrm>
-          <a:prstGeom prst="rect">
-            <a:avLst/>
-          </a:prstGeom>
-          <a:noFill/>
-        </p:spPr>
-        <p:txBody>
-          <a:bodyPr wrap="square" lIns="0" rIns="0" tIns="0" bIns="0" anchor="t">
-            <a:spAutoFit/>
-          </a:bodyPr>
-          <a:lstStyle/>
-          <a:p>
-            <a:pPr algn="l">
-              <a:lnSpc>
-                <a:spcPct val="132000"/>
-              </a:lnSpc>
-            </a:pPr>
-            <a:r>
-              <a:rPr sz="1950" b="0" u="none" i="0" spc="150">
-                <a:solidFill>
-                  <a:srgbClr val="A1A1AA"/>
-                </a:solidFill>
-                <a:latin typeface="Arial"/>
-              </a:rPr>
-              <a:t>STATUS</a:t>
-            </a:r>
-          </a:p>
-        </p:txBody>
-      </p:sp>
-      <p:sp>
-        <p:nvSpPr>
-          <p:cNvPr id="7" name="TextBox 6"/>
-          <p:cNvSpPr txBox="1"/>
-          <p:nvPr/>
-        </p:nvSpPr>
-        <p:spPr>
-          <a:xfrm>
-            <a:off x="12054840" y="2484882"/>
-            <a:ext cx="5245608" cy="326898"/>
-          </a:xfrm>
-          <a:prstGeom prst="rect">
-            <a:avLst/>
-          </a:prstGeom>
-          <a:noFill/>
-        </p:spPr>
-        <p:txBody>
-          <a:bodyPr wrap="square" lIns="0" rIns="0" tIns="0" bIns="0" anchor="t">
-            <a:spAutoFit/>
-          </a:bodyPr>
-          <a:lstStyle/>
-          <a:p>
-            <a:pPr algn="l">
-              <a:lnSpc>
-                <a:spcPct val="132000"/>
-              </a:lnSpc>
-            </a:pPr>
-            <a:r>
-              <a:rPr sz="1950" b="0" u="none" i="0" spc="150">
-                <a:solidFill>
-                  <a:srgbClr val="A1A1AA"/>
-                </a:solidFill>
-                <a:latin typeface="Arial"/>
-              </a:rPr>
-              <a:t>NOTE</a:t>
-            </a:r>
-          </a:p>
-        </p:txBody>
-      </p:sp>
-      <p:sp>
-        <p:nvSpPr>
-          <p:cNvPr id="8" name="rule"/>
-          <p:cNvSpPr/>
-          <p:nvPr/>
-        </p:nvSpPr>
-        <p:spPr>
-          <a:xfrm>
-            <a:off x="987552" y="2951226"/>
-            <a:ext cx="1748536" cy="10972"/>
-          </a:xfrm>
-          <a:prstGeom prst="rect">
-            <a:avLst/>
-          </a:prstGeom>
-          <a:solidFill>
-            <a:srgbClr val="E4E4E7"/>
-          </a:solidFill>
-          <a:ln>
-            <a:noFill/>
-          </a:ln>
-          <a:effectLst/>
-        </p:spPr>
-        <p:style>
-          <a:lnRef idx="1">
-            <a:schemeClr val="accent1"/>
-          </a:lnRef>
-          <a:fillRef idx="3">
-            <a:schemeClr val="accent1"/>
-          </a:fillRef>
-          <a:effectRef idx="2">
-            <a:schemeClr val="accent1"/>
-          </a:effectRef>
-          <a:fontRef idx="minor">
-            <a:schemeClr val="lt1"/>
-          </a:fontRef>
-        </p:style>
-        <p:txBody>
-          <a:bodyPr rtlCol="0" anchor="ctr"/>
-          <a:lstStyle/>
-          <a:p>
-            <a:pPr algn="ctr"/>
-          </a:p>
-        </p:txBody>
-      </p:sp>
-      <p:sp>
-        <p:nvSpPr>
-          <p:cNvPr id="9" name="TextBox 8"/>
-          <p:cNvSpPr txBox="1"/>
-          <p:nvPr/>
-        </p:nvSpPr>
-        <p:spPr>
-          <a:xfrm>
-            <a:off x="987552" y="3188970"/>
-            <a:ext cx="1748536" cy="402336"/>
-          </a:xfrm>
-          <a:prstGeom prst="rect">
-            <a:avLst/>
-          </a:prstGeom>
-          <a:noFill/>
-        </p:spPr>
-        <p:txBody>
-          <a:bodyPr wrap="square" lIns="0" rIns="0" tIns="0" bIns="0" anchor="t">
-            <a:spAutoFit/>
-          </a:bodyPr>
-          <a:lstStyle/>
-          <a:p>
-            <a:pPr algn="l">
-              <a:lnSpc>
-                <a:spcPct val="132000"/>
-              </a:lnSpc>
-            </a:pPr>
-            <a:r>
-              <a:rPr sz="2400" b="0" u="none" i="0">
-                <a:solidFill>
-                  <a:srgbClr val="18181B"/>
-                </a:solidFill>
-                <a:latin typeface="Arial"/>
-              </a:rPr>
-              <a:t>S0</a:t>
-            </a:r>
-          </a:p>
-        </p:txBody>
-      </p:sp>
-      <p:sp>
-        <p:nvSpPr>
-          <p:cNvPr id="10" name="rule"/>
-          <p:cNvSpPr/>
-          <p:nvPr/>
-        </p:nvSpPr>
-        <p:spPr>
-          <a:xfrm>
-            <a:off x="2928112" y="2951226"/>
-            <a:ext cx="5945022" cy="10972"/>
-          </a:xfrm>
-          <a:prstGeom prst="rect">
-            <a:avLst/>
-          </a:prstGeom>
-          <a:solidFill>
-            <a:srgbClr val="E4E4E7"/>
-          </a:solidFill>
-          <a:ln>
-            <a:noFill/>
-          </a:ln>
-          <a:effectLst/>
-        </p:spPr>
-        <p:style>
-          <a:lnRef idx="1">
-            <a:schemeClr val="accent1"/>
-          </a:lnRef>
-          <a:fillRef idx="3">
-            <a:schemeClr val="accent1"/>
-          </a:fillRef>
-          <a:effectRef idx="2">
-            <a:schemeClr val="accent1"/>
-          </a:effectRef>
-          <a:fontRef idx="minor">
-            <a:schemeClr val="lt1"/>
-          </a:fontRef>
-        </p:style>
-        <p:txBody>
-          <a:bodyPr rtlCol="0" anchor="ctr"/>
-          <a:lstStyle/>
-          <a:p>
-            <a:pPr algn="ctr"/>
-          </a:p>
-        </p:txBody>
-      </p:sp>
-      <p:sp>
-        <p:nvSpPr>
-          <p:cNvPr id="11" name="TextBox 10"/>
-          <p:cNvSpPr txBox="1"/>
-          <p:nvPr/>
-        </p:nvSpPr>
-        <p:spPr>
-          <a:xfrm>
-            <a:off x="2928112" y="3188970"/>
-            <a:ext cx="5945022" cy="326898"/>
-          </a:xfrm>
-          <a:prstGeom prst="rect">
-            <a:avLst/>
-          </a:prstGeom>
-          <a:noFill/>
-        </p:spPr>
-        <p:txBody>
-          <a:bodyPr wrap="square" lIns="0" rIns="0" tIns="0" bIns="0" anchor="t">
-            <a:spAutoFit/>
-          </a:bodyPr>
-          <a:lstStyle/>
-          <a:p>
-            <a:pPr algn="l">
-              <a:lnSpc>
-                <a:spcPct val="132000"/>
-              </a:lnSpc>
-            </a:pPr>
-            <a:r>
-              <a:rPr sz="1950" b="0" u="none" i="0">
-                <a:solidFill>
-                  <a:srgbClr val="52525B"/>
-                </a:solidFill>
-                <a:latin typeface="Arial"/>
-              </a:rPr>
-              <a:t>Slot addressing and metadata contract</a:t>
-            </a:r>
-          </a:p>
-        </p:txBody>
-      </p:sp>
-      <p:sp>
-        <p:nvSpPr>
-          <p:cNvPr id="12" name="rule"/>
-          <p:cNvSpPr/>
-          <p:nvPr/>
-        </p:nvSpPr>
-        <p:spPr>
-          <a:xfrm>
-            <a:off x="9065158" y="2951226"/>
-            <a:ext cx="2797657" cy="10972"/>
-          </a:xfrm>
-          <a:prstGeom prst="rect">
-            <a:avLst/>
-          </a:prstGeom>
-          <a:solidFill>
-            <a:srgbClr val="E4E4E7"/>
-          </a:solidFill>
-          <a:ln>
-            <a:noFill/>
-          </a:ln>
-          <a:effectLst/>
-        </p:spPr>
-        <p:style>
-          <a:lnRef idx="1">
-            <a:schemeClr val="accent1"/>
-          </a:lnRef>
-          <a:fillRef idx="3">
-            <a:schemeClr val="accent1"/>
-          </a:fillRef>
-          <a:effectRef idx="2">
-            <a:schemeClr val="accent1"/>
-          </a:effectRef>
-          <a:fontRef idx="minor">
-            <a:schemeClr val="lt1"/>
-          </a:fontRef>
-        </p:style>
-        <p:txBody>
-          <a:bodyPr rtlCol="0" anchor="ctr"/>
-          <a:lstStyle/>
-          <a:p>
-            <a:pPr algn="ctr"/>
-          </a:p>
-        </p:txBody>
-      </p:sp>
-      <p:sp>
-        <p:nvSpPr>
-          <p:cNvPr id="13" name="chip"/>
-          <p:cNvSpPr/>
-          <p:nvPr/>
-        </p:nvSpPr>
-        <p:spPr>
-          <a:xfrm>
-            <a:off x="9065158" y="3188970"/>
-            <a:ext cx="1484467" cy="495299"/>
-          </a:xfrm>
-          <a:prstGeom prst="roundRect">
-            <a:avLst>
-              <a:gd name="adj" fmla="val 50000"/>
-            </a:avLst>
-          </a:prstGeom>
-          <a:solidFill>
-            <a:srgbClr val="E9F0FE"/>
-          </a:solidFill>
-          <a:ln>
-            <a:noFill/>
-          </a:ln>
-          <a:effectLst/>
-        </p:spPr>
-        <p:style>
-          <a:lnRef idx="1">
-            <a:schemeClr val="accent1"/>
-          </a:lnRef>
-          <a:fillRef idx="3">
-            <a:schemeClr val="accent1"/>
-          </a:fillRef>
-          <a:effectRef idx="2">
-            <a:schemeClr val="accent1"/>
-          </a:effectRef>
-          <a:fontRef idx="minor">
-            <a:schemeClr val="lt1"/>
-          </a:fontRef>
-        </p:style>
-        <p:txBody>
-          <a:bodyPr rtlCol="0" anchor="ctr"/>
-          <a:lstStyle/>
-          <a:p>
-            <a:pPr algn="ctr"/>
-          </a:p>
-        </p:txBody>
-      </p:sp>
-      <p:sp>
-        <p:nvSpPr>
-          <p:cNvPr id="14" name="TextBox 13"/>
-          <p:cNvSpPr txBox="1"/>
-          <p:nvPr/>
-        </p:nvSpPr>
-        <p:spPr>
-          <a:xfrm>
-            <a:off x="9339478" y="3273170"/>
-            <a:ext cx="935827" cy="326898"/>
-          </a:xfrm>
-          <a:prstGeom prst="rect">
-            <a:avLst/>
-          </a:prstGeom>
-          <a:noFill/>
-        </p:spPr>
-        <p:txBody>
-          <a:bodyPr wrap="square" lIns="0" rIns="0" tIns="0" bIns="0" anchor="t">
-            <a:spAutoFit/>
-          </a:bodyPr>
-          <a:lstStyle/>
-          <a:p>
-            <a:pPr algn="l">
-              <a:lnSpc>
-                <a:spcPct val="132000"/>
-              </a:lnSpc>
-            </a:pPr>
-            <a:r>
-              <a:rPr sz="1950" b="0" u="none" i="0">
-                <a:solidFill>
-                  <a:srgbClr val="1D4ED8"/>
-                </a:solidFill>
-                <a:latin typeface="Arial"/>
-              </a:rPr>
-              <a:t>on track</a:t>
-            </a:r>
-          </a:p>
-        </p:txBody>
-      </p:sp>
-      <p:sp>
-        <p:nvSpPr>
-          <p:cNvPr id="15" name="rule"/>
-          <p:cNvSpPr/>
-          <p:nvPr/>
-        </p:nvSpPr>
-        <p:spPr>
-          <a:xfrm>
-            <a:off x="12054840" y="2951226"/>
-            <a:ext cx="5245608" cy="10972"/>
-          </a:xfrm>
-          <a:prstGeom prst="rect">
-            <a:avLst/>
-          </a:prstGeom>
-          <a:solidFill>
-            <a:srgbClr val="E4E4E7"/>
-          </a:solidFill>
-          <a:ln>
-            <a:noFill/>
-          </a:ln>
-          <a:effectLst/>
-        </p:spPr>
-        <p:style>
-          <a:lnRef idx="1">
-            <a:schemeClr val="accent1"/>
-          </a:lnRef>
-          <a:fillRef idx="3">
-            <a:schemeClr val="accent1"/>
-          </a:fillRef>
-          <a:effectRef idx="2">
-            <a:schemeClr val="accent1"/>
-          </a:effectRef>
-          <a:fontRef idx="minor">
-            <a:schemeClr val="lt1"/>
-          </a:fontRef>
-        </p:style>
-        <p:txBody>
-          <a:bodyPr rtlCol="0" anchor="ctr"/>
-          <a:lstStyle/>
-          <a:p>
-            <a:pPr algn="ctr"/>
-          </a:p>
-        </p:txBody>
-      </p:sp>
-      <p:sp>
-        <p:nvSpPr>
-          <p:cNvPr id="16" name="TextBox 15"/>
-          <p:cNvSpPr txBox="1"/>
-          <p:nvPr/>
-        </p:nvSpPr>
-        <p:spPr>
-          <a:xfrm>
-            <a:off x="12054840" y="3188970"/>
-            <a:ext cx="5245608" cy="326898"/>
-          </a:xfrm>
-          <a:prstGeom prst="rect">
-            <a:avLst/>
-          </a:prstGeom>
-          <a:noFill/>
-        </p:spPr>
-        <p:txBody>
-          <a:bodyPr wrap="square" lIns="0" rIns="0" tIns="0" bIns="0" anchor="t">
-            <a:spAutoFit/>
-          </a:bodyPr>
-          <a:lstStyle/>
-          <a:p>
-            <a:pPr algn="l">
-              <a:lnSpc>
-                <a:spcPct val="132000"/>
-              </a:lnSpc>
-            </a:pPr>
-            <a:r>
-              <a:rPr sz="1950" b="0" u="none" i="0">
-                <a:solidFill>
-                  <a:srgbClr val="52525B"/>
-                </a:solidFill>
-                <a:latin typeface="Arial"/>
-              </a:rPr>
-              <a:t>Design written, awaiting review</a:t>
-            </a:r>
-          </a:p>
-        </p:txBody>
-      </p:sp>
-      <p:sp>
-        <p:nvSpPr>
-          <p:cNvPr id="17" name="rule"/>
-          <p:cNvSpPr/>
-          <p:nvPr/>
-        </p:nvSpPr>
-        <p:spPr>
-          <a:xfrm>
-            <a:off x="987552" y="3774186"/>
-            <a:ext cx="1748536" cy="10972"/>
-          </a:xfrm>
-          <a:prstGeom prst="rect">
-            <a:avLst/>
-          </a:prstGeom>
-          <a:solidFill>
-            <a:srgbClr val="E4E4E7"/>
-          </a:solidFill>
-          <a:ln>
-            <a:noFill/>
-          </a:ln>
-          <a:effectLst/>
-        </p:spPr>
-        <p:style>
-          <a:lnRef idx="1">
-            <a:schemeClr val="accent1"/>
-          </a:lnRef>
-          <a:fillRef idx="3">
-            <a:schemeClr val="accent1"/>
-          </a:fillRef>
-          <a:effectRef idx="2">
-            <a:schemeClr val="accent1"/>
-          </a:effectRef>
-          <a:fontRef idx="minor">
-            <a:schemeClr val="lt1"/>
-          </a:fontRef>
-        </p:style>
-        <p:txBody>
-          <a:bodyPr rtlCol="0" anchor="ctr"/>
-          <a:lstStyle/>
-          <a:p>
-            <a:pPr algn="ctr"/>
-          </a:p>
-        </p:txBody>
-      </p:sp>
-      <p:sp>
-        <p:nvSpPr>
-          <p:cNvPr id="18" name="TextBox 17"/>
-          <p:cNvSpPr txBox="1"/>
-          <p:nvPr/>
-        </p:nvSpPr>
-        <p:spPr>
-          <a:xfrm>
-            <a:off x="987552" y="4011930"/>
-            <a:ext cx="1748536" cy="402336"/>
-          </a:xfrm>
-          <a:prstGeom prst="rect">
-            <a:avLst/>
-          </a:prstGeom>
-          <a:noFill/>
-        </p:spPr>
-        <p:txBody>
-          <a:bodyPr wrap="square" lIns="0" rIns="0" tIns="0" bIns="0" anchor="t">
-            <a:spAutoFit/>
-          </a:bodyPr>
-          <a:lstStyle/>
-          <a:p>
-            <a:pPr algn="l">
-              <a:lnSpc>
-                <a:spcPct val="132000"/>
-              </a:lnSpc>
-            </a:pPr>
-            <a:r>
-              <a:rPr sz="2400" b="0" u="none" i="0">
-                <a:solidFill>
-                  <a:srgbClr val="18181B"/>
-                </a:solidFill>
-                <a:latin typeface="Arial"/>
-              </a:rPr>
-              <a:t>S1</a:t>
-            </a:r>
-          </a:p>
-        </p:txBody>
-      </p:sp>
-      <p:sp>
-        <p:nvSpPr>
-          <p:cNvPr id="19" name="rule"/>
-          <p:cNvSpPr/>
-          <p:nvPr/>
-        </p:nvSpPr>
-        <p:spPr>
-          <a:xfrm>
-            <a:off x="2928112" y="3774186"/>
-            <a:ext cx="5945022" cy="10972"/>
-          </a:xfrm>
-          <a:prstGeom prst="rect">
-            <a:avLst/>
-          </a:prstGeom>
-          <a:solidFill>
-            <a:srgbClr val="E4E4E7"/>
-          </a:solidFill>
-          <a:ln>
-            <a:noFill/>
-          </a:ln>
-          <a:effectLst/>
-        </p:spPr>
-        <p:style>
-          <a:lnRef idx="1">
-            <a:schemeClr val="accent1"/>
-          </a:lnRef>
-          <a:fillRef idx="3">
-            <a:schemeClr val="accent1"/>
-          </a:fillRef>
-          <a:effectRef idx="2">
-            <a:schemeClr val="accent1"/>
-          </a:effectRef>
-          <a:fontRef idx="minor">
-            <a:schemeClr val="lt1"/>
-          </a:fontRef>
-        </p:style>
-        <p:txBody>
-          <a:bodyPr rtlCol="0" anchor="ctr"/>
-          <a:lstStyle/>
-          <a:p>
-            <a:pPr algn="ctr"/>
-          </a:p>
-        </p:txBody>
-      </p:sp>
-      <p:sp>
-        <p:nvSpPr>
-          <p:cNvPr id="20" name="TextBox 19"/>
-          <p:cNvSpPr txBox="1"/>
-          <p:nvPr/>
-        </p:nvSpPr>
-        <p:spPr>
-          <a:xfrm>
-            <a:off x="2928112" y="4011930"/>
-            <a:ext cx="5945022" cy="326898"/>
-          </a:xfrm>
-          <a:prstGeom prst="rect">
-            <a:avLst/>
-          </a:prstGeom>
-          <a:noFill/>
-        </p:spPr>
-        <p:txBody>
-          <a:bodyPr wrap="square" lIns="0" rIns="0" tIns="0" bIns="0" anchor="t">
-            <a:spAutoFit/>
-          </a:bodyPr>
-          <a:lstStyle/>
-          <a:p>
-            <a:pPr algn="l">
-              <a:lnSpc>
-                <a:spcPct val="132000"/>
-              </a:lnSpc>
-            </a:pPr>
-            <a:r>
-              <a:rPr sz="1950" b="0" u="none" i="0">
-                <a:solidFill>
-                  <a:srgbClr val="52525B"/>
-                </a:solidFill>
-                <a:latin typeface="Arial"/>
-              </a:rPr>
-              <a:t>Multi-slot cache, inert</a:t>
-            </a:r>
-          </a:p>
-        </p:txBody>
-      </p:sp>
-      <p:sp>
-        <p:nvSpPr>
-          <p:cNvPr id="21" name="rule"/>
-          <p:cNvSpPr/>
-          <p:nvPr/>
-        </p:nvSpPr>
-        <p:spPr>
-          <a:xfrm>
-            <a:off x="9065158" y="3774186"/>
-            <a:ext cx="2797657" cy="10972"/>
-          </a:xfrm>
-          <a:prstGeom prst="rect">
-            <a:avLst/>
-          </a:prstGeom>
-          <a:solidFill>
-            <a:srgbClr val="E4E4E7"/>
-          </a:solidFill>
-          <a:ln>
-            <a:noFill/>
-          </a:ln>
-          <a:effectLst/>
-        </p:spPr>
-        <p:style>
-          <a:lnRef idx="1">
-            <a:schemeClr val="accent1"/>
-          </a:lnRef>
-          <a:fillRef idx="3">
-            <a:schemeClr val="accent1"/>
-          </a:fillRef>
-          <a:effectRef idx="2">
-            <a:schemeClr val="accent1"/>
-          </a:effectRef>
-          <a:fontRef idx="minor">
-            <a:schemeClr val="lt1"/>
-          </a:fontRef>
-        </p:style>
-        <p:txBody>
-          <a:bodyPr rtlCol="0" anchor="ctr"/>
-          <a:lstStyle/>
-          <a:p>
-            <a:pPr algn="ctr"/>
-          </a:p>
-        </p:txBody>
-      </p:sp>
-      <p:sp>
-        <p:nvSpPr>
-          <p:cNvPr id="22" name="chip"/>
-          <p:cNvSpPr/>
-          <p:nvPr/>
-        </p:nvSpPr>
-        <p:spPr>
-          <a:xfrm>
-            <a:off x="9065158" y="4011930"/>
-            <a:ext cx="1484963" cy="495299"/>
-          </a:xfrm>
-          <a:prstGeom prst="roundRect">
-            <a:avLst>
-              <a:gd name="adj" fmla="val 50000"/>
-            </a:avLst>
-          </a:prstGeom>
-          <a:solidFill>
-            <a:srgbClr val="F4F4F5"/>
-          </a:solidFill>
-          <a:ln>
-            <a:noFill/>
-          </a:ln>
-          <a:effectLst/>
-        </p:spPr>
-        <p:style>
-          <a:lnRef idx="1">
-            <a:schemeClr val="accent1"/>
-          </a:lnRef>
-          <a:fillRef idx="3">
-            <a:schemeClr val="accent1"/>
-          </a:fillRef>
-          <a:effectRef idx="2">
-            <a:schemeClr val="accent1"/>
-          </a:effectRef>
-          <a:fontRef idx="minor">
-            <a:schemeClr val="lt1"/>
-          </a:fontRef>
-        </p:style>
-        <p:txBody>
-          <a:bodyPr rtlCol="0" anchor="ctr"/>
-          <a:lstStyle/>
-          <a:p>
-            <a:pPr algn="ctr"/>
-          </a:p>
-        </p:txBody>
-      </p:sp>
-      <p:sp>
-        <p:nvSpPr>
-          <p:cNvPr id="23" name="TextBox 22"/>
-          <p:cNvSpPr txBox="1"/>
-          <p:nvPr/>
-        </p:nvSpPr>
-        <p:spPr>
-          <a:xfrm>
-            <a:off x="9339478" y="4096131"/>
-            <a:ext cx="936323" cy="326898"/>
-          </a:xfrm>
-          <a:prstGeom prst="rect">
-            <a:avLst/>
-          </a:prstGeom>
-          <a:noFill/>
-        </p:spPr>
-        <p:txBody>
-          <a:bodyPr wrap="square" lIns="0" rIns="0" tIns="0" bIns="0" anchor="t">
-            <a:spAutoFit/>
-          </a:bodyPr>
-          <a:lstStyle/>
-          <a:p>
-            <a:pPr algn="l">
-              <a:lnSpc>
-                <a:spcPct val="132000"/>
-              </a:lnSpc>
-            </a:pPr>
-            <a:r>
-              <a:rPr sz="1950" b="0" u="none" i="0">
-                <a:solidFill>
-                  <a:srgbClr val="52525B"/>
-                </a:solidFill>
-                <a:latin typeface="Arial"/>
-              </a:rPr>
-              <a:t>planned</a:t>
-            </a:r>
-          </a:p>
-        </p:txBody>
-      </p:sp>
-      <p:sp>
-        <p:nvSpPr>
-          <p:cNvPr id="24" name="rule"/>
-          <p:cNvSpPr/>
-          <p:nvPr/>
-        </p:nvSpPr>
-        <p:spPr>
-          <a:xfrm>
-            <a:off x="12054840" y="3774186"/>
-            <a:ext cx="5245608" cy="10972"/>
-          </a:xfrm>
-          <a:prstGeom prst="rect">
-            <a:avLst/>
-          </a:prstGeom>
-          <a:solidFill>
-            <a:srgbClr val="E4E4E7"/>
-          </a:solidFill>
-          <a:ln>
-            <a:noFill/>
-          </a:ln>
-          <a:effectLst/>
-        </p:spPr>
-        <p:style>
-          <a:lnRef idx="1">
-            <a:schemeClr val="accent1"/>
-          </a:lnRef>
-          <a:fillRef idx="3">
-            <a:schemeClr val="accent1"/>
-          </a:fillRef>
-          <a:effectRef idx="2">
-            <a:schemeClr val="accent1"/>
-          </a:effectRef>
-          <a:fontRef idx="minor">
-            <a:schemeClr val="lt1"/>
-          </a:fontRef>
-        </p:style>
-        <p:txBody>
-          <a:bodyPr rtlCol="0" anchor="ctr"/>
-          <a:lstStyle/>
-          <a:p>
-            <a:pPr algn="ctr"/>
-          </a:p>
-        </p:txBody>
-      </p:sp>
-      <p:sp>
-        <p:nvSpPr>
-          <p:cNvPr id="25" name="TextBox 24"/>
-          <p:cNvSpPr txBox="1"/>
-          <p:nvPr/>
-        </p:nvSpPr>
-        <p:spPr>
-          <a:xfrm>
-            <a:off x="12054840" y="4011930"/>
-            <a:ext cx="5245608" cy="326898"/>
-          </a:xfrm>
-          <a:prstGeom prst="rect">
-            <a:avLst/>
-          </a:prstGeom>
-          <a:noFill/>
-        </p:spPr>
-        <p:txBody>
-          <a:bodyPr wrap="square" lIns="0" rIns="0" tIns="0" bIns="0" anchor="t">
-            <a:spAutoFit/>
-          </a:bodyPr>
-          <a:lstStyle/>
-          <a:p>
-            <a:pPr algn="l">
-              <a:lnSpc>
-                <a:spcPct val="132000"/>
-              </a:lnSpc>
-            </a:pPr>
-            <a:r>
-              <a:rPr sz="1950" b="0" u="none" i="0">
-                <a:solidFill>
-                  <a:srgbClr val="52525B"/>
-                </a:solidFill>
-                <a:latin typeface="Arial"/>
-              </a:rPr>
-              <a:t>Must be byte-identical at one slot</a:t>
-            </a:r>
-          </a:p>
-        </p:txBody>
-      </p:sp>
-      <p:sp>
-        <p:nvSpPr>
-          <p:cNvPr id="26" name="rule"/>
-          <p:cNvSpPr/>
-          <p:nvPr/>
-        </p:nvSpPr>
-        <p:spPr>
-          <a:xfrm>
-            <a:off x="987552" y="4597146"/>
-            <a:ext cx="1748536" cy="10972"/>
-          </a:xfrm>
-          <a:prstGeom prst="rect">
-            <a:avLst/>
-          </a:prstGeom>
-          <a:solidFill>
-            <a:srgbClr val="E4E4E7"/>
-          </a:solidFill>
-          <a:ln>
-            <a:noFill/>
-          </a:ln>
-          <a:effectLst/>
-        </p:spPr>
-        <p:style>
-          <a:lnRef idx="1">
-            <a:schemeClr val="accent1"/>
-          </a:lnRef>
-          <a:fillRef idx="3">
-            <a:schemeClr val="accent1"/>
-          </a:fillRef>
-          <a:effectRef idx="2">
-            <a:schemeClr val="accent1"/>
-          </a:effectRef>
-          <a:fontRef idx="minor">
-            <a:schemeClr val="lt1"/>
-          </a:fontRef>
-        </p:style>
-        <p:txBody>
-          <a:bodyPr rtlCol="0" anchor="ctr"/>
-          <a:lstStyle/>
-          <a:p>
-            <a:pPr algn="ctr"/>
-          </a:p>
-        </p:txBody>
-      </p:sp>
-      <p:sp>
-        <p:nvSpPr>
-          <p:cNvPr id="27" name="TextBox 26"/>
-          <p:cNvSpPr txBox="1"/>
-          <p:nvPr/>
-        </p:nvSpPr>
-        <p:spPr>
-          <a:xfrm>
-            <a:off x="987552" y="4834890"/>
-            <a:ext cx="1748536" cy="402336"/>
-          </a:xfrm>
-          <a:prstGeom prst="rect">
-            <a:avLst/>
-          </a:prstGeom>
-          <a:noFill/>
-        </p:spPr>
-        <p:txBody>
-          <a:bodyPr wrap="square" lIns="0" rIns="0" tIns="0" bIns="0" anchor="t">
-            <a:spAutoFit/>
-          </a:bodyPr>
-          <a:lstStyle/>
-          <a:p>
-            <a:pPr algn="l">
-              <a:lnSpc>
-                <a:spcPct val="132000"/>
-              </a:lnSpc>
-            </a:pPr>
-            <a:r>
-              <a:rPr sz="2400" b="0" u="none" i="0">
-                <a:solidFill>
-                  <a:srgbClr val="18181B"/>
-                </a:solidFill>
-                <a:latin typeface="Arial"/>
-              </a:rPr>
-              <a:t>S2</a:t>
-            </a:r>
-          </a:p>
-        </p:txBody>
-      </p:sp>
-      <p:sp>
-        <p:nvSpPr>
-          <p:cNvPr id="28" name="rule"/>
-          <p:cNvSpPr/>
-          <p:nvPr/>
-        </p:nvSpPr>
-        <p:spPr>
-          <a:xfrm>
-            <a:off x="2928112" y="4597146"/>
-            <a:ext cx="5945022" cy="10972"/>
-          </a:xfrm>
-          <a:prstGeom prst="rect">
-            <a:avLst/>
-          </a:prstGeom>
-          <a:solidFill>
-            <a:srgbClr val="E4E4E7"/>
-          </a:solidFill>
-          <a:ln>
-            <a:noFill/>
-          </a:ln>
-          <a:effectLst/>
-        </p:spPr>
-        <p:style>
-          <a:lnRef idx="1">
-            <a:schemeClr val="accent1"/>
-          </a:lnRef>
-          <a:fillRef idx="3">
-            <a:schemeClr val="accent1"/>
-          </a:fillRef>
-          <a:effectRef idx="2">
-            <a:schemeClr val="accent1"/>
-          </a:effectRef>
-          <a:fontRef idx="minor">
-            <a:schemeClr val="lt1"/>
-          </a:fontRef>
-        </p:style>
-        <p:txBody>
-          <a:bodyPr rtlCol="0" anchor="ctr"/>
-          <a:lstStyle/>
-          <a:p>
-            <a:pPr algn="ctr"/>
-          </a:p>
-        </p:txBody>
-      </p:sp>
-      <p:sp>
-        <p:nvSpPr>
-          <p:cNvPr id="29" name="TextBox 28"/>
-          <p:cNvSpPr txBox="1"/>
-          <p:nvPr/>
-        </p:nvSpPr>
-        <p:spPr>
-          <a:xfrm>
-            <a:off x="2928112" y="4834890"/>
-            <a:ext cx="5945022" cy="326898"/>
-          </a:xfrm>
-          <a:prstGeom prst="rect">
-            <a:avLst/>
-          </a:prstGeom>
-          <a:noFill/>
-        </p:spPr>
-        <p:txBody>
-          <a:bodyPr wrap="square" lIns="0" rIns="0" tIns="0" bIns="0" anchor="t">
-            <a:spAutoFit/>
-          </a:bodyPr>
-          <a:lstStyle/>
-          <a:p>
-            <a:pPr algn="l">
-              <a:lnSpc>
-                <a:spcPct val="132000"/>
-              </a:lnSpc>
-            </a:pPr>
-            <a:r>
-              <a:rPr sz="1950" b="0" u="none" i="0">
-                <a:solidFill>
-                  <a:srgbClr val="52525B"/>
-                </a:solidFill>
-                <a:latin typeface="Arial"/>
-              </a:rPr>
-              <a:t>Retain and extend into a chosen slot</a:t>
-            </a:r>
-          </a:p>
-        </p:txBody>
-      </p:sp>
-      <p:sp>
-        <p:nvSpPr>
-          <p:cNvPr id="30" name="rule"/>
-          <p:cNvSpPr/>
-          <p:nvPr/>
-        </p:nvSpPr>
-        <p:spPr>
-          <a:xfrm>
-            <a:off x="9065158" y="4597146"/>
-            <a:ext cx="2797657" cy="10972"/>
-          </a:xfrm>
-          <a:prstGeom prst="rect">
-            <a:avLst/>
-          </a:prstGeom>
-          <a:solidFill>
-            <a:srgbClr val="E4E4E7"/>
-          </a:solidFill>
-          <a:ln>
-            <a:noFill/>
-          </a:ln>
-          <a:effectLst/>
-        </p:spPr>
-        <p:style>
-          <a:lnRef idx="1">
-            <a:schemeClr val="accent1"/>
-          </a:lnRef>
-          <a:fillRef idx="3">
-            <a:schemeClr val="accent1"/>
-          </a:fillRef>
-          <a:effectRef idx="2">
-            <a:schemeClr val="accent1"/>
-          </a:effectRef>
-          <a:fontRef idx="minor">
-            <a:schemeClr val="lt1"/>
-          </a:fontRef>
-        </p:style>
-        <p:txBody>
-          <a:bodyPr rtlCol="0" anchor="ctr"/>
-          <a:lstStyle/>
-          <a:p>
-            <a:pPr algn="ctr"/>
-          </a:p>
-        </p:txBody>
-      </p:sp>
-      <p:sp>
-        <p:nvSpPr>
-          <p:cNvPr id="31" name="chip"/>
-          <p:cNvSpPr/>
-          <p:nvPr/>
-        </p:nvSpPr>
-        <p:spPr>
-          <a:xfrm>
-            <a:off x="9065158" y="4834890"/>
-            <a:ext cx="1484963" cy="495299"/>
-          </a:xfrm>
-          <a:prstGeom prst="roundRect">
-            <a:avLst>
-              <a:gd name="adj" fmla="val 50000"/>
-            </a:avLst>
-          </a:prstGeom>
-          <a:solidFill>
-            <a:srgbClr val="F4F4F5"/>
-          </a:solidFill>
-          <a:ln>
-            <a:noFill/>
-          </a:ln>
-          <a:effectLst/>
-        </p:spPr>
-        <p:style>
-          <a:lnRef idx="1">
-            <a:schemeClr val="accent1"/>
-          </a:lnRef>
-          <a:fillRef idx="3">
-            <a:schemeClr val="accent1"/>
-          </a:fillRef>
-          <a:effectRef idx="2">
-            <a:schemeClr val="accent1"/>
-          </a:effectRef>
-          <a:fontRef idx="minor">
-            <a:schemeClr val="lt1"/>
-          </a:fontRef>
-        </p:style>
-        <p:txBody>
-          <a:bodyPr rtlCol="0" anchor="ctr"/>
-          <a:lstStyle/>
-          <a:p>
-            <a:pPr algn="ctr"/>
-          </a:p>
-        </p:txBody>
-      </p:sp>
-      <p:sp>
-        <p:nvSpPr>
-          <p:cNvPr id="32" name="TextBox 31"/>
-          <p:cNvSpPr txBox="1"/>
-          <p:nvPr/>
-        </p:nvSpPr>
-        <p:spPr>
-          <a:xfrm>
-            <a:off x="9339478" y="4919091"/>
-            <a:ext cx="936323" cy="326898"/>
-          </a:xfrm>
-          <a:prstGeom prst="rect">
-            <a:avLst/>
-          </a:prstGeom>
-          <a:noFill/>
-        </p:spPr>
-        <p:txBody>
-          <a:bodyPr wrap="square" lIns="0" rIns="0" tIns="0" bIns="0" anchor="t">
-            <a:spAutoFit/>
-          </a:bodyPr>
-          <a:lstStyle/>
-          <a:p>
-            <a:pPr algn="l">
-              <a:lnSpc>
-                <a:spcPct val="132000"/>
-              </a:lnSpc>
-            </a:pPr>
-            <a:r>
-              <a:rPr sz="1950" b="0" u="none" i="0">
-                <a:solidFill>
-                  <a:srgbClr val="52525B"/>
-                </a:solidFill>
-                <a:latin typeface="Arial"/>
-              </a:rPr>
-              <a:t>planned</a:t>
-            </a:r>
-          </a:p>
-        </p:txBody>
-      </p:sp>
-      <p:sp>
-        <p:nvSpPr>
-          <p:cNvPr id="33" name="rule"/>
-          <p:cNvSpPr/>
-          <p:nvPr/>
-        </p:nvSpPr>
-        <p:spPr>
-          <a:xfrm>
-            <a:off x="12054840" y="4597146"/>
-            <a:ext cx="5245608" cy="10972"/>
-          </a:xfrm>
-          <a:prstGeom prst="rect">
-            <a:avLst/>
-          </a:prstGeom>
-          <a:solidFill>
-            <a:srgbClr val="E4E4E7"/>
-          </a:solidFill>
-          <a:ln>
-            <a:noFill/>
-          </a:ln>
-          <a:effectLst/>
-        </p:spPr>
-        <p:style>
-          <a:lnRef idx="1">
-            <a:schemeClr val="accent1"/>
-          </a:lnRef>
-          <a:fillRef idx="3">
-            <a:schemeClr val="accent1"/>
-          </a:fillRef>
-          <a:effectRef idx="2">
-            <a:schemeClr val="accent1"/>
-          </a:effectRef>
-          <a:fontRef idx="minor">
-            <a:schemeClr val="lt1"/>
-          </a:fontRef>
-        </p:style>
-        <p:txBody>
-          <a:bodyPr rtlCol="0" anchor="ctr"/>
-          <a:lstStyle/>
-          <a:p>
-            <a:pPr algn="ctr"/>
-          </a:p>
-        </p:txBody>
-      </p:sp>
-      <p:sp>
-        <p:nvSpPr>
-          <p:cNvPr id="34" name="TextBox 33"/>
-          <p:cNvSpPr txBox="1"/>
-          <p:nvPr/>
-        </p:nvSpPr>
-        <p:spPr>
-          <a:xfrm>
-            <a:off x="12054840" y="4834890"/>
-            <a:ext cx="5245608" cy="326898"/>
-          </a:xfrm>
-          <a:prstGeom prst="rect">
-            <a:avLst/>
-          </a:prstGeom>
-          <a:noFill/>
-        </p:spPr>
-        <p:txBody>
-          <a:bodyPr wrap="square" lIns="0" rIns="0" tIns="0" bIns="0" anchor="t">
-            <a:spAutoFit/>
-          </a:bodyPr>
-          <a:lstStyle/>
-          <a:p>
-            <a:pPr algn="l">
-              <a:lnSpc>
-                <a:spcPct val="132000"/>
-              </a:lnSpc>
-            </a:pPr>
-            <a:r>
-              <a:rPr sz="1950" b="0" u="none" i="0">
-                <a:solidFill>
-                  <a:srgbClr val="52525B"/>
-                </a:solidFill>
-                <a:latin typeface="Arial"/>
-              </a:rPr>
-              <a:t>Includes partial retain</a:t>
-            </a:r>
-          </a:p>
-        </p:txBody>
-      </p:sp>
-      <p:sp>
-        <p:nvSpPr>
-          <p:cNvPr id="35" name="rule"/>
-          <p:cNvSpPr/>
-          <p:nvPr/>
-        </p:nvSpPr>
-        <p:spPr>
-          <a:xfrm>
-            <a:off x="987552" y="5420106"/>
-            <a:ext cx="1748536" cy="10972"/>
-          </a:xfrm>
-          <a:prstGeom prst="rect">
-            <a:avLst/>
-          </a:prstGeom>
-          <a:solidFill>
-            <a:srgbClr val="E4E4E7"/>
-          </a:solidFill>
-          <a:ln>
-            <a:noFill/>
-          </a:ln>
-          <a:effectLst/>
-        </p:spPr>
-        <p:style>
-          <a:lnRef idx="1">
-            <a:schemeClr val="accent1"/>
-          </a:lnRef>
-          <a:fillRef idx="3">
-            <a:schemeClr val="accent1"/>
-          </a:fillRef>
-          <a:effectRef idx="2">
-            <a:schemeClr val="accent1"/>
-          </a:effectRef>
-          <a:fontRef idx="minor">
-            <a:schemeClr val="lt1"/>
-          </a:fontRef>
-        </p:style>
-        <p:txBody>
-          <a:bodyPr rtlCol="0" anchor="ctr"/>
-          <a:lstStyle/>
-          <a:p>
-            <a:pPr algn="ctr"/>
-          </a:p>
-        </p:txBody>
-      </p:sp>
-      <p:sp>
-        <p:nvSpPr>
-          <p:cNvPr id="36" name="TextBox 35"/>
-          <p:cNvSpPr txBox="1"/>
-          <p:nvPr/>
-        </p:nvSpPr>
-        <p:spPr>
-          <a:xfrm>
-            <a:off x="987552" y="5657850"/>
-            <a:ext cx="1748536" cy="402336"/>
-          </a:xfrm>
-          <a:prstGeom prst="rect">
-            <a:avLst/>
-          </a:prstGeom>
-          <a:noFill/>
-        </p:spPr>
-        <p:txBody>
-          <a:bodyPr wrap="square" lIns="0" rIns="0" tIns="0" bIns="0" anchor="t">
-            <a:spAutoFit/>
-          </a:bodyPr>
-          <a:lstStyle/>
-          <a:p>
-            <a:pPr algn="l">
-              <a:lnSpc>
-                <a:spcPct val="132000"/>
-              </a:lnSpc>
-            </a:pPr>
-            <a:r>
-              <a:rPr sz="2400" b="0" u="none" i="0">
-                <a:solidFill>
-                  <a:srgbClr val="18181B"/>
-                </a:solidFill>
-                <a:latin typeface="Arial"/>
-              </a:rPr>
-              <a:t>S3</a:t>
-            </a:r>
-          </a:p>
-        </p:txBody>
-      </p:sp>
-      <p:sp>
-        <p:nvSpPr>
-          <p:cNvPr id="37" name="rule"/>
-          <p:cNvSpPr/>
-          <p:nvPr/>
-        </p:nvSpPr>
-        <p:spPr>
-          <a:xfrm>
-            <a:off x="2928112" y="5420106"/>
-            <a:ext cx="5945022" cy="10972"/>
-          </a:xfrm>
-          <a:prstGeom prst="rect">
-            <a:avLst/>
-          </a:prstGeom>
-          <a:solidFill>
-            <a:srgbClr val="E4E4E7"/>
-          </a:solidFill>
-          <a:ln>
-            <a:noFill/>
-          </a:ln>
-          <a:effectLst/>
-        </p:spPr>
-        <p:style>
-          <a:lnRef idx="1">
-            <a:schemeClr val="accent1"/>
-          </a:lnRef>
-          <a:fillRef idx="3">
-            <a:schemeClr val="accent1"/>
-          </a:fillRef>
-          <a:effectRef idx="2">
-            <a:schemeClr val="accent1"/>
-          </a:effectRef>
-          <a:fontRef idx="minor">
-            <a:schemeClr val="lt1"/>
-          </a:fontRef>
-        </p:style>
-        <p:txBody>
-          <a:bodyPr rtlCol="0" anchor="ctr"/>
-          <a:lstStyle/>
-          <a:p>
-            <a:pPr algn="ctr"/>
-          </a:p>
-        </p:txBody>
-      </p:sp>
-      <p:sp>
-        <p:nvSpPr>
-          <p:cNvPr id="38" name="TextBox 37"/>
-          <p:cNvSpPr txBox="1"/>
-          <p:nvPr/>
-        </p:nvSpPr>
-        <p:spPr>
-          <a:xfrm>
-            <a:off x="2928112" y="5657850"/>
-            <a:ext cx="5945022" cy="326898"/>
-          </a:xfrm>
-          <a:prstGeom prst="rect">
-            <a:avLst/>
-          </a:prstGeom>
-          <a:noFill/>
-        </p:spPr>
-        <p:txBody>
-          <a:bodyPr wrap="square" lIns="0" rIns="0" tIns="0" bIns="0" anchor="t">
-            <a:spAutoFit/>
-          </a:bodyPr>
-          <a:lstStyle/>
-          <a:p>
-            <a:pPr algn="l">
-              <a:lnSpc>
-                <a:spcPct val="132000"/>
-              </a:lnSpc>
-            </a:pPr>
-            <a:r>
-              <a:rPr sz="1950" b="0" u="none" i="0">
-                <a:solidFill>
-                  <a:srgbClr val="52525B"/>
-                </a:solidFill>
-                <a:latin typeface="Arial"/>
-              </a:rPr>
-              <a:t>Hit detection, eviction, miss handling</a:t>
-            </a:r>
-          </a:p>
-        </p:txBody>
-      </p:sp>
-      <p:sp>
-        <p:nvSpPr>
-          <p:cNvPr id="39" name="rule"/>
-          <p:cNvSpPr/>
-          <p:nvPr/>
-        </p:nvSpPr>
-        <p:spPr>
-          <a:xfrm>
-            <a:off x="9065158" y="5420106"/>
-            <a:ext cx="2797657" cy="10972"/>
-          </a:xfrm>
-          <a:prstGeom prst="rect">
-            <a:avLst/>
-          </a:prstGeom>
-          <a:solidFill>
-            <a:srgbClr val="E4E4E7"/>
-          </a:solidFill>
-          <a:ln>
-            <a:noFill/>
-          </a:ln>
-          <a:effectLst/>
-        </p:spPr>
-        <p:style>
-          <a:lnRef idx="1">
-            <a:schemeClr val="accent1"/>
-          </a:lnRef>
-          <a:fillRef idx="3">
-            <a:schemeClr val="accent1"/>
-          </a:fillRef>
-          <a:effectRef idx="2">
-            <a:schemeClr val="accent1"/>
-          </a:effectRef>
-          <a:fontRef idx="minor">
-            <a:schemeClr val="lt1"/>
-          </a:fontRef>
-        </p:style>
-        <p:txBody>
-          <a:bodyPr rtlCol="0" anchor="ctr"/>
-          <a:lstStyle/>
-          <a:p>
-            <a:pPr algn="ctr"/>
-          </a:p>
-        </p:txBody>
-      </p:sp>
-      <p:sp>
-        <p:nvSpPr>
-          <p:cNvPr id="40" name="chip"/>
-          <p:cNvSpPr/>
-          <p:nvPr/>
-        </p:nvSpPr>
-        <p:spPr>
-          <a:xfrm>
-            <a:off x="9065158" y="5657850"/>
-            <a:ext cx="1484963" cy="495299"/>
-          </a:xfrm>
-          <a:prstGeom prst="roundRect">
-            <a:avLst>
-              <a:gd name="adj" fmla="val 50000"/>
-            </a:avLst>
-          </a:prstGeom>
-          <a:solidFill>
-            <a:srgbClr val="F4F4F5"/>
-          </a:solidFill>
-          <a:ln>
-            <a:noFill/>
-          </a:ln>
-          <a:effectLst/>
-        </p:spPr>
-        <p:style>
-          <a:lnRef idx="1">
-            <a:schemeClr val="accent1"/>
-          </a:lnRef>
-          <a:fillRef idx="3">
-            <a:schemeClr val="accent1"/>
-          </a:fillRef>
-          <a:effectRef idx="2">
-            <a:schemeClr val="accent1"/>
-          </a:effectRef>
-          <a:fontRef idx="minor">
-            <a:schemeClr val="lt1"/>
-          </a:fontRef>
-        </p:style>
-        <p:txBody>
-          <a:bodyPr rtlCol="0" anchor="ctr"/>
-          <a:lstStyle/>
-          <a:p>
-            <a:pPr algn="ctr"/>
-          </a:p>
-        </p:txBody>
-      </p:sp>
-      <p:sp>
-        <p:nvSpPr>
-          <p:cNvPr id="41" name="TextBox 40"/>
-          <p:cNvSpPr txBox="1"/>
-          <p:nvPr/>
-        </p:nvSpPr>
-        <p:spPr>
-          <a:xfrm>
-            <a:off x="9339478" y="5742051"/>
-            <a:ext cx="936323" cy="326898"/>
-          </a:xfrm>
-          <a:prstGeom prst="rect">
-            <a:avLst/>
-          </a:prstGeom>
-          <a:noFill/>
-        </p:spPr>
-        <p:txBody>
-          <a:bodyPr wrap="square" lIns="0" rIns="0" tIns="0" bIns="0" anchor="t">
-            <a:spAutoFit/>
-          </a:bodyPr>
-          <a:lstStyle/>
-          <a:p>
-            <a:pPr algn="l">
-              <a:lnSpc>
-                <a:spcPct val="132000"/>
-              </a:lnSpc>
-            </a:pPr>
-            <a:r>
-              <a:rPr sz="1950" b="0" u="none" i="0">
-                <a:solidFill>
-                  <a:srgbClr val="52525B"/>
-                </a:solidFill>
-                <a:latin typeface="Arial"/>
-              </a:rPr>
-              <a:t>planned</a:t>
-            </a:r>
-          </a:p>
-        </p:txBody>
-      </p:sp>
-      <p:sp>
-        <p:nvSpPr>
-          <p:cNvPr id="42" name="rule"/>
-          <p:cNvSpPr/>
-          <p:nvPr/>
-        </p:nvSpPr>
-        <p:spPr>
-          <a:xfrm>
-            <a:off x="12054840" y="5420106"/>
-            <a:ext cx="5245608" cy="10972"/>
-          </a:xfrm>
-          <a:prstGeom prst="rect">
-            <a:avLst/>
-          </a:prstGeom>
-          <a:solidFill>
-            <a:srgbClr val="E4E4E7"/>
-          </a:solidFill>
-          <a:ln>
-            <a:noFill/>
-          </a:ln>
-          <a:effectLst/>
-        </p:spPr>
-        <p:style>
-          <a:lnRef idx="1">
-            <a:schemeClr val="accent1"/>
-          </a:lnRef>
-          <a:fillRef idx="3">
-            <a:schemeClr val="accent1"/>
-          </a:fillRef>
-          <a:effectRef idx="2">
-            <a:schemeClr val="accent1"/>
-          </a:effectRef>
-          <a:fontRef idx="minor">
-            <a:schemeClr val="lt1"/>
-          </a:fontRef>
-        </p:style>
-        <p:txBody>
-          <a:bodyPr rtlCol="0" anchor="ctr"/>
-          <a:lstStyle/>
-          <a:p>
-            <a:pPr algn="ctr"/>
-          </a:p>
-        </p:txBody>
-      </p:sp>
-      <p:sp>
-        <p:nvSpPr>
-          <p:cNvPr id="43" name="TextBox 42"/>
-          <p:cNvSpPr txBox="1"/>
-          <p:nvPr/>
-        </p:nvSpPr>
-        <p:spPr>
-          <a:xfrm>
-            <a:off x="12054840" y="5657850"/>
-            <a:ext cx="5245608" cy="326898"/>
-          </a:xfrm>
-          <a:prstGeom prst="rect">
-            <a:avLst/>
-          </a:prstGeom>
-          <a:noFill/>
-        </p:spPr>
-        <p:txBody>
-          <a:bodyPr wrap="square" lIns="0" rIns="0" tIns="0" bIns="0" anchor="t">
-            <a:spAutoFit/>
-          </a:bodyPr>
-          <a:lstStyle/>
-          <a:p>
-            <a:pPr algn="l">
-              <a:lnSpc>
-                <a:spcPct val="132000"/>
-              </a:lnSpc>
-            </a:pPr>
-            <a:r>
-              <a:rPr sz="1950" b="0" u="none" i="0">
-                <a:solidFill>
-                  <a:srgbClr val="52525B"/>
-                </a:solidFill>
-                <a:latin typeface="Arial"/>
-              </a:rPr>
-              <a:t>A miss rebuilds by force-decoding</a:t>
-            </a:r>
-          </a:p>
-        </p:txBody>
-      </p:sp>
-      <p:sp>
-        <p:nvSpPr>
-          <p:cNvPr id="44" name="rule"/>
-          <p:cNvSpPr/>
-          <p:nvPr/>
-        </p:nvSpPr>
-        <p:spPr>
-          <a:xfrm>
-            <a:off x="987552" y="6243066"/>
-            <a:ext cx="1748536" cy="10972"/>
-          </a:xfrm>
-          <a:prstGeom prst="rect">
-            <a:avLst/>
-          </a:prstGeom>
-          <a:solidFill>
-            <a:srgbClr val="E4E4E7"/>
-          </a:solidFill>
-          <a:ln>
-            <a:noFill/>
-          </a:ln>
-          <a:effectLst/>
-        </p:spPr>
-        <p:style>
-          <a:lnRef idx="1">
-            <a:schemeClr val="accent1"/>
-          </a:lnRef>
-          <a:fillRef idx="3">
-            <a:schemeClr val="accent1"/>
-          </a:fillRef>
-          <a:effectRef idx="2">
-            <a:schemeClr val="accent1"/>
-          </a:effectRef>
-          <a:fontRef idx="minor">
-            <a:schemeClr val="lt1"/>
-          </a:fontRef>
-        </p:style>
-        <p:txBody>
-          <a:bodyPr rtlCol="0" anchor="ctr"/>
-          <a:lstStyle/>
-          <a:p>
-            <a:pPr algn="ctr"/>
-          </a:p>
-        </p:txBody>
-      </p:sp>
-      <p:sp>
-        <p:nvSpPr>
-          <p:cNvPr id="45" name="TextBox 44"/>
-          <p:cNvSpPr txBox="1"/>
-          <p:nvPr/>
-        </p:nvSpPr>
-        <p:spPr>
-          <a:xfrm>
-            <a:off x="987552" y="6480810"/>
-            <a:ext cx="1748536" cy="402336"/>
-          </a:xfrm>
-          <a:prstGeom prst="rect">
-            <a:avLst/>
-          </a:prstGeom>
-          <a:noFill/>
-        </p:spPr>
-        <p:txBody>
-          <a:bodyPr wrap="square" lIns="0" rIns="0" tIns="0" bIns="0" anchor="t">
-            <a:spAutoFit/>
-          </a:bodyPr>
-          <a:lstStyle/>
-          <a:p>
-            <a:pPr algn="l">
-              <a:lnSpc>
-                <a:spcPct val="132000"/>
-              </a:lnSpc>
-            </a:pPr>
-            <a:r>
-              <a:rPr sz="2400" b="0" u="none" i="0">
-                <a:solidFill>
-                  <a:srgbClr val="18181B"/>
-                </a:solidFill>
-                <a:latin typeface="Arial"/>
-              </a:rPr>
-              <a:t>S4</a:t>
-            </a:r>
-          </a:p>
-        </p:txBody>
-      </p:sp>
-      <p:sp>
-        <p:nvSpPr>
-          <p:cNvPr id="46" name="rule"/>
-          <p:cNvSpPr/>
-          <p:nvPr/>
-        </p:nvSpPr>
-        <p:spPr>
-          <a:xfrm>
-            <a:off x="2928112" y="6243066"/>
-            <a:ext cx="5945022" cy="10972"/>
-          </a:xfrm>
-          <a:prstGeom prst="rect">
-            <a:avLst/>
-          </a:prstGeom>
-          <a:solidFill>
-            <a:srgbClr val="E4E4E7"/>
-          </a:solidFill>
-          <a:ln>
-            <a:noFill/>
-          </a:ln>
-          <a:effectLst/>
-        </p:spPr>
-        <p:style>
-          <a:lnRef idx="1">
-            <a:schemeClr val="accent1"/>
-          </a:lnRef>
-          <a:fillRef idx="3">
-            <a:schemeClr val="accent1"/>
-          </a:fillRef>
-          <a:effectRef idx="2">
-            <a:schemeClr val="accent1"/>
-          </a:effectRef>
-          <a:fontRef idx="minor">
-            <a:schemeClr val="lt1"/>
-          </a:fontRef>
-        </p:style>
-        <p:txBody>
-          <a:bodyPr rtlCol="0" anchor="ctr"/>
-          <a:lstStyle/>
-          <a:p>
-            <a:pPr algn="ctr"/>
-          </a:p>
-        </p:txBody>
-      </p:sp>
-      <p:sp>
-        <p:nvSpPr>
-          <p:cNvPr id="47" name="TextBox 46"/>
-          <p:cNvSpPr txBox="1"/>
-          <p:nvPr/>
-        </p:nvSpPr>
-        <p:spPr>
-          <a:xfrm>
-            <a:off x="2928112" y="6480810"/>
-            <a:ext cx="5945022" cy="326898"/>
-          </a:xfrm>
-          <a:prstGeom prst="rect">
-            <a:avLst/>
-          </a:prstGeom>
-          <a:noFill/>
-        </p:spPr>
-        <p:txBody>
-          <a:bodyPr wrap="square" lIns="0" rIns="0" tIns="0" bIns="0" anchor="t">
-            <a:spAutoFit/>
-          </a:bodyPr>
-          <a:lstStyle/>
-          <a:p>
-            <a:pPr algn="l">
-              <a:lnSpc>
-                <a:spcPct val="132000"/>
-              </a:lnSpc>
-            </a:pPr>
-            <a:r>
-              <a:rPr sz="1950" b="0" u="none" i="0">
-                <a:solidFill>
-                  <a:srgbClr val="52525B"/>
-                </a:solidFill>
-                <a:latin typeface="Arial"/>
-              </a:rPr>
-              <a:t>Requests-per-bank capacity curve</a:t>
-            </a:r>
-          </a:p>
-        </p:txBody>
-      </p:sp>
-      <p:sp>
-        <p:nvSpPr>
-          <p:cNvPr id="48" name="rule"/>
-          <p:cNvSpPr/>
-          <p:nvPr/>
-        </p:nvSpPr>
-        <p:spPr>
-          <a:xfrm>
-            <a:off x="9065158" y="6243066"/>
-            <a:ext cx="2797657" cy="10972"/>
-          </a:xfrm>
-          <a:prstGeom prst="rect">
-            <a:avLst/>
-          </a:prstGeom>
-          <a:solidFill>
-            <a:srgbClr val="E4E4E7"/>
-          </a:solidFill>
-          <a:ln>
-            <a:noFill/>
-          </a:ln>
-          <a:effectLst/>
-        </p:spPr>
-        <p:style>
-          <a:lnRef idx="1">
-            <a:schemeClr val="accent1"/>
-          </a:lnRef>
-          <a:fillRef idx="3">
-            <a:schemeClr val="accent1"/>
-          </a:fillRef>
-          <a:effectRef idx="2">
-            <a:schemeClr val="accent1"/>
-          </a:effectRef>
-          <a:fontRef idx="minor">
-            <a:schemeClr val="lt1"/>
-          </a:fontRef>
-        </p:style>
-        <p:txBody>
-          <a:bodyPr rtlCol="0" anchor="ctr"/>
-          <a:lstStyle/>
-          <a:p>
-            <a:pPr algn="ctr"/>
-          </a:p>
-        </p:txBody>
-      </p:sp>
-      <p:sp>
-        <p:nvSpPr>
-          <p:cNvPr id="49" name="chip"/>
-          <p:cNvSpPr/>
-          <p:nvPr/>
-        </p:nvSpPr>
-        <p:spPr>
-          <a:xfrm>
-            <a:off x="9065158" y="6480810"/>
-            <a:ext cx="1484963" cy="495299"/>
-          </a:xfrm>
-          <a:prstGeom prst="roundRect">
-            <a:avLst>
-              <a:gd name="adj" fmla="val 50000"/>
-            </a:avLst>
-          </a:prstGeom>
-          <a:solidFill>
-            <a:srgbClr val="F4F4F5"/>
-          </a:solidFill>
-          <a:ln>
-            <a:noFill/>
-          </a:ln>
-          <a:effectLst/>
-        </p:spPr>
-        <p:style>
-          <a:lnRef idx="1">
-            <a:schemeClr val="accent1"/>
-          </a:lnRef>
-          <a:fillRef idx="3">
-            <a:schemeClr val="accent1"/>
-          </a:fillRef>
-          <a:effectRef idx="2">
-            <a:schemeClr val="accent1"/>
-          </a:effectRef>
-          <a:fontRef idx="minor">
-            <a:schemeClr val="lt1"/>
-          </a:fontRef>
-        </p:style>
-        <p:txBody>
-          <a:bodyPr rtlCol="0" anchor="ctr"/>
-          <a:lstStyle/>
-          <a:p>
-            <a:pPr algn="ctr"/>
-          </a:p>
-        </p:txBody>
-      </p:sp>
-      <p:sp>
-        <p:nvSpPr>
-          <p:cNvPr id="50" name="TextBox 49"/>
-          <p:cNvSpPr txBox="1"/>
-          <p:nvPr/>
-        </p:nvSpPr>
-        <p:spPr>
-          <a:xfrm>
-            <a:off x="9339478" y="6565011"/>
-            <a:ext cx="936323" cy="326898"/>
-          </a:xfrm>
-          <a:prstGeom prst="rect">
-            <a:avLst/>
-          </a:prstGeom>
-          <a:noFill/>
-        </p:spPr>
-        <p:txBody>
-          <a:bodyPr wrap="square" lIns="0" rIns="0" tIns="0" bIns="0" anchor="t">
-            <a:spAutoFit/>
-          </a:bodyPr>
-          <a:lstStyle/>
-          <a:p>
-            <a:pPr algn="l">
-              <a:lnSpc>
-                <a:spcPct val="132000"/>
-              </a:lnSpc>
-            </a:pPr>
-            <a:r>
-              <a:rPr sz="1950" b="0" u="none" i="0">
-                <a:solidFill>
-                  <a:srgbClr val="52525B"/>
-                </a:solidFill>
-                <a:latin typeface="Arial"/>
-              </a:rPr>
-              <a:t>planned</a:t>
-            </a:r>
-          </a:p>
-        </p:txBody>
-      </p:sp>
-      <p:sp>
-        <p:nvSpPr>
-          <p:cNvPr id="51" name="rule"/>
-          <p:cNvSpPr/>
-          <p:nvPr/>
-        </p:nvSpPr>
-        <p:spPr>
-          <a:xfrm>
-            <a:off x="12054840" y="6243066"/>
-            <a:ext cx="5245608" cy="10972"/>
-          </a:xfrm>
-          <a:prstGeom prst="rect">
-            <a:avLst/>
-          </a:prstGeom>
-          <a:solidFill>
-            <a:srgbClr val="E4E4E7"/>
-          </a:solidFill>
-          <a:ln>
-            <a:noFill/>
-          </a:ln>
-          <a:effectLst/>
-        </p:spPr>
-        <p:style>
-          <a:lnRef idx="1">
-            <a:schemeClr val="accent1"/>
-          </a:lnRef>
-          <a:fillRef idx="3">
-            <a:schemeClr val="accent1"/>
-          </a:fillRef>
-          <a:effectRef idx="2">
-            <a:schemeClr val="accent1"/>
-          </a:effectRef>
-          <a:fontRef idx="minor">
-            <a:schemeClr val="lt1"/>
-          </a:fontRef>
-        </p:style>
-        <p:txBody>
-          <a:bodyPr rtlCol="0" anchor="ctr"/>
-          <a:lstStyle/>
-          <a:p>
-            <a:pPr algn="ctr"/>
-          </a:p>
-        </p:txBody>
-      </p:sp>
-      <p:sp>
-        <p:nvSpPr>
-          <p:cNvPr id="52" name="TextBox 51"/>
-          <p:cNvSpPr txBox="1"/>
-          <p:nvPr/>
-        </p:nvSpPr>
-        <p:spPr>
-          <a:xfrm>
-            <a:off x="12054840" y="6480810"/>
-            <a:ext cx="5245608" cy="326898"/>
-          </a:xfrm>
-          <a:prstGeom prst="rect">
-            <a:avLst/>
-          </a:prstGeom>
-          <a:noFill/>
-        </p:spPr>
-        <p:txBody>
-          <a:bodyPr wrap="square" lIns="0" rIns="0" tIns="0" bIns="0" anchor="t">
-            <a:spAutoFit/>
-          </a:bodyPr>
-          <a:lstStyle/>
-          <a:p>
-            <a:pPr algn="l">
-              <a:lnSpc>
-                <a:spcPct val="132000"/>
-              </a:lnSpc>
-            </a:pPr>
-            <a:r>
-              <a:rPr sz="1950" b="0" u="none" i="0">
-                <a:solidFill>
-                  <a:srgbClr val="52525B"/>
-                </a:solidFill>
-                <a:latin typeface="Arial"/>
-              </a:rPr>
-              <a:t>The milestone's headline number</a:t>
-            </a:r>
-          </a:p>
-        </p:txBody>
-      </p:sp>
-      <p:sp>
-        <p:nvSpPr>
-          <p:cNvPr id="53" name="rule"/>
-          <p:cNvSpPr/>
-          <p:nvPr/>
-        </p:nvSpPr>
-        <p:spPr>
-          <a:xfrm>
-            <a:off x="987552" y="7066026"/>
-            <a:ext cx="1748536" cy="10972"/>
-          </a:xfrm>
-          <a:prstGeom prst="rect">
-            <a:avLst/>
-          </a:prstGeom>
-          <a:solidFill>
-            <a:srgbClr val="E4E4E7"/>
-          </a:solidFill>
-          <a:ln>
-            <a:noFill/>
-          </a:ln>
-          <a:effectLst/>
-        </p:spPr>
-        <p:style>
-          <a:lnRef idx="1">
-            <a:schemeClr val="accent1"/>
-          </a:lnRef>
-          <a:fillRef idx="3">
-            <a:schemeClr val="accent1"/>
-          </a:fillRef>
-          <a:effectRef idx="2">
-            <a:schemeClr val="accent1"/>
-          </a:effectRef>
-          <a:fontRef idx="minor">
-            <a:schemeClr val="lt1"/>
-          </a:fontRef>
-        </p:style>
-        <p:txBody>
-          <a:bodyPr rtlCol="0" anchor="ctr"/>
-          <a:lstStyle/>
-          <a:p>
-            <a:pPr algn="ctr"/>
-          </a:p>
-        </p:txBody>
-      </p:sp>
-      <p:sp>
-        <p:nvSpPr>
-          <p:cNvPr id="54" name="TextBox 53"/>
-          <p:cNvSpPr txBox="1"/>
-          <p:nvPr/>
-        </p:nvSpPr>
-        <p:spPr>
-          <a:xfrm>
-            <a:off x="987552" y="7303770"/>
-            <a:ext cx="1748536" cy="402336"/>
-          </a:xfrm>
-          <a:prstGeom prst="rect">
-            <a:avLst/>
-          </a:prstGeom>
-          <a:noFill/>
-        </p:spPr>
-        <p:txBody>
-          <a:bodyPr wrap="square" lIns="0" rIns="0" tIns="0" bIns="0" anchor="t">
-            <a:spAutoFit/>
-          </a:bodyPr>
-          <a:lstStyle/>
-          <a:p>
-            <a:pPr algn="l">
-              <a:lnSpc>
-                <a:spcPct val="132000"/>
-              </a:lnSpc>
-            </a:pPr>
-            <a:r>
-              <a:rPr sz="2400" b="0" u="none" i="0">
-                <a:solidFill>
-                  <a:srgbClr val="18181B"/>
-                </a:solidFill>
-                <a:latin typeface="Arial"/>
-              </a:rPr>
-              <a:t>S5</a:t>
-            </a:r>
-          </a:p>
-        </p:txBody>
-      </p:sp>
-      <p:sp>
-        <p:nvSpPr>
-          <p:cNvPr id="55" name="rule"/>
-          <p:cNvSpPr/>
-          <p:nvPr/>
-        </p:nvSpPr>
-        <p:spPr>
-          <a:xfrm>
-            <a:off x="2928112" y="7066026"/>
-            <a:ext cx="5945022" cy="10972"/>
-          </a:xfrm>
-          <a:prstGeom prst="rect">
-            <a:avLst/>
-          </a:prstGeom>
-          <a:solidFill>
-            <a:srgbClr val="E4E4E7"/>
-          </a:solidFill>
-          <a:ln>
-            <a:noFill/>
-          </a:ln>
-          <a:effectLst/>
-        </p:spPr>
-        <p:style>
-          <a:lnRef idx="1">
-            <a:schemeClr val="accent1"/>
-          </a:lnRef>
-          <a:fillRef idx="3">
-            <a:schemeClr val="accent1"/>
-          </a:fillRef>
-          <a:effectRef idx="2">
-            <a:schemeClr val="accent1"/>
-          </a:effectRef>
-          <a:fontRef idx="minor">
-            <a:schemeClr val="lt1"/>
-          </a:fontRef>
-        </p:style>
-        <p:txBody>
-          <a:bodyPr rtlCol="0" anchor="ctr"/>
-          <a:lstStyle/>
-          <a:p>
-            <a:pPr algn="ctr"/>
-          </a:p>
-        </p:txBody>
-      </p:sp>
-      <p:sp>
-        <p:nvSpPr>
-          <p:cNvPr id="56" name="TextBox 55"/>
-          <p:cNvSpPr txBox="1"/>
-          <p:nvPr/>
-        </p:nvSpPr>
-        <p:spPr>
-          <a:xfrm>
-            <a:off x="2928112" y="7303770"/>
-            <a:ext cx="5945022" cy="326898"/>
-          </a:xfrm>
-          <a:prstGeom prst="rect">
-            <a:avLst/>
-          </a:prstGeom>
-          <a:noFill/>
-        </p:spPr>
-        <p:txBody>
-          <a:bodyPr wrap="square" lIns="0" rIns="0" tIns="0" bIns="0" anchor="t">
-            <a:spAutoFit/>
-          </a:bodyPr>
-          <a:lstStyle/>
-          <a:p>
-            <a:pPr algn="l">
-              <a:lnSpc>
-                <a:spcPct val="132000"/>
-              </a:lnSpc>
-            </a:pPr>
-            <a:r>
-              <a:rPr sz="1950" b="0" u="none" i="0">
-                <a:solidFill>
-                  <a:srgbClr val="52525B"/>
-                </a:solidFill>
-                <a:latin typeface="Arial"/>
-              </a:rPr>
-              <a:t>End-to-end verification</a:t>
-            </a:r>
-          </a:p>
-        </p:txBody>
-      </p:sp>
-      <p:sp>
-        <p:nvSpPr>
-          <p:cNvPr id="57" name="rule"/>
-          <p:cNvSpPr/>
-          <p:nvPr/>
-        </p:nvSpPr>
-        <p:spPr>
-          <a:xfrm>
-            <a:off x="9065158" y="7066026"/>
-            <a:ext cx="2797657" cy="10972"/>
-          </a:xfrm>
-          <a:prstGeom prst="rect">
-            <a:avLst/>
-          </a:prstGeom>
-          <a:solidFill>
-            <a:srgbClr val="E4E4E7"/>
-          </a:solidFill>
-          <a:ln>
-            <a:noFill/>
-          </a:ln>
-          <a:effectLst/>
-        </p:spPr>
-        <p:style>
-          <a:lnRef idx="1">
-            <a:schemeClr val="accent1"/>
-          </a:lnRef>
-          <a:fillRef idx="3">
-            <a:schemeClr val="accent1"/>
-          </a:fillRef>
-          <a:effectRef idx="2">
-            <a:schemeClr val="accent1"/>
-          </a:effectRef>
-          <a:fontRef idx="minor">
-            <a:schemeClr val="lt1"/>
-          </a:fontRef>
-        </p:style>
-        <p:txBody>
-          <a:bodyPr rtlCol="0" anchor="ctr"/>
-          <a:lstStyle/>
-          <a:p>
-            <a:pPr algn="ctr"/>
-          </a:p>
-        </p:txBody>
-      </p:sp>
-      <p:sp>
-        <p:nvSpPr>
-          <p:cNvPr id="58" name="chip"/>
-          <p:cNvSpPr/>
-          <p:nvPr/>
-        </p:nvSpPr>
-        <p:spPr>
-          <a:xfrm>
-            <a:off x="9065158" y="7303770"/>
-            <a:ext cx="1484963" cy="495299"/>
-          </a:xfrm>
-          <a:prstGeom prst="roundRect">
-            <a:avLst>
-              <a:gd name="adj" fmla="val 50000"/>
-            </a:avLst>
-          </a:prstGeom>
-          <a:solidFill>
-            <a:srgbClr val="F4F4F5"/>
-          </a:solidFill>
-          <a:ln>
-            <a:noFill/>
-          </a:ln>
-          <a:effectLst/>
-        </p:spPr>
-        <p:style>
-          <a:lnRef idx="1">
-            <a:schemeClr val="accent1"/>
-          </a:lnRef>
-          <a:fillRef idx="3">
-            <a:schemeClr val="accent1"/>
-          </a:fillRef>
-          <a:effectRef idx="2">
-            <a:schemeClr val="accent1"/>
-          </a:effectRef>
-          <a:fontRef idx="minor">
-            <a:schemeClr val="lt1"/>
-          </a:fontRef>
-        </p:style>
-        <p:txBody>
-          <a:bodyPr rtlCol="0" anchor="ctr"/>
-          <a:lstStyle/>
-          <a:p>
-            <a:pPr algn="ctr"/>
-          </a:p>
-        </p:txBody>
-      </p:sp>
-      <p:sp>
-        <p:nvSpPr>
-          <p:cNvPr id="59" name="TextBox 58"/>
-          <p:cNvSpPr txBox="1"/>
-          <p:nvPr/>
-        </p:nvSpPr>
-        <p:spPr>
-          <a:xfrm>
-            <a:off x="9339478" y="7387971"/>
-            <a:ext cx="936323" cy="326898"/>
-          </a:xfrm>
-          <a:prstGeom prst="rect">
-            <a:avLst/>
-          </a:prstGeom>
-          <a:noFill/>
-        </p:spPr>
-        <p:txBody>
-          <a:bodyPr wrap="square" lIns="0" rIns="0" tIns="0" bIns="0" anchor="t">
-            <a:spAutoFit/>
-          </a:bodyPr>
-          <a:lstStyle/>
-          <a:p>
-            <a:pPr algn="l">
-              <a:lnSpc>
-                <a:spcPct val="132000"/>
-              </a:lnSpc>
-            </a:pPr>
-            <a:r>
-              <a:rPr sz="1950" b="0" u="none" i="0">
-                <a:solidFill>
-                  <a:srgbClr val="52525B"/>
-                </a:solidFill>
-                <a:latin typeface="Arial"/>
-              </a:rPr>
-              <a:t>planned</a:t>
-            </a:r>
-          </a:p>
-        </p:txBody>
-      </p:sp>
-      <p:sp>
-        <p:nvSpPr>
-          <p:cNvPr id="60" name="rule"/>
-          <p:cNvSpPr/>
-          <p:nvPr/>
-        </p:nvSpPr>
-        <p:spPr>
-          <a:xfrm>
-            <a:off x="12054840" y="7066026"/>
-            <a:ext cx="5245608" cy="10972"/>
-          </a:xfrm>
-          <a:prstGeom prst="rect">
-            <a:avLst/>
-          </a:prstGeom>
-          <a:solidFill>
-            <a:srgbClr val="E4E4E7"/>
-          </a:solidFill>
-          <a:ln>
-            <a:noFill/>
-          </a:ln>
-          <a:effectLst/>
-        </p:spPr>
-        <p:style>
-          <a:lnRef idx="1">
-            <a:schemeClr val="accent1"/>
-          </a:lnRef>
-          <a:fillRef idx="3">
-            <a:schemeClr val="accent1"/>
-          </a:fillRef>
-          <a:effectRef idx="2">
-            <a:schemeClr val="accent1"/>
-          </a:effectRef>
-          <a:fontRef idx="minor">
-            <a:schemeClr val="lt1"/>
-          </a:fontRef>
-        </p:style>
-        <p:txBody>
-          <a:bodyPr rtlCol="0" anchor="ctr"/>
-          <a:lstStyle/>
-          <a:p>
-            <a:pPr algn="ctr"/>
-          </a:p>
-        </p:txBody>
-      </p:sp>
-      <p:sp>
-        <p:nvSpPr>
-          <p:cNvPr id="61" name="TextBox 60"/>
-          <p:cNvSpPr txBox="1"/>
-          <p:nvPr/>
-        </p:nvSpPr>
-        <p:spPr>
-          <a:xfrm>
-            <a:off x="12054840" y="7303770"/>
-            <a:ext cx="5245608" cy="326898"/>
-          </a:xfrm>
-          <a:prstGeom prst="rect">
-            <a:avLst/>
-          </a:prstGeom>
-          <a:noFill/>
-        </p:spPr>
-        <p:txBody>
-          <a:bodyPr wrap="square" lIns="0" rIns="0" tIns="0" bIns="0" anchor="t">
-            <a:spAutoFit/>
-          </a:bodyPr>
-          <a:lstStyle/>
-          <a:p>
-            <a:pPr algn="l">
-              <a:lnSpc>
-                <a:spcPct val="132000"/>
-              </a:lnSpc>
-            </a:pPr>
-            <a:r>
-              <a:rPr sz="1950" b="0" u="none" i="0">
-                <a:solidFill>
-                  <a:srgbClr val="52525B"/>
-                </a:solidFill>
-                <a:latin typeface="Arial"/>
-              </a:rPr>
-              <a:t>Against a teacher-forced reference</a:t>
+              <a:t>Slots size the cache, batch sizes the compute. The device is told one new thing, which slot each lane is on; everything else stays on the host.</a:t>
             </a:r>
           </a:p>
         </p:txBody>
@@ -4967,7 +2653,7 @@
                 </a:solidFill>
                 <a:latin typeface="Arial"/>
               </a:rPr>
-              <a:t>TO DISCUSS</a:t>
+              <a:t>M1 PLAN</a:t>
             </a:r>
           </a:p>
         </p:txBody>
@@ -5006,7 +2692,7 @@
                 </a:solidFill>
                 <a:latin typeface="Arial"/>
               </a:rPr>
-              <a:t>The M2 questions</a:t>
+              <a:t>Six subtasks, the first two now done</a:t>
             </a:r>
           </a:p>
         </p:txBody>
@@ -5020,32 +2706,32 @@
         <p:spPr>
           <a:xfrm>
             <a:off x="987552" y="2484882"/>
-            <a:ext cx="8010144" cy="301752"/>
-          </a:xfrm>
-          <a:prstGeom prst="rect">
-            <a:avLst/>
-          </a:prstGeom>
-          <a:noFill/>
-        </p:spPr>
-        <p:txBody>
-          <a:bodyPr wrap="square" lIns="0" rIns="0" tIns="0" bIns="0" anchor="t">
-            <a:spAutoFit/>
-          </a:bodyPr>
-          <a:lstStyle/>
-          <a:p>
-            <a:pPr algn="l">
-              <a:lnSpc>
-                <a:spcPct val="132000"/>
-              </a:lnSpc>
-            </a:pPr>
-            <a:r>
-              <a:rPr sz="1800" b="0" u="none" i="0" spc="150">
+            <a:ext cx="1748536" cy="326898"/>
+          </a:xfrm>
+          <a:prstGeom prst="rect">
+            <a:avLst/>
+          </a:prstGeom>
+          <a:noFill/>
+        </p:spPr>
+        <p:txBody>
+          <a:bodyPr wrap="square" lIns="0" rIns="0" tIns="0" bIns="0" anchor="t">
+            <a:spAutoFit/>
+          </a:bodyPr>
+          <a:lstStyle/>
+          <a:p>
+            <a:pPr algn="l">
+              <a:lnSpc>
+                <a:spcPct val="132000"/>
+              </a:lnSpc>
+            </a:pPr>
+            <a:r>
+              <a:rPr sz="1950" b="0" u="none" i="0" spc="150">
                 <a:solidFill>
                   <a:srgbClr val="A1A1AA"/>
                 </a:solidFill>
                 <a:latin typeface="Arial"/>
               </a:rPr>
-              <a:t>WHY TOGETHER</a:t>
+              <a:t>STEP</a:t>
             </a:r>
           </a:p>
         </p:txBody>
@@ -5058,90 +2744,1473 @@
         </p:nvSpPr>
         <p:spPr>
           <a:xfrm>
-            <a:off x="987552" y="3051810"/>
-            <a:ext cx="8010144" cy="1348739"/>
-          </a:xfrm>
-          <a:prstGeom prst="rect">
-            <a:avLst/>
-          </a:prstGeom>
-          <a:noFill/>
-        </p:spPr>
-        <p:txBody>
-          <a:bodyPr wrap="square" lIns="0" rIns="0" tIns="0" bIns="0" anchor="t">
-            <a:spAutoFit/>
-          </a:bodyPr>
-          <a:lstStyle/>
-          <a:p>
-            <a:pPr algn="l">
-              <a:lnSpc>
-                <a:spcPct val="118000"/>
-              </a:lnSpc>
-            </a:pPr>
-            <a:r>
-              <a:rPr sz="4500" b="0" u="none" i="0">
+            <a:off x="2928112" y="2484882"/>
+            <a:ext cx="5945022" cy="326898"/>
+          </a:xfrm>
+          <a:prstGeom prst="rect">
+            <a:avLst/>
+          </a:prstGeom>
+          <a:noFill/>
+        </p:spPr>
+        <p:txBody>
+          <a:bodyPr wrap="square" lIns="0" rIns="0" tIns="0" bIns="0" anchor="t">
+            <a:spAutoFit/>
+          </a:bodyPr>
+          <a:lstStyle/>
+          <a:p>
+            <a:pPr algn="l">
+              <a:lnSpc>
+                <a:spcPct val="132000"/>
+              </a:lnSpc>
+            </a:pPr>
+            <a:r>
+              <a:rPr sz="1950" b="0" u="none" i="0" spc="150">
+                <a:solidFill>
+                  <a:srgbClr val="A1A1AA"/>
+                </a:solidFill>
+                <a:latin typeface="Arial"/>
+              </a:rPr>
+              <a:t>WHAT IT DELIVERS</a:t>
+            </a:r>
+          </a:p>
+        </p:txBody>
+      </p:sp>
+      <p:sp>
+        <p:nvSpPr>
+          <p:cNvPr id="6" name="TextBox 5"/>
+          <p:cNvSpPr txBox="1"/>
+          <p:nvPr/>
+        </p:nvSpPr>
+        <p:spPr>
+          <a:xfrm>
+            <a:off x="9065158" y="2484882"/>
+            <a:ext cx="2797657" cy="326898"/>
+          </a:xfrm>
+          <a:prstGeom prst="rect">
+            <a:avLst/>
+          </a:prstGeom>
+          <a:noFill/>
+        </p:spPr>
+        <p:txBody>
+          <a:bodyPr wrap="square" lIns="0" rIns="0" tIns="0" bIns="0" anchor="t">
+            <a:spAutoFit/>
+          </a:bodyPr>
+          <a:lstStyle/>
+          <a:p>
+            <a:pPr algn="l">
+              <a:lnSpc>
+                <a:spcPct val="132000"/>
+              </a:lnSpc>
+            </a:pPr>
+            <a:r>
+              <a:rPr sz="1950" b="0" u="none" i="0" spc="150">
+                <a:solidFill>
+                  <a:srgbClr val="A1A1AA"/>
+                </a:solidFill>
+                <a:latin typeface="Arial"/>
+              </a:rPr>
+              <a:t>STATUS</a:t>
+            </a:r>
+          </a:p>
+        </p:txBody>
+      </p:sp>
+      <p:sp>
+        <p:nvSpPr>
+          <p:cNvPr id="7" name="TextBox 6"/>
+          <p:cNvSpPr txBox="1"/>
+          <p:nvPr/>
+        </p:nvSpPr>
+        <p:spPr>
+          <a:xfrm>
+            <a:off x="12054840" y="2484882"/>
+            <a:ext cx="5245608" cy="326898"/>
+          </a:xfrm>
+          <a:prstGeom prst="rect">
+            <a:avLst/>
+          </a:prstGeom>
+          <a:noFill/>
+        </p:spPr>
+        <p:txBody>
+          <a:bodyPr wrap="square" lIns="0" rIns="0" tIns="0" bIns="0" anchor="t">
+            <a:spAutoFit/>
+          </a:bodyPr>
+          <a:lstStyle/>
+          <a:p>
+            <a:pPr algn="l">
+              <a:lnSpc>
+                <a:spcPct val="132000"/>
+              </a:lnSpc>
+            </a:pPr>
+            <a:r>
+              <a:rPr sz="1950" b="0" u="none" i="0" spc="150">
+                <a:solidFill>
+                  <a:srgbClr val="A1A1AA"/>
+                </a:solidFill>
+                <a:latin typeface="Arial"/>
+              </a:rPr>
+              <a:t>NOTE</a:t>
+            </a:r>
+          </a:p>
+        </p:txBody>
+      </p:sp>
+      <p:sp>
+        <p:nvSpPr>
+          <p:cNvPr id="8" name="rule"/>
+          <p:cNvSpPr/>
+          <p:nvPr/>
+        </p:nvSpPr>
+        <p:spPr>
+          <a:xfrm>
+            <a:off x="987552" y="2951226"/>
+            <a:ext cx="1748536" cy="10972"/>
+          </a:xfrm>
+          <a:prstGeom prst="rect">
+            <a:avLst/>
+          </a:prstGeom>
+          <a:solidFill>
+            <a:srgbClr val="E4E4E7"/>
+          </a:solidFill>
+          <a:ln>
+            <a:noFill/>
+          </a:ln>
+          <a:effectLst/>
+        </p:spPr>
+        <p:style>
+          <a:lnRef idx="1">
+            <a:schemeClr val="accent1"/>
+          </a:lnRef>
+          <a:fillRef idx="3">
+            <a:schemeClr val="accent1"/>
+          </a:fillRef>
+          <a:effectRef idx="2">
+            <a:schemeClr val="accent1"/>
+          </a:effectRef>
+          <a:fontRef idx="minor">
+            <a:schemeClr val="lt1"/>
+          </a:fontRef>
+        </p:style>
+        <p:txBody>
+          <a:bodyPr rtlCol="0" anchor="ctr"/>
+          <a:lstStyle/>
+          <a:p>
+            <a:pPr algn="ctr"/>
+          </a:p>
+        </p:txBody>
+      </p:sp>
+      <p:sp>
+        <p:nvSpPr>
+          <p:cNvPr id="9" name="TextBox 8"/>
+          <p:cNvSpPr txBox="1"/>
+          <p:nvPr/>
+        </p:nvSpPr>
+        <p:spPr>
+          <a:xfrm>
+            <a:off x="987552" y="3188970"/>
+            <a:ext cx="1748536" cy="402336"/>
+          </a:xfrm>
+          <a:prstGeom prst="rect">
+            <a:avLst/>
+          </a:prstGeom>
+          <a:noFill/>
+        </p:spPr>
+        <p:txBody>
+          <a:bodyPr wrap="square" lIns="0" rIns="0" tIns="0" bIns="0" anchor="t">
+            <a:spAutoFit/>
+          </a:bodyPr>
+          <a:lstStyle/>
+          <a:p>
+            <a:pPr algn="l">
+              <a:lnSpc>
+                <a:spcPct val="132000"/>
+              </a:lnSpc>
+            </a:pPr>
+            <a:r>
+              <a:rPr sz="2400" b="0" u="none" i="0">
                 <a:solidFill>
                   <a:srgbClr val="18181B"/>
                 </a:solidFill>
                 <a:latin typeface="Arial"/>
               </a:rPr>
-              <a:t>One architecture, not four separate calls</a:t>
-            </a:r>
-          </a:p>
-        </p:txBody>
-      </p:sp>
-      <p:sp>
-        <p:nvSpPr>
-          <p:cNvPr id="6" name="TextBox 5"/>
-          <p:cNvSpPr txBox="1"/>
-          <p:nvPr/>
-        </p:nvSpPr>
-        <p:spPr>
-          <a:xfrm>
-            <a:off x="987552" y="4729733"/>
-            <a:ext cx="8010144" cy="2816352"/>
-          </a:xfrm>
-          <a:prstGeom prst="rect">
-            <a:avLst/>
-          </a:prstGeom>
-          <a:noFill/>
-        </p:spPr>
-        <p:txBody>
-          <a:bodyPr wrap="square" lIns="0" rIns="0" tIns="0" bIns="0" anchor="t">
-            <a:spAutoFit/>
-          </a:bodyPr>
-          <a:lstStyle/>
-          <a:p>
-            <a:pPr algn="l">
-              <a:lnSpc>
-                <a:spcPct val="132000"/>
-              </a:lnSpc>
-            </a:pPr>
-            <a:r>
-              <a:rPr sz="2400" b="0" u="none" i="0">
+              <a:t>S0</a:t>
+            </a:r>
+          </a:p>
+        </p:txBody>
+      </p:sp>
+      <p:sp>
+        <p:nvSpPr>
+          <p:cNvPr id="10" name="rule"/>
+          <p:cNvSpPr/>
+          <p:nvPr/>
+        </p:nvSpPr>
+        <p:spPr>
+          <a:xfrm>
+            <a:off x="2928112" y="2951226"/>
+            <a:ext cx="5945022" cy="10972"/>
+          </a:xfrm>
+          <a:prstGeom prst="rect">
+            <a:avLst/>
+          </a:prstGeom>
+          <a:solidFill>
+            <a:srgbClr val="E4E4E7"/>
+          </a:solidFill>
+          <a:ln>
+            <a:noFill/>
+          </a:ln>
+          <a:effectLst/>
+        </p:spPr>
+        <p:style>
+          <a:lnRef idx="1">
+            <a:schemeClr val="accent1"/>
+          </a:lnRef>
+          <a:fillRef idx="3">
+            <a:schemeClr val="accent1"/>
+          </a:fillRef>
+          <a:effectRef idx="2">
+            <a:schemeClr val="accent1"/>
+          </a:effectRef>
+          <a:fontRef idx="minor">
+            <a:schemeClr val="lt1"/>
+          </a:fontRef>
+        </p:style>
+        <p:txBody>
+          <a:bodyPr rtlCol="0" anchor="ctr"/>
+          <a:lstStyle/>
+          <a:p>
+            <a:pPr algn="ctr"/>
+          </a:p>
+        </p:txBody>
+      </p:sp>
+      <p:sp>
+        <p:nvSpPr>
+          <p:cNvPr id="11" name="TextBox 10"/>
+          <p:cNvSpPr txBox="1"/>
+          <p:nvPr/>
+        </p:nvSpPr>
+        <p:spPr>
+          <a:xfrm>
+            <a:off x="2928112" y="3188970"/>
+            <a:ext cx="5945022" cy="326898"/>
+          </a:xfrm>
+          <a:prstGeom prst="rect">
+            <a:avLst/>
+          </a:prstGeom>
+          <a:noFill/>
+        </p:spPr>
+        <p:txBody>
+          <a:bodyPr wrap="square" lIns="0" rIns="0" tIns="0" bIns="0" anchor="t">
+            <a:spAutoFit/>
+          </a:bodyPr>
+          <a:lstStyle/>
+          <a:p>
+            <a:pPr algn="l">
+              <a:lnSpc>
+                <a:spcPct val="132000"/>
+              </a:lnSpc>
+            </a:pPr>
+            <a:r>
+              <a:rPr sz="1950" b="0" u="none" i="0">
                 <a:solidFill>
                   <a:srgbClr val="52525B"/>
                 </a:solidFill>
                 <a:latin typeface="Arial"/>
               </a:rPr>
-              <a:t>These choices constrain each other. Paging's page table is exactly the per-PE mapping a distributed control plane would need, so picking one nearly picks the other. M1 commits to the simplest working defaults, fixed slots with control on the host and the cache in decode, and M2 tests each against a small benchmark rather than settling it by argument.</a:t>
-            </a:r>
-          </a:p>
-        </p:txBody>
-      </p:sp>
-      <p:sp>
-        <p:nvSpPr>
-          <p:cNvPr id="7" name="card"/>
+              <a:t>Slot addressing and metadata contract</a:t>
+            </a:r>
+          </a:p>
+        </p:txBody>
+      </p:sp>
+      <p:sp>
+        <p:nvSpPr>
+          <p:cNvPr id="12" name="rule"/>
           <p:cNvSpPr/>
           <p:nvPr/>
         </p:nvSpPr>
         <p:spPr>
           <a:xfrm>
-            <a:off x="9528048" y="2484882"/>
-            <a:ext cx="7772400" cy="5404104"/>
+            <a:off x="9065158" y="2951226"/>
+            <a:ext cx="2797657" cy="10972"/>
+          </a:xfrm>
+          <a:prstGeom prst="rect">
+            <a:avLst/>
+          </a:prstGeom>
+          <a:solidFill>
+            <a:srgbClr val="E4E4E7"/>
+          </a:solidFill>
+          <a:ln>
+            <a:noFill/>
+          </a:ln>
+          <a:effectLst/>
+        </p:spPr>
+        <p:style>
+          <a:lnRef idx="1">
+            <a:schemeClr val="accent1"/>
+          </a:lnRef>
+          <a:fillRef idx="3">
+            <a:schemeClr val="accent1"/>
+          </a:fillRef>
+          <a:effectRef idx="2">
+            <a:schemeClr val="accent1"/>
+          </a:effectRef>
+          <a:fontRef idx="minor">
+            <a:schemeClr val="lt1"/>
+          </a:fontRef>
+        </p:style>
+        <p:txBody>
+          <a:bodyPr rtlCol="0" anchor="ctr"/>
+          <a:lstStyle/>
+          <a:p>
+            <a:pPr algn="ctr"/>
+          </a:p>
+        </p:txBody>
+      </p:sp>
+      <p:sp>
+        <p:nvSpPr>
+          <p:cNvPr id="13" name="chip"/>
+          <p:cNvSpPr/>
+          <p:nvPr/>
+        </p:nvSpPr>
+        <p:spPr>
+          <a:xfrm>
+            <a:off x="9065158" y="3188970"/>
+            <a:ext cx="1154465" cy="495299"/>
           </a:xfrm>
           <a:prstGeom prst="roundRect">
             <a:avLst>
-              <a:gd name="adj" fmla="val 6195"/>
+              <a:gd name="adj" fmla="val 50000"/>
+            </a:avLst>
+          </a:prstGeom>
+          <a:solidFill>
+            <a:srgbClr val="E5F4EE"/>
+          </a:solidFill>
+          <a:ln>
+            <a:noFill/>
+          </a:ln>
+          <a:effectLst/>
+        </p:spPr>
+        <p:style>
+          <a:lnRef idx="1">
+            <a:schemeClr val="accent1"/>
+          </a:lnRef>
+          <a:fillRef idx="3">
+            <a:schemeClr val="accent1"/>
+          </a:fillRef>
+          <a:effectRef idx="2">
+            <a:schemeClr val="accent1"/>
+          </a:effectRef>
+          <a:fontRef idx="minor">
+            <a:schemeClr val="lt1"/>
+          </a:fontRef>
+        </p:style>
+        <p:txBody>
+          <a:bodyPr rtlCol="0" anchor="ctr"/>
+          <a:lstStyle/>
+          <a:p>
+            <a:pPr algn="ctr"/>
+          </a:p>
+        </p:txBody>
+      </p:sp>
+      <p:sp>
+        <p:nvSpPr>
+          <p:cNvPr id="14" name="TextBox 13"/>
+          <p:cNvSpPr txBox="1"/>
+          <p:nvPr/>
+        </p:nvSpPr>
+        <p:spPr>
+          <a:xfrm>
+            <a:off x="9339478" y="3273170"/>
+            <a:ext cx="605825" cy="326898"/>
+          </a:xfrm>
+          <a:prstGeom prst="rect">
+            <a:avLst/>
+          </a:prstGeom>
+          <a:noFill/>
+        </p:spPr>
+        <p:txBody>
+          <a:bodyPr wrap="square" lIns="0" rIns="0" tIns="0" bIns="0" anchor="t">
+            <a:spAutoFit/>
+          </a:bodyPr>
+          <a:lstStyle/>
+          <a:p>
+            <a:pPr algn="l">
+              <a:lnSpc>
+                <a:spcPct val="132000"/>
+              </a:lnSpc>
+            </a:pPr>
+            <a:r>
+              <a:rPr sz="1950" b="0" u="none" i="0">
+                <a:solidFill>
+                  <a:srgbClr val="047857"/>
+                </a:solidFill>
+                <a:latin typeface="Arial"/>
+              </a:rPr>
+              <a:t>done</a:t>
+            </a:r>
+          </a:p>
+        </p:txBody>
+      </p:sp>
+      <p:sp>
+        <p:nvSpPr>
+          <p:cNvPr id="15" name="rule"/>
+          <p:cNvSpPr/>
+          <p:nvPr/>
+        </p:nvSpPr>
+        <p:spPr>
+          <a:xfrm>
+            <a:off x="12054840" y="2951226"/>
+            <a:ext cx="5245608" cy="10972"/>
+          </a:xfrm>
+          <a:prstGeom prst="rect">
+            <a:avLst/>
+          </a:prstGeom>
+          <a:solidFill>
+            <a:srgbClr val="E4E4E7"/>
+          </a:solidFill>
+          <a:ln>
+            <a:noFill/>
+          </a:ln>
+          <a:effectLst/>
+        </p:spPr>
+        <p:style>
+          <a:lnRef idx="1">
+            <a:schemeClr val="accent1"/>
+          </a:lnRef>
+          <a:fillRef idx="3">
+            <a:schemeClr val="accent1"/>
+          </a:fillRef>
+          <a:effectRef idx="2">
+            <a:schemeClr val="accent1"/>
+          </a:effectRef>
+          <a:fontRef idx="minor">
+            <a:schemeClr val="lt1"/>
+          </a:fontRef>
+        </p:style>
+        <p:txBody>
+          <a:bodyPr rtlCol="0" anchor="ctr"/>
+          <a:lstStyle/>
+          <a:p>
+            <a:pPr algn="ctr"/>
+          </a:p>
+        </p:txBody>
+      </p:sp>
+      <p:sp>
+        <p:nvSpPr>
+          <p:cNvPr id="16" name="TextBox 15"/>
+          <p:cNvSpPr txBox="1"/>
+          <p:nvPr/>
+        </p:nvSpPr>
+        <p:spPr>
+          <a:xfrm>
+            <a:off x="12054840" y="3188970"/>
+            <a:ext cx="5245608" cy="326898"/>
+          </a:xfrm>
+          <a:prstGeom prst="rect">
+            <a:avLst/>
+          </a:prstGeom>
+          <a:noFill/>
+        </p:spPr>
+        <p:txBody>
+          <a:bodyPr wrap="square" lIns="0" rIns="0" tIns="0" bIns="0" anchor="t">
+            <a:spAutoFit/>
+          </a:bodyPr>
+          <a:lstStyle/>
+          <a:p>
+            <a:pPr algn="l">
+              <a:lnSpc>
+                <a:spcPct val="132000"/>
+              </a:lnSpc>
+            </a:pPr>
+            <a:r>
+              <a:rPr sz="1950" b="0" u="none" i="0">
+                <a:solidFill>
+                  <a:srgbClr val="52525B"/>
+                </a:solidFill>
+                <a:latin typeface="Arial"/>
+              </a:rPr>
+              <a:t>Reviewed and approved, 26 July</a:t>
+            </a:r>
+          </a:p>
+        </p:txBody>
+      </p:sp>
+      <p:sp>
+        <p:nvSpPr>
+          <p:cNvPr id="17" name="rule"/>
+          <p:cNvSpPr/>
+          <p:nvPr/>
+        </p:nvSpPr>
+        <p:spPr>
+          <a:xfrm>
+            <a:off x="987552" y="3774186"/>
+            <a:ext cx="1748536" cy="10972"/>
+          </a:xfrm>
+          <a:prstGeom prst="rect">
+            <a:avLst/>
+          </a:prstGeom>
+          <a:solidFill>
+            <a:srgbClr val="E4E4E7"/>
+          </a:solidFill>
+          <a:ln>
+            <a:noFill/>
+          </a:ln>
+          <a:effectLst/>
+        </p:spPr>
+        <p:style>
+          <a:lnRef idx="1">
+            <a:schemeClr val="accent1"/>
+          </a:lnRef>
+          <a:fillRef idx="3">
+            <a:schemeClr val="accent1"/>
+          </a:fillRef>
+          <a:effectRef idx="2">
+            <a:schemeClr val="accent1"/>
+          </a:effectRef>
+          <a:fontRef idx="minor">
+            <a:schemeClr val="lt1"/>
+          </a:fontRef>
+        </p:style>
+        <p:txBody>
+          <a:bodyPr rtlCol="0" anchor="ctr"/>
+          <a:lstStyle/>
+          <a:p>
+            <a:pPr algn="ctr"/>
+          </a:p>
+        </p:txBody>
+      </p:sp>
+      <p:sp>
+        <p:nvSpPr>
+          <p:cNvPr id="18" name="TextBox 17"/>
+          <p:cNvSpPr txBox="1"/>
+          <p:nvPr/>
+        </p:nvSpPr>
+        <p:spPr>
+          <a:xfrm>
+            <a:off x="987552" y="4011930"/>
+            <a:ext cx="1748536" cy="402336"/>
+          </a:xfrm>
+          <a:prstGeom prst="rect">
+            <a:avLst/>
+          </a:prstGeom>
+          <a:noFill/>
+        </p:spPr>
+        <p:txBody>
+          <a:bodyPr wrap="square" lIns="0" rIns="0" tIns="0" bIns="0" anchor="t">
+            <a:spAutoFit/>
+          </a:bodyPr>
+          <a:lstStyle/>
+          <a:p>
+            <a:pPr algn="l">
+              <a:lnSpc>
+                <a:spcPct val="132000"/>
+              </a:lnSpc>
+            </a:pPr>
+            <a:r>
+              <a:rPr sz="2400" b="0" u="none" i="0">
+                <a:solidFill>
+                  <a:srgbClr val="18181B"/>
+                </a:solidFill>
+                <a:latin typeface="Arial"/>
+              </a:rPr>
+              <a:t>S1</a:t>
+            </a:r>
+          </a:p>
+        </p:txBody>
+      </p:sp>
+      <p:sp>
+        <p:nvSpPr>
+          <p:cNvPr id="19" name="rule"/>
+          <p:cNvSpPr/>
+          <p:nvPr/>
+        </p:nvSpPr>
+        <p:spPr>
+          <a:xfrm>
+            <a:off x="2928112" y="3774186"/>
+            <a:ext cx="5945022" cy="10972"/>
+          </a:xfrm>
+          <a:prstGeom prst="rect">
+            <a:avLst/>
+          </a:prstGeom>
+          <a:solidFill>
+            <a:srgbClr val="E4E4E7"/>
+          </a:solidFill>
+          <a:ln>
+            <a:noFill/>
+          </a:ln>
+          <a:effectLst/>
+        </p:spPr>
+        <p:style>
+          <a:lnRef idx="1">
+            <a:schemeClr val="accent1"/>
+          </a:lnRef>
+          <a:fillRef idx="3">
+            <a:schemeClr val="accent1"/>
+          </a:fillRef>
+          <a:effectRef idx="2">
+            <a:schemeClr val="accent1"/>
+          </a:effectRef>
+          <a:fontRef idx="minor">
+            <a:schemeClr val="lt1"/>
+          </a:fontRef>
+        </p:style>
+        <p:txBody>
+          <a:bodyPr rtlCol="0" anchor="ctr"/>
+          <a:lstStyle/>
+          <a:p>
+            <a:pPr algn="ctr"/>
+          </a:p>
+        </p:txBody>
+      </p:sp>
+      <p:sp>
+        <p:nvSpPr>
+          <p:cNvPr id="20" name="TextBox 19"/>
+          <p:cNvSpPr txBox="1"/>
+          <p:nvPr/>
+        </p:nvSpPr>
+        <p:spPr>
+          <a:xfrm>
+            <a:off x="2928112" y="4011930"/>
+            <a:ext cx="5945022" cy="326898"/>
+          </a:xfrm>
+          <a:prstGeom prst="rect">
+            <a:avLst/>
+          </a:prstGeom>
+          <a:noFill/>
+        </p:spPr>
+        <p:txBody>
+          <a:bodyPr wrap="square" lIns="0" rIns="0" tIns="0" bIns="0" anchor="t">
+            <a:spAutoFit/>
+          </a:bodyPr>
+          <a:lstStyle/>
+          <a:p>
+            <a:pPr algn="l">
+              <a:lnSpc>
+                <a:spcPct val="132000"/>
+              </a:lnSpc>
+            </a:pPr>
+            <a:r>
+              <a:rPr sz="1950" b="0" u="none" i="0">
+                <a:solidFill>
+                  <a:srgbClr val="52525B"/>
+                </a:solidFill>
+                <a:latin typeface="Arial"/>
+              </a:rPr>
+              <a:t>Multi-slot cache, inert</a:t>
+            </a:r>
+          </a:p>
+        </p:txBody>
+      </p:sp>
+      <p:sp>
+        <p:nvSpPr>
+          <p:cNvPr id="21" name="rule"/>
+          <p:cNvSpPr/>
+          <p:nvPr/>
+        </p:nvSpPr>
+        <p:spPr>
+          <a:xfrm>
+            <a:off x="9065158" y="3774186"/>
+            <a:ext cx="2797657" cy="10972"/>
+          </a:xfrm>
+          <a:prstGeom prst="rect">
+            <a:avLst/>
+          </a:prstGeom>
+          <a:solidFill>
+            <a:srgbClr val="E4E4E7"/>
+          </a:solidFill>
+          <a:ln>
+            <a:noFill/>
+          </a:ln>
+          <a:effectLst/>
+        </p:spPr>
+        <p:style>
+          <a:lnRef idx="1">
+            <a:schemeClr val="accent1"/>
+          </a:lnRef>
+          <a:fillRef idx="3">
+            <a:schemeClr val="accent1"/>
+          </a:fillRef>
+          <a:effectRef idx="2">
+            <a:schemeClr val="accent1"/>
+          </a:effectRef>
+          <a:fontRef idx="minor">
+            <a:schemeClr val="lt1"/>
+          </a:fontRef>
+        </p:style>
+        <p:txBody>
+          <a:bodyPr rtlCol="0" anchor="ctr"/>
+          <a:lstStyle/>
+          <a:p>
+            <a:pPr algn="ctr"/>
+          </a:p>
+        </p:txBody>
+      </p:sp>
+      <p:sp>
+        <p:nvSpPr>
+          <p:cNvPr id="22" name="chip"/>
+          <p:cNvSpPr/>
+          <p:nvPr/>
+        </p:nvSpPr>
+        <p:spPr>
+          <a:xfrm>
+            <a:off x="9065158" y="4011930"/>
+            <a:ext cx="1154465" cy="495299"/>
+          </a:xfrm>
+          <a:prstGeom prst="roundRect">
+            <a:avLst>
+              <a:gd name="adj" fmla="val 50000"/>
+            </a:avLst>
+          </a:prstGeom>
+          <a:solidFill>
+            <a:srgbClr val="E5F4EE"/>
+          </a:solidFill>
+          <a:ln>
+            <a:noFill/>
+          </a:ln>
+          <a:effectLst/>
+        </p:spPr>
+        <p:style>
+          <a:lnRef idx="1">
+            <a:schemeClr val="accent1"/>
+          </a:lnRef>
+          <a:fillRef idx="3">
+            <a:schemeClr val="accent1"/>
+          </a:fillRef>
+          <a:effectRef idx="2">
+            <a:schemeClr val="accent1"/>
+          </a:effectRef>
+          <a:fontRef idx="minor">
+            <a:schemeClr val="lt1"/>
+          </a:fontRef>
+        </p:style>
+        <p:txBody>
+          <a:bodyPr rtlCol="0" anchor="ctr"/>
+          <a:lstStyle/>
+          <a:p>
+            <a:pPr algn="ctr"/>
+          </a:p>
+        </p:txBody>
+      </p:sp>
+      <p:sp>
+        <p:nvSpPr>
+          <p:cNvPr id="23" name="TextBox 22"/>
+          <p:cNvSpPr txBox="1"/>
+          <p:nvPr/>
+        </p:nvSpPr>
+        <p:spPr>
+          <a:xfrm>
+            <a:off x="9339478" y="4096131"/>
+            <a:ext cx="605825" cy="326898"/>
+          </a:xfrm>
+          <a:prstGeom prst="rect">
+            <a:avLst/>
+          </a:prstGeom>
+          <a:noFill/>
+        </p:spPr>
+        <p:txBody>
+          <a:bodyPr wrap="square" lIns="0" rIns="0" tIns="0" bIns="0" anchor="t">
+            <a:spAutoFit/>
+          </a:bodyPr>
+          <a:lstStyle/>
+          <a:p>
+            <a:pPr algn="l">
+              <a:lnSpc>
+                <a:spcPct val="132000"/>
+              </a:lnSpc>
+            </a:pPr>
+            <a:r>
+              <a:rPr sz="1950" b="0" u="none" i="0">
+                <a:solidFill>
+                  <a:srgbClr val="047857"/>
+                </a:solidFill>
+                <a:latin typeface="Arial"/>
+              </a:rPr>
+              <a:t>done</a:t>
+            </a:r>
+          </a:p>
+        </p:txBody>
+      </p:sp>
+      <p:sp>
+        <p:nvSpPr>
+          <p:cNvPr id="24" name="rule"/>
+          <p:cNvSpPr/>
+          <p:nvPr/>
+        </p:nvSpPr>
+        <p:spPr>
+          <a:xfrm>
+            <a:off x="12054840" y="3774186"/>
+            <a:ext cx="5245608" cy="10972"/>
+          </a:xfrm>
+          <a:prstGeom prst="rect">
+            <a:avLst/>
+          </a:prstGeom>
+          <a:solidFill>
+            <a:srgbClr val="E4E4E7"/>
+          </a:solidFill>
+          <a:ln>
+            <a:noFill/>
+          </a:ln>
+          <a:effectLst/>
+        </p:spPr>
+        <p:style>
+          <a:lnRef idx="1">
+            <a:schemeClr val="accent1"/>
+          </a:lnRef>
+          <a:fillRef idx="3">
+            <a:schemeClr val="accent1"/>
+          </a:fillRef>
+          <a:effectRef idx="2">
+            <a:schemeClr val="accent1"/>
+          </a:effectRef>
+          <a:fontRef idx="minor">
+            <a:schemeClr val="lt1"/>
+          </a:fontRef>
+        </p:style>
+        <p:txBody>
+          <a:bodyPr rtlCol="0" anchor="ctr"/>
+          <a:lstStyle/>
+          <a:p>
+            <a:pPr algn="ctr"/>
+          </a:p>
+        </p:txBody>
+      </p:sp>
+      <p:sp>
+        <p:nvSpPr>
+          <p:cNvPr id="25" name="TextBox 24"/>
+          <p:cNvSpPr txBox="1"/>
+          <p:nvPr/>
+        </p:nvSpPr>
+        <p:spPr>
+          <a:xfrm>
+            <a:off x="12054840" y="4011930"/>
+            <a:ext cx="5245608" cy="326898"/>
+          </a:xfrm>
+          <a:prstGeom prst="rect">
+            <a:avLst/>
+          </a:prstGeom>
+          <a:noFill/>
+        </p:spPr>
+        <p:txBody>
+          <a:bodyPr wrap="square" lIns="0" rIns="0" tIns="0" bIns="0" anchor="t">
+            <a:spAutoFit/>
+          </a:bodyPr>
+          <a:lstStyle/>
+          <a:p>
+            <a:pPr algn="l">
+              <a:lnSpc>
+                <a:spcPct val="132000"/>
+              </a:lnSpc>
+            </a:pPr>
+            <a:r>
+              <a:rPr sz="1950" b="0" u="none" i="0">
+                <a:solidFill>
+                  <a:srgbClr val="52525B"/>
+                </a:solidFill>
+                <a:latin typeface="Arial"/>
+              </a:rPr>
+              <a:t>Bit-identical on both gates, in simulation</a:t>
+            </a:r>
+          </a:p>
+        </p:txBody>
+      </p:sp>
+      <p:sp>
+        <p:nvSpPr>
+          <p:cNvPr id="26" name="rule"/>
+          <p:cNvSpPr/>
+          <p:nvPr/>
+        </p:nvSpPr>
+        <p:spPr>
+          <a:xfrm>
+            <a:off x="987552" y="4597146"/>
+            <a:ext cx="1748536" cy="10972"/>
+          </a:xfrm>
+          <a:prstGeom prst="rect">
+            <a:avLst/>
+          </a:prstGeom>
+          <a:solidFill>
+            <a:srgbClr val="E4E4E7"/>
+          </a:solidFill>
+          <a:ln>
+            <a:noFill/>
+          </a:ln>
+          <a:effectLst/>
+        </p:spPr>
+        <p:style>
+          <a:lnRef idx="1">
+            <a:schemeClr val="accent1"/>
+          </a:lnRef>
+          <a:fillRef idx="3">
+            <a:schemeClr val="accent1"/>
+          </a:fillRef>
+          <a:effectRef idx="2">
+            <a:schemeClr val="accent1"/>
+          </a:effectRef>
+          <a:fontRef idx="minor">
+            <a:schemeClr val="lt1"/>
+          </a:fontRef>
+        </p:style>
+        <p:txBody>
+          <a:bodyPr rtlCol="0" anchor="ctr"/>
+          <a:lstStyle/>
+          <a:p>
+            <a:pPr algn="ctr"/>
+          </a:p>
+        </p:txBody>
+      </p:sp>
+      <p:sp>
+        <p:nvSpPr>
+          <p:cNvPr id="27" name="TextBox 26"/>
+          <p:cNvSpPr txBox="1"/>
+          <p:nvPr/>
+        </p:nvSpPr>
+        <p:spPr>
+          <a:xfrm>
+            <a:off x="987552" y="4834890"/>
+            <a:ext cx="1748536" cy="402336"/>
+          </a:xfrm>
+          <a:prstGeom prst="rect">
+            <a:avLst/>
+          </a:prstGeom>
+          <a:noFill/>
+        </p:spPr>
+        <p:txBody>
+          <a:bodyPr wrap="square" lIns="0" rIns="0" tIns="0" bIns="0" anchor="t">
+            <a:spAutoFit/>
+          </a:bodyPr>
+          <a:lstStyle/>
+          <a:p>
+            <a:pPr algn="l">
+              <a:lnSpc>
+                <a:spcPct val="132000"/>
+              </a:lnSpc>
+            </a:pPr>
+            <a:r>
+              <a:rPr sz="2400" b="0" u="none" i="0">
+                <a:solidFill>
+                  <a:srgbClr val="18181B"/>
+                </a:solidFill>
+                <a:latin typeface="Arial"/>
+              </a:rPr>
+              <a:t>S2</a:t>
+            </a:r>
+          </a:p>
+        </p:txBody>
+      </p:sp>
+      <p:sp>
+        <p:nvSpPr>
+          <p:cNvPr id="28" name="rule"/>
+          <p:cNvSpPr/>
+          <p:nvPr/>
+        </p:nvSpPr>
+        <p:spPr>
+          <a:xfrm>
+            <a:off x="2928112" y="4597146"/>
+            <a:ext cx="5945022" cy="10972"/>
+          </a:xfrm>
+          <a:prstGeom prst="rect">
+            <a:avLst/>
+          </a:prstGeom>
+          <a:solidFill>
+            <a:srgbClr val="E4E4E7"/>
+          </a:solidFill>
+          <a:ln>
+            <a:noFill/>
+          </a:ln>
+          <a:effectLst/>
+        </p:spPr>
+        <p:style>
+          <a:lnRef idx="1">
+            <a:schemeClr val="accent1"/>
+          </a:lnRef>
+          <a:fillRef idx="3">
+            <a:schemeClr val="accent1"/>
+          </a:fillRef>
+          <a:effectRef idx="2">
+            <a:schemeClr val="accent1"/>
+          </a:effectRef>
+          <a:fontRef idx="minor">
+            <a:schemeClr val="lt1"/>
+          </a:fontRef>
+        </p:style>
+        <p:txBody>
+          <a:bodyPr rtlCol="0" anchor="ctr"/>
+          <a:lstStyle/>
+          <a:p>
+            <a:pPr algn="ctr"/>
+          </a:p>
+        </p:txBody>
+      </p:sp>
+      <p:sp>
+        <p:nvSpPr>
+          <p:cNvPr id="29" name="TextBox 28"/>
+          <p:cNvSpPr txBox="1"/>
+          <p:nvPr/>
+        </p:nvSpPr>
+        <p:spPr>
+          <a:xfrm>
+            <a:off x="2928112" y="4834890"/>
+            <a:ext cx="5945022" cy="326898"/>
+          </a:xfrm>
+          <a:prstGeom prst="rect">
+            <a:avLst/>
+          </a:prstGeom>
+          <a:noFill/>
+        </p:spPr>
+        <p:txBody>
+          <a:bodyPr wrap="square" lIns="0" rIns="0" tIns="0" bIns="0" anchor="t">
+            <a:spAutoFit/>
+          </a:bodyPr>
+          <a:lstStyle/>
+          <a:p>
+            <a:pPr algn="l">
+              <a:lnSpc>
+                <a:spcPct val="132000"/>
+              </a:lnSpc>
+            </a:pPr>
+            <a:r>
+              <a:rPr sz="1950" b="0" u="none" i="0">
+                <a:solidFill>
+                  <a:srgbClr val="52525B"/>
+                </a:solidFill>
+                <a:latin typeface="Arial"/>
+              </a:rPr>
+              <a:t>Retain and extend across a changing active set</a:t>
+            </a:r>
+          </a:p>
+        </p:txBody>
+      </p:sp>
+      <p:sp>
+        <p:nvSpPr>
+          <p:cNvPr id="30" name="rule"/>
+          <p:cNvSpPr/>
+          <p:nvPr/>
+        </p:nvSpPr>
+        <p:spPr>
+          <a:xfrm>
+            <a:off x="9065158" y="4597146"/>
+            <a:ext cx="2797657" cy="10972"/>
+          </a:xfrm>
+          <a:prstGeom prst="rect">
+            <a:avLst/>
+          </a:prstGeom>
+          <a:solidFill>
+            <a:srgbClr val="E4E4E7"/>
+          </a:solidFill>
+          <a:ln>
+            <a:noFill/>
+          </a:ln>
+          <a:effectLst/>
+        </p:spPr>
+        <p:style>
+          <a:lnRef idx="1">
+            <a:schemeClr val="accent1"/>
+          </a:lnRef>
+          <a:fillRef idx="3">
+            <a:schemeClr val="accent1"/>
+          </a:fillRef>
+          <a:effectRef idx="2">
+            <a:schemeClr val="accent1"/>
+          </a:effectRef>
+          <a:fontRef idx="minor">
+            <a:schemeClr val="lt1"/>
+          </a:fontRef>
+        </p:style>
+        <p:txBody>
+          <a:bodyPr rtlCol="0" anchor="ctr"/>
+          <a:lstStyle/>
+          <a:p>
+            <a:pPr algn="ctr"/>
+          </a:p>
+        </p:txBody>
+      </p:sp>
+      <p:sp>
+        <p:nvSpPr>
+          <p:cNvPr id="31" name="chip"/>
+          <p:cNvSpPr/>
+          <p:nvPr/>
+        </p:nvSpPr>
+        <p:spPr>
+          <a:xfrm>
+            <a:off x="9065158" y="4834890"/>
+            <a:ext cx="1484467" cy="495299"/>
+          </a:xfrm>
+          <a:prstGeom prst="roundRect">
+            <a:avLst>
+              <a:gd name="adj" fmla="val 50000"/>
+            </a:avLst>
+          </a:prstGeom>
+          <a:solidFill>
+            <a:srgbClr val="E9F0FE"/>
+          </a:solidFill>
+          <a:ln>
+            <a:noFill/>
+          </a:ln>
+          <a:effectLst/>
+        </p:spPr>
+        <p:style>
+          <a:lnRef idx="1">
+            <a:schemeClr val="accent1"/>
+          </a:lnRef>
+          <a:fillRef idx="3">
+            <a:schemeClr val="accent1"/>
+          </a:fillRef>
+          <a:effectRef idx="2">
+            <a:schemeClr val="accent1"/>
+          </a:effectRef>
+          <a:fontRef idx="minor">
+            <a:schemeClr val="lt1"/>
+          </a:fontRef>
+        </p:style>
+        <p:txBody>
+          <a:bodyPr rtlCol="0" anchor="ctr"/>
+          <a:lstStyle/>
+          <a:p>
+            <a:pPr algn="ctr"/>
+          </a:p>
+        </p:txBody>
+      </p:sp>
+      <p:sp>
+        <p:nvSpPr>
+          <p:cNvPr id="32" name="TextBox 31"/>
+          <p:cNvSpPr txBox="1"/>
+          <p:nvPr/>
+        </p:nvSpPr>
+        <p:spPr>
+          <a:xfrm>
+            <a:off x="9339478" y="4919091"/>
+            <a:ext cx="935827" cy="326898"/>
+          </a:xfrm>
+          <a:prstGeom prst="rect">
+            <a:avLst/>
+          </a:prstGeom>
+          <a:noFill/>
+        </p:spPr>
+        <p:txBody>
+          <a:bodyPr wrap="square" lIns="0" rIns="0" tIns="0" bIns="0" anchor="t">
+            <a:spAutoFit/>
+          </a:bodyPr>
+          <a:lstStyle/>
+          <a:p>
+            <a:pPr algn="l">
+              <a:lnSpc>
+                <a:spcPct val="132000"/>
+              </a:lnSpc>
+            </a:pPr>
+            <a:r>
+              <a:rPr sz="1950" b="0" u="none" i="0">
+                <a:solidFill>
+                  <a:srgbClr val="1D4ED8"/>
+                </a:solidFill>
+                <a:latin typeface="Arial"/>
+              </a:rPr>
+              <a:t>on track</a:t>
+            </a:r>
+          </a:p>
+        </p:txBody>
+      </p:sp>
+      <p:sp>
+        <p:nvSpPr>
+          <p:cNvPr id="33" name="rule"/>
+          <p:cNvSpPr/>
+          <p:nvPr/>
+        </p:nvSpPr>
+        <p:spPr>
+          <a:xfrm>
+            <a:off x="12054840" y="4597146"/>
+            <a:ext cx="5245608" cy="10972"/>
+          </a:xfrm>
+          <a:prstGeom prst="rect">
+            <a:avLst/>
+          </a:prstGeom>
+          <a:solidFill>
+            <a:srgbClr val="E4E4E7"/>
+          </a:solidFill>
+          <a:ln>
+            <a:noFill/>
+          </a:ln>
+          <a:effectLst/>
+        </p:spPr>
+        <p:style>
+          <a:lnRef idx="1">
+            <a:schemeClr val="accent1"/>
+          </a:lnRef>
+          <a:fillRef idx="3">
+            <a:schemeClr val="accent1"/>
+          </a:fillRef>
+          <a:effectRef idx="2">
+            <a:schemeClr val="accent1"/>
+          </a:effectRef>
+          <a:fontRef idx="minor">
+            <a:schemeClr val="lt1"/>
+          </a:fontRef>
+        </p:style>
+        <p:txBody>
+          <a:bodyPr rtlCol="0" anchor="ctr"/>
+          <a:lstStyle/>
+          <a:p>
+            <a:pPr algn="ctr"/>
+          </a:p>
+        </p:txBody>
+      </p:sp>
+      <p:sp>
+        <p:nvSpPr>
+          <p:cNvPr id="34" name="TextBox 33"/>
+          <p:cNvSpPr txBox="1"/>
+          <p:nvPr/>
+        </p:nvSpPr>
+        <p:spPr>
+          <a:xfrm>
+            <a:off x="12054840" y="4834890"/>
+            <a:ext cx="5245608" cy="326898"/>
+          </a:xfrm>
+          <a:prstGeom prst="rect">
+            <a:avLst/>
+          </a:prstGeom>
+          <a:noFill/>
+        </p:spPr>
+        <p:txBody>
+          <a:bodyPr wrap="square" lIns="0" rIns="0" tIns="0" bIns="0" anchor="t">
+            <a:spAutoFit/>
+          </a:bodyPr>
+          <a:lstStyle/>
+          <a:p>
+            <a:pPr algn="l">
+              <a:lnSpc>
+                <a:spcPct val="132000"/>
+              </a:lnSpc>
+            </a:pPr>
+            <a:r>
+              <a:rPr sz="1950" b="0" u="none" i="0">
+                <a:solidFill>
+                  <a:srgbClr val="52525B"/>
+                </a:solidFill>
+                <a:latin typeface="Arial"/>
+              </a:rPr>
+              <a:t>Next: per-slot lengths on the host</a:t>
+            </a:r>
+          </a:p>
+        </p:txBody>
+      </p:sp>
+      <p:sp>
+        <p:nvSpPr>
+          <p:cNvPr id="35" name="rule"/>
+          <p:cNvSpPr/>
+          <p:nvPr/>
+        </p:nvSpPr>
+        <p:spPr>
+          <a:xfrm>
+            <a:off x="987552" y="5420106"/>
+            <a:ext cx="1748536" cy="10972"/>
+          </a:xfrm>
+          <a:prstGeom prst="rect">
+            <a:avLst/>
+          </a:prstGeom>
+          <a:solidFill>
+            <a:srgbClr val="E4E4E7"/>
+          </a:solidFill>
+          <a:ln>
+            <a:noFill/>
+          </a:ln>
+          <a:effectLst/>
+        </p:spPr>
+        <p:style>
+          <a:lnRef idx="1">
+            <a:schemeClr val="accent1"/>
+          </a:lnRef>
+          <a:fillRef idx="3">
+            <a:schemeClr val="accent1"/>
+          </a:fillRef>
+          <a:effectRef idx="2">
+            <a:schemeClr val="accent1"/>
+          </a:effectRef>
+          <a:fontRef idx="minor">
+            <a:schemeClr val="lt1"/>
+          </a:fontRef>
+        </p:style>
+        <p:txBody>
+          <a:bodyPr rtlCol="0" anchor="ctr"/>
+          <a:lstStyle/>
+          <a:p>
+            <a:pPr algn="ctr"/>
+          </a:p>
+        </p:txBody>
+      </p:sp>
+      <p:sp>
+        <p:nvSpPr>
+          <p:cNvPr id="36" name="TextBox 35"/>
+          <p:cNvSpPr txBox="1"/>
+          <p:nvPr/>
+        </p:nvSpPr>
+        <p:spPr>
+          <a:xfrm>
+            <a:off x="987552" y="5657850"/>
+            <a:ext cx="1748536" cy="402336"/>
+          </a:xfrm>
+          <a:prstGeom prst="rect">
+            <a:avLst/>
+          </a:prstGeom>
+          <a:noFill/>
+        </p:spPr>
+        <p:txBody>
+          <a:bodyPr wrap="square" lIns="0" rIns="0" tIns="0" bIns="0" anchor="t">
+            <a:spAutoFit/>
+          </a:bodyPr>
+          <a:lstStyle/>
+          <a:p>
+            <a:pPr algn="l">
+              <a:lnSpc>
+                <a:spcPct val="132000"/>
+              </a:lnSpc>
+            </a:pPr>
+            <a:r>
+              <a:rPr sz="2400" b="0" u="none" i="0">
+                <a:solidFill>
+                  <a:srgbClr val="18181B"/>
+                </a:solidFill>
+                <a:latin typeface="Arial"/>
+              </a:rPr>
+              <a:t>S3</a:t>
+            </a:r>
+          </a:p>
+        </p:txBody>
+      </p:sp>
+      <p:sp>
+        <p:nvSpPr>
+          <p:cNvPr id="37" name="rule"/>
+          <p:cNvSpPr/>
+          <p:nvPr/>
+        </p:nvSpPr>
+        <p:spPr>
+          <a:xfrm>
+            <a:off x="2928112" y="5420106"/>
+            <a:ext cx="5945022" cy="10972"/>
+          </a:xfrm>
+          <a:prstGeom prst="rect">
+            <a:avLst/>
+          </a:prstGeom>
+          <a:solidFill>
+            <a:srgbClr val="E4E4E7"/>
+          </a:solidFill>
+          <a:ln>
+            <a:noFill/>
+          </a:ln>
+          <a:effectLst/>
+        </p:spPr>
+        <p:style>
+          <a:lnRef idx="1">
+            <a:schemeClr val="accent1"/>
+          </a:lnRef>
+          <a:fillRef idx="3">
+            <a:schemeClr val="accent1"/>
+          </a:fillRef>
+          <a:effectRef idx="2">
+            <a:schemeClr val="accent1"/>
+          </a:effectRef>
+          <a:fontRef idx="minor">
+            <a:schemeClr val="lt1"/>
+          </a:fontRef>
+        </p:style>
+        <p:txBody>
+          <a:bodyPr rtlCol="0" anchor="ctr"/>
+          <a:lstStyle/>
+          <a:p>
+            <a:pPr algn="ctr"/>
+          </a:p>
+        </p:txBody>
+      </p:sp>
+      <p:sp>
+        <p:nvSpPr>
+          <p:cNvPr id="38" name="TextBox 37"/>
+          <p:cNvSpPr txBox="1"/>
+          <p:nvPr/>
+        </p:nvSpPr>
+        <p:spPr>
+          <a:xfrm>
+            <a:off x="2928112" y="5657850"/>
+            <a:ext cx="5945022" cy="326898"/>
+          </a:xfrm>
+          <a:prstGeom prst="rect">
+            <a:avLst/>
+          </a:prstGeom>
+          <a:noFill/>
+        </p:spPr>
+        <p:txBody>
+          <a:bodyPr wrap="square" lIns="0" rIns="0" tIns="0" bIns="0" anchor="t">
+            <a:spAutoFit/>
+          </a:bodyPr>
+          <a:lstStyle/>
+          <a:p>
+            <a:pPr algn="l">
+              <a:lnSpc>
+                <a:spcPct val="132000"/>
+              </a:lnSpc>
+            </a:pPr>
+            <a:r>
+              <a:rPr sz="1950" b="0" u="none" i="0">
+                <a:solidFill>
+                  <a:srgbClr val="52525B"/>
+                </a:solidFill>
+                <a:latin typeface="Arial"/>
+              </a:rPr>
+              <a:t>Hit detection, eviction, miss handling</a:t>
+            </a:r>
+          </a:p>
+        </p:txBody>
+      </p:sp>
+      <p:sp>
+        <p:nvSpPr>
+          <p:cNvPr id="39" name="rule"/>
+          <p:cNvSpPr/>
+          <p:nvPr/>
+        </p:nvSpPr>
+        <p:spPr>
+          <a:xfrm>
+            <a:off x="9065158" y="5420106"/>
+            <a:ext cx="2797657" cy="10972"/>
+          </a:xfrm>
+          <a:prstGeom prst="rect">
+            <a:avLst/>
+          </a:prstGeom>
+          <a:solidFill>
+            <a:srgbClr val="E4E4E7"/>
+          </a:solidFill>
+          <a:ln>
+            <a:noFill/>
+          </a:ln>
+          <a:effectLst/>
+        </p:spPr>
+        <p:style>
+          <a:lnRef idx="1">
+            <a:schemeClr val="accent1"/>
+          </a:lnRef>
+          <a:fillRef idx="3">
+            <a:schemeClr val="accent1"/>
+          </a:fillRef>
+          <a:effectRef idx="2">
+            <a:schemeClr val="accent1"/>
+          </a:effectRef>
+          <a:fontRef idx="minor">
+            <a:schemeClr val="lt1"/>
+          </a:fontRef>
+        </p:style>
+        <p:txBody>
+          <a:bodyPr rtlCol="0" anchor="ctr"/>
+          <a:lstStyle/>
+          <a:p>
+            <a:pPr algn="ctr"/>
+          </a:p>
+        </p:txBody>
+      </p:sp>
+      <p:sp>
+        <p:nvSpPr>
+          <p:cNvPr id="40" name="chip"/>
+          <p:cNvSpPr/>
+          <p:nvPr/>
+        </p:nvSpPr>
+        <p:spPr>
+          <a:xfrm>
+            <a:off x="9065158" y="5657850"/>
+            <a:ext cx="1484963" cy="495299"/>
+          </a:xfrm>
+          <a:prstGeom prst="roundRect">
+            <a:avLst>
+              <a:gd name="adj" fmla="val 50000"/>
             </a:avLst>
           </a:prstGeom>
           <a:solidFill>
@@ -5176,131 +4245,53 @@
       </p:sp>
       <p:sp>
         <p:nvSpPr>
-          <p:cNvPr id="8" name="TextBox 7"/>
-          <p:cNvSpPr txBox="1"/>
-          <p:nvPr/>
-        </p:nvSpPr>
-        <p:spPr>
-          <a:xfrm>
-            <a:off x="10058400" y="3015234"/>
-            <a:ext cx="6711696" cy="301752"/>
-          </a:xfrm>
-          <a:prstGeom prst="rect">
-            <a:avLst/>
-          </a:prstGeom>
-          <a:noFill/>
-        </p:spPr>
-        <p:txBody>
-          <a:bodyPr wrap="square" lIns="0" rIns="0" tIns="0" bIns="0" anchor="t">
-            <a:spAutoFit/>
-          </a:bodyPr>
-          <a:lstStyle/>
-          <a:p>
-            <a:pPr algn="l">
-              <a:lnSpc>
-                <a:spcPct val="132000"/>
-              </a:lnSpc>
-            </a:pPr>
-            <a:r>
-              <a:rPr sz="1800" b="0" u="none" i="0" spc="150">
-                <a:solidFill>
-                  <a:srgbClr val="A1A1AA"/>
-                </a:solidFill>
-                <a:latin typeface="Arial"/>
-              </a:rPr>
-              <a:t>FOUR COUPLED QUESTIONS</a:t>
-            </a:r>
-          </a:p>
-        </p:txBody>
-      </p:sp>
-      <p:sp>
-        <p:nvSpPr>
-          <p:cNvPr id="9" name="TextBox 8"/>
-          <p:cNvSpPr txBox="1"/>
-          <p:nvPr/>
-        </p:nvSpPr>
-        <p:spPr>
-          <a:xfrm>
-            <a:off x="10058400" y="3499865"/>
-            <a:ext cx="548640" cy="402336"/>
-          </a:xfrm>
-          <a:prstGeom prst="rect">
-            <a:avLst/>
-          </a:prstGeom>
-          <a:noFill/>
-        </p:spPr>
-        <p:txBody>
-          <a:bodyPr wrap="square" lIns="0" rIns="0" tIns="0" bIns="0" anchor="t">
-            <a:spAutoFit/>
-          </a:bodyPr>
-          <a:lstStyle/>
-          <a:p>
-            <a:pPr algn="l">
-              <a:lnSpc>
-                <a:spcPct val="132000"/>
-              </a:lnSpc>
-            </a:pPr>
-            <a:r>
-              <a:rPr sz="2400" b="1" u="none" i="0">
-                <a:solidFill>
-                  <a:srgbClr val="6D28D9"/>
-                </a:solidFill>
-                <a:latin typeface="Arial"/>
-              </a:rPr>
-              <a:t>01</a:t>
-            </a:r>
-          </a:p>
-        </p:txBody>
-      </p:sp>
-      <p:sp>
-        <p:nvSpPr>
-          <p:cNvPr id="10" name="TextBox 9"/>
-          <p:cNvSpPr txBox="1"/>
-          <p:nvPr/>
-        </p:nvSpPr>
-        <p:spPr>
-          <a:xfrm>
-            <a:off x="10579608" y="3499865"/>
-            <a:ext cx="6190488" cy="804672"/>
-          </a:xfrm>
-          <a:prstGeom prst="rect">
-            <a:avLst/>
-          </a:prstGeom>
-          <a:noFill/>
-        </p:spPr>
-        <p:txBody>
-          <a:bodyPr wrap="square" lIns="0" rIns="0" tIns="0" bIns="0" anchor="t">
-            <a:spAutoFit/>
-          </a:bodyPr>
-          <a:lstStyle/>
-          <a:p>
-            <a:pPr algn="l">
-              <a:lnSpc>
-                <a:spcPct val="132000"/>
-              </a:lnSpc>
-            </a:pPr>
-            <a:r>
-              <a:rPr sz="2400" b="0" u="none" i="0">
-                <a:solidFill>
-                  <a:srgbClr val="18181B"/>
-                </a:solidFill>
-                <a:latin typeface="Arial"/>
-              </a:rPr>
-              <a:t>Does the control plane live on the host, or distributed across the compute PEs?</a:t>
-            </a:r>
-          </a:p>
-        </p:txBody>
-      </p:sp>
-      <p:sp>
-        <p:nvSpPr>
-          <p:cNvPr id="11" name="rule"/>
+          <p:cNvPr id="41" name="TextBox 40"/>
+          <p:cNvSpPr txBox="1"/>
+          <p:nvPr/>
+        </p:nvSpPr>
+        <p:spPr>
+          <a:xfrm>
+            <a:off x="9339478" y="5742051"/>
+            <a:ext cx="936323" cy="326898"/>
+          </a:xfrm>
+          <a:prstGeom prst="rect">
+            <a:avLst/>
+          </a:prstGeom>
+          <a:noFill/>
+        </p:spPr>
+        <p:txBody>
+          <a:bodyPr wrap="square" lIns="0" rIns="0" tIns="0" bIns="0" anchor="t">
+            <a:spAutoFit/>
+          </a:bodyPr>
+          <a:lstStyle/>
+          <a:p>
+            <a:pPr algn="l">
+              <a:lnSpc>
+                <a:spcPct val="132000"/>
+              </a:lnSpc>
+            </a:pPr>
+            <a:r>
+              <a:rPr sz="1950" b="0" u="none" i="0">
+                <a:solidFill>
+                  <a:srgbClr val="52525B"/>
+                </a:solidFill>
+                <a:latin typeface="Arial"/>
+              </a:rPr>
+              <a:t>planned</a:t>
+            </a:r>
+          </a:p>
+        </p:txBody>
+      </p:sp>
+      <p:sp>
+        <p:nvSpPr>
+          <p:cNvPr id="42" name="rule"/>
           <p:cNvSpPr/>
           <p:nvPr/>
         </p:nvSpPr>
         <p:spPr>
           <a:xfrm>
-            <a:off x="10058400" y="4472787"/>
-            <a:ext cx="6711696" cy="10972"/>
+            <a:off x="12054840" y="5420106"/>
+            <a:ext cx="5245608" cy="10972"/>
           </a:xfrm>
           <a:prstGeom prst="rect">
             <a:avLst/>
@@ -5337,92 +4328,53 @@
       </p:sp>
       <p:sp>
         <p:nvSpPr>
-          <p:cNvPr id="12" name="TextBox 11"/>
-          <p:cNvSpPr txBox="1"/>
-          <p:nvPr/>
-        </p:nvSpPr>
-        <p:spPr>
-          <a:xfrm>
-            <a:off x="10058400" y="4652009"/>
-            <a:ext cx="548640" cy="402336"/>
-          </a:xfrm>
-          <a:prstGeom prst="rect">
-            <a:avLst/>
-          </a:prstGeom>
-          <a:noFill/>
-        </p:spPr>
-        <p:txBody>
-          <a:bodyPr wrap="square" lIns="0" rIns="0" tIns="0" bIns="0" anchor="t">
-            <a:spAutoFit/>
-          </a:bodyPr>
-          <a:lstStyle/>
-          <a:p>
-            <a:pPr algn="l">
-              <a:lnSpc>
-                <a:spcPct val="132000"/>
-              </a:lnSpc>
-            </a:pPr>
-            <a:r>
-              <a:rPr sz="2400" b="1" u="none" i="0">
-                <a:solidFill>
-                  <a:srgbClr val="6D28D9"/>
-                </a:solidFill>
-                <a:latin typeface="Arial"/>
-              </a:rPr>
-              <a:t>02</a:t>
-            </a:r>
-          </a:p>
-        </p:txBody>
-      </p:sp>
-      <p:sp>
-        <p:nvSpPr>
-          <p:cNvPr id="13" name="TextBox 12"/>
-          <p:cNvSpPr txBox="1"/>
-          <p:nvPr/>
-        </p:nvSpPr>
-        <p:spPr>
-          <a:xfrm>
-            <a:off x="10579608" y="4652009"/>
-            <a:ext cx="6190488" cy="804672"/>
-          </a:xfrm>
-          <a:prstGeom prst="rect">
-            <a:avLst/>
-          </a:prstGeom>
-          <a:noFill/>
-        </p:spPr>
-        <p:txBody>
-          <a:bodyPr wrap="square" lIns="0" rIns="0" tIns="0" bIns="0" anchor="t">
-            <a:spAutoFit/>
-          </a:bodyPr>
-          <a:lstStyle/>
-          <a:p>
-            <a:pPr algn="l">
-              <a:lnSpc>
-                <a:spcPct val="132000"/>
-              </a:lnSpc>
-            </a:pPr>
-            <a:r>
-              <a:rPr sz="2400" b="0" u="none" i="0">
-                <a:solidFill>
-                  <a:srgbClr val="18181B"/>
-                </a:solidFill>
-                <a:latin typeface="Arial"/>
-              </a:rPr>
-              <a:t>Fixed-size slots, or paging for copy-free prefix sharing?</a:t>
-            </a:r>
-          </a:p>
-        </p:txBody>
-      </p:sp>
-      <p:sp>
-        <p:nvSpPr>
-          <p:cNvPr id="14" name="rule"/>
+          <p:cNvPr id="43" name="TextBox 42"/>
+          <p:cNvSpPr txBox="1"/>
+          <p:nvPr/>
+        </p:nvSpPr>
+        <p:spPr>
+          <a:xfrm>
+            <a:off x="12054840" y="5657850"/>
+            <a:ext cx="5245608" cy="326898"/>
+          </a:xfrm>
+          <a:prstGeom prst="rect">
+            <a:avLst/>
+          </a:prstGeom>
+          <a:noFill/>
+        </p:spPr>
+        <p:txBody>
+          <a:bodyPr wrap="square" lIns="0" rIns="0" tIns="0" bIns="0" anchor="t">
+            <a:spAutoFit/>
+          </a:bodyPr>
+          <a:lstStyle/>
+          <a:p>
+            <a:pPr algn="l">
+              <a:lnSpc>
+                <a:spcPct val="132000"/>
+              </a:lnSpc>
+            </a:pPr>
+            <a:r>
+              <a:rPr sz="1950" b="0" u="none" i="0">
+                <a:solidFill>
+                  <a:srgbClr val="52525B"/>
+                </a:solidFill>
+                <a:latin typeface="Arial"/>
+              </a:rPr>
+              <a:t>A miss rebuilds by force-decoding</a:t>
+            </a:r>
+          </a:p>
+        </p:txBody>
+      </p:sp>
+      <p:sp>
+        <p:nvSpPr>
+          <p:cNvPr id="44" name="rule"/>
           <p:cNvSpPr/>
           <p:nvPr/>
         </p:nvSpPr>
         <p:spPr>
           <a:xfrm>
-            <a:off x="10058400" y="5624931"/>
-            <a:ext cx="6711696" cy="10972"/>
+            <a:off x="987552" y="6243066"/>
+            <a:ext cx="1748536" cy="10972"/>
           </a:xfrm>
           <a:prstGeom prst="rect">
             <a:avLst/>
@@ -5459,53 +4411,14 @@
       </p:sp>
       <p:sp>
         <p:nvSpPr>
-          <p:cNvPr id="15" name="TextBox 14"/>
-          <p:cNvSpPr txBox="1"/>
-          <p:nvPr/>
-        </p:nvSpPr>
-        <p:spPr>
-          <a:xfrm>
-            <a:off x="10058400" y="5804153"/>
-            <a:ext cx="548640" cy="402336"/>
-          </a:xfrm>
-          <a:prstGeom prst="rect">
-            <a:avLst/>
-          </a:prstGeom>
-          <a:noFill/>
-        </p:spPr>
-        <p:txBody>
-          <a:bodyPr wrap="square" lIns="0" rIns="0" tIns="0" bIns="0" anchor="t">
-            <a:spAutoFit/>
-          </a:bodyPr>
-          <a:lstStyle/>
-          <a:p>
-            <a:pPr algn="l">
-              <a:lnSpc>
-                <a:spcPct val="132000"/>
-              </a:lnSpc>
-            </a:pPr>
-            <a:r>
-              <a:rPr sz="2400" b="1" u="none" i="0">
-                <a:solidFill>
-                  <a:srgbClr val="6D28D9"/>
-                </a:solidFill>
-                <a:latin typeface="Arial"/>
-              </a:rPr>
-              <a:t>03</a:t>
-            </a:r>
-          </a:p>
-        </p:txBody>
-      </p:sp>
-      <p:sp>
-        <p:nvSpPr>
-          <p:cNvPr id="16" name="TextBox 15"/>
-          <p:cNvSpPr txBox="1"/>
-          <p:nvPr/>
-        </p:nvSpPr>
-        <p:spPr>
-          <a:xfrm>
-            <a:off x="10579608" y="5804153"/>
-            <a:ext cx="6190488" cy="804672"/>
+          <p:cNvPr id="45" name="TextBox 44"/>
+          <p:cNvSpPr txBox="1"/>
+          <p:nvPr/>
+        </p:nvSpPr>
+        <p:spPr>
+          <a:xfrm>
+            <a:off x="987552" y="6480810"/>
+            <a:ext cx="1748536" cy="402336"/>
           </a:xfrm>
           <a:prstGeom prst="rect">
             <a:avLst/>
@@ -5530,21 +4443,21 @@
                 </a:solidFill>
                 <a:latin typeface="Arial"/>
               </a:rPr>
-              <a:t>On a hit, continue in decode, or ship the KV back to prefill?</a:t>
-            </a:r>
-          </a:p>
-        </p:txBody>
-      </p:sp>
-      <p:sp>
-        <p:nvSpPr>
-          <p:cNvPr id="17" name="rule"/>
+              <a:t>S4</a:t>
+            </a:r>
+          </a:p>
+        </p:txBody>
+      </p:sp>
+      <p:sp>
+        <p:nvSpPr>
+          <p:cNvPr id="46" name="rule"/>
           <p:cNvSpPr/>
           <p:nvPr/>
         </p:nvSpPr>
         <p:spPr>
           <a:xfrm>
-            <a:off x="10058400" y="6777075"/>
-            <a:ext cx="6711696" cy="10972"/>
+            <a:off x="2928112" y="6243066"/>
+            <a:ext cx="5945022" cy="10972"/>
           </a:xfrm>
           <a:prstGeom prst="rect">
             <a:avLst/>
@@ -5581,53 +4494,309 @@
       </p:sp>
       <p:sp>
         <p:nvSpPr>
-          <p:cNvPr id="18" name="TextBox 17"/>
-          <p:cNvSpPr txBox="1"/>
-          <p:nvPr/>
-        </p:nvSpPr>
-        <p:spPr>
-          <a:xfrm>
-            <a:off x="10058400" y="6956297"/>
-            <a:ext cx="548640" cy="402336"/>
-          </a:xfrm>
-          <a:prstGeom prst="rect">
-            <a:avLst/>
-          </a:prstGeom>
-          <a:noFill/>
-        </p:spPr>
-        <p:txBody>
-          <a:bodyPr wrap="square" lIns="0" rIns="0" tIns="0" bIns="0" anchor="t">
-            <a:spAutoFit/>
-          </a:bodyPr>
-          <a:lstStyle/>
-          <a:p>
-            <a:pPr algn="l">
-              <a:lnSpc>
-                <a:spcPct val="132000"/>
-              </a:lnSpc>
-            </a:pPr>
-            <a:r>
-              <a:rPr sz="2400" b="1" u="none" i="0">
-                <a:solidFill>
-                  <a:srgbClr val="6D28D9"/>
-                </a:solidFill>
-                <a:latin typeface="Arial"/>
-              </a:rPr>
-              <a:t>04</a:t>
-            </a:r>
-          </a:p>
-        </p:txBody>
-      </p:sp>
-      <p:sp>
-        <p:nvSpPr>
-          <p:cNvPr id="19" name="TextBox 18"/>
-          <p:cNvSpPr txBox="1"/>
-          <p:nvPr/>
-        </p:nvSpPr>
-        <p:spPr>
-          <a:xfrm>
-            <a:off x="10579608" y="6956297"/>
-            <a:ext cx="6190488" cy="402336"/>
+          <p:cNvPr id="47" name="TextBox 46"/>
+          <p:cNvSpPr txBox="1"/>
+          <p:nvPr/>
+        </p:nvSpPr>
+        <p:spPr>
+          <a:xfrm>
+            <a:off x="2928112" y="6480810"/>
+            <a:ext cx="5945022" cy="326898"/>
+          </a:xfrm>
+          <a:prstGeom prst="rect">
+            <a:avLst/>
+          </a:prstGeom>
+          <a:noFill/>
+        </p:spPr>
+        <p:txBody>
+          <a:bodyPr wrap="square" lIns="0" rIns="0" tIns="0" bIns="0" anchor="t">
+            <a:spAutoFit/>
+          </a:bodyPr>
+          <a:lstStyle/>
+          <a:p>
+            <a:pPr algn="l">
+              <a:lnSpc>
+                <a:spcPct val="132000"/>
+              </a:lnSpc>
+            </a:pPr>
+            <a:r>
+              <a:rPr sz="1950" b="0" u="none" i="0">
+                <a:solidFill>
+                  <a:srgbClr val="52525B"/>
+                </a:solidFill>
+                <a:latin typeface="Arial"/>
+              </a:rPr>
+              <a:t>Requests-per-bank capacity curve</a:t>
+            </a:r>
+          </a:p>
+        </p:txBody>
+      </p:sp>
+      <p:sp>
+        <p:nvSpPr>
+          <p:cNvPr id="48" name="rule"/>
+          <p:cNvSpPr/>
+          <p:nvPr/>
+        </p:nvSpPr>
+        <p:spPr>
+          <a:xfrm>
+            <a:off x="9065158" y="6243066"/>
+            <a:ext cx="2797657" cy="10972"/>
+          </a:xfrm>
+          <a:prstGeom prst="rect">
+            <a:avLst/>
+          </a:prstGeom>
+          <a:solidFill>
+            <a:srgbClr val="E4E4E7"/>
+          </a:solidFill>
+          <a:ln>
+            <a:noFill/>
+          </a:ln>
+          <a:effectLst/>
+        </p:spPr>
+        <p:style>
+          <a:lnRef idx="1">
+            <a:schemeClr val="accent1"/>
+          </a:lnRef>
+          <a:fillRef idx="3">
+            <a:schemeClr val="accent1"/>
+          </a:fillRef>
+          <a:effectRef idx="2">
+            <a:schemeClr val="accent1"/>
+          </a:effectRef>
+          <a:fontRef idx="minor">
+            <a:schemeClr val="lt1"/>
+          </a:fontRef>
+        </p:style>
+        <p:txBody>
+          <a:bodyPr rtlCol="0" anchor="ctr"/>
+          <a:lstStyle/>
+          <a:p>
+            <a:pPr algn="ctr"/>
+          </a:p>
+        </p:txBody>
+      </p:sp>
+      <p:sp>
+        <p:nvSpPr>
+          <p:cNvPr id="49" name="chip"/>
+          <p:cNvSpPr/>
+          <p:nvPr/>
+        </p:nvSpPr>
+        <p:spPr>
+          <a:xfrm>
+            <a:off x="9065158" y="6480810"/>
+            <a:ext cx="1484963" cy="495299"/>
+          </a:xfrm>
+          <a:prstGeom prst="roundRect">
+            <a:avLst>
+              <a:gd name="adj" fmla="val 50000"/>
+            </a:avLst>
+          </a:prstGeom>
+          <a:solidFill>
+            <a:srgbClr val="F4F4F5"/>
+          </a:solidFill>
+          <a:ln>
+            <a:noFill/>
+          </a:ln>
+          <a:effectLst/>
+        </p:spPr>
+        <p:style>
+          <a:lnRef idx="1">
+            <a:schemeClr val="accent1"/>
+          </a:lnRef>
+          <a:fillRef idx="3">
+            <a:schemeClr val="accent1"/>
+          </a:fillRef>
+          <a:effectRef idx="2">
+            <a:schemeClr val="accent1"/>
+          </a:effectRef>
+          <a:fontRef idx="minor">
+            <a:schemeClr val="lt1"/>
+          </a:fontRef>
+        </p:style>
+        <p:txBody>
+          <a:bodyPr rtlCol="0" anchor="ctr"/>
+          <a:lstStyle/>
+          <a:p>
+            <a:pPr algn="ctr"/>
+          </a:p>
+        </p:txBody>
+      </p:sp>
+      <p:sp>
+        <p:nvSpPr>
+          <p:cNvPr id="50" name="TextBox 49"/>
+          <p:cNvSpPr txBox="1"/>
+          <p:nvPr/>
+        </p:nvSpPr>
+        <p:spPr>
+          <a:xfrm>
+            <a:off x="9339478" y="6565011"/>
+            <a:ext cx="936323" cy="326898"/>
+          </a:xfrm>
+          <a:prstGeom prst="rect">
+            <a:avLst/>
+          </a:prstGeom>
+          <a:noFill/>
+        </p:spPr>
+        <p:txBody>
+          <a:bodyPr wrap="square" lIns="0" rIns="0" tIns="0" bIns="0" anchor="t">
+            <a:spAutoFit/>
+          </a:bodyPr>
+          <a:lstStyle/>
+          <a:p>
+            <a:pPr algn="l">
+              <a:lnSpc>
+                <a:spcPct val="132000"/>
+              </a:lnSpc>
+            </a:pPr>
+            <a:r>
+              <a:rPr sz="1950" b="0" u="none" i="0">
+                <a:solidFill>
+                  <a:srgbClr val="52525B"/>
+                </a:solidFill>
+                <a:latin typeface="Arial"/>
+              </a:rPr>
+              <a:t>planned</a:t>
+            </a:r>
+          </a:p>
+        </p:txBody>
+      </p:sp>
+      <p:sp>
+        <p:nvSpPr>
+          <p:cNvPr id="51" name="rule"/>
+          <p:cNvSpPr/>
+          <p:nvPr/>
+        </p:nvSpPr>
+        <p:spPr>
+          <a:xfrm>
+            <a:off x="12054840" y="6243066"/>
+            <a:ext cx="5245608" cy="10972"/>
+          </a:xfrm>
+          <a:prstGeom prst="rect">
+            <a:avLst/>
+          </a:prstGeom>
+          <a:solidFill>
+            <a:srgbClr val="E4E4E7"/>
+          </a:solidFill>
+          <a:ln>
+            <a:noFill/>
+          </a:ln>
+          <a:effectLst/>
+        </p:spPr>
+        <p:style>
+          <a:lnRef idx="1">
+            <a:schemeClr val="accent1"/>
+          </a:lnRef>
+          <a:fillRef idx="3">
+            <a:schemeClr val="accent1"/>
+          </a:fillRef>
+          <a:effectRef idx="2">
+            <a:schemeClr val="accent1"/>
+          </a:effectRef>
+          <a:fontRef idx="minor">
+            <a:schemeClr val="lt1"/>
+          </a:fontRef>
+        </p:style>
+        <p:txBody>
+          <a:bodyPr rtlCol="0" anchor="ctr"/>
+          <a:lstStyle/>
+          <a:p>
+            <a:pPr algn="ctr"/>
+          </a:p>
+        </p:txBody>
+      </p:sp>
+      <p:sp>
+        <p:nvSpPr>
+          <p:cNvPr id="52" name="TextBox 51"/>
+          <p:cNvSpPr txBox="1"/>
+          <p:nvPr/>
+        </p:nvSpPr>
+        <p:spPr>
+          <a:xfrm>
+            <a:off x="12054840" y="6480810"/>
+            <a:ext cx="5245608" cy="326898"/>
+          </a:xfrm>
+          <a:prstGeom prst="rect">
+            <a:avLst/>
+          </a:prstGeom>
+          <a:noFill/>
+        </p:spPr>
+        <p:txBody>
+          <a:bodyPr wrap="square" lIns="0" rIns="0" tIns="0" bIns="0" anchor="t">
+            <a:spAutoFit/>
+          </a:bodyPr>
+          <a:lstStyle/>
+          <a:p>
+            <a:pPr algn="l">
+              <a:lnSpc>
+                <a:spcPct val="132000"/>
+              </a:lnSpc>
+            </a:pPr>
+            <a:r>
+              <a:rPr sz="1950" b="0" u="none" i="0">
+                <a:solidFill>
+                  <a:srgbClr val="52525B"/>
+                </a:solidFill>
+                <a:latin typeface="Arial"/>
+              </a:rPr>
+              <a:t>Needs a geometry near the SRAM budget</a:t>
+            </a:r>
+          </a:p>
+        </p:txBody>
+      </p:sp>
+      <p:sp>
+        <p:nvSpPr>
+          <p:cNvPr id="53" name="rule"/>
+          <p:cNvSpPr/>
+          <p:nvPr/>
+        </p:nvSpPr>
+        <p:spPr>
+          <a:xfrm>
+            <a:off x="987552" y="7066026"/>
+            <a:ext cx="1748536" cy="10972"/>
+          </a:xfrm>
+          <a:prstGeom prst="rect">
+            <a:avLst/>
+          </a:prstGeom>
+          <a:solidFill>
+            <a:srgbClr val="E4E4E7"/>
+          </a:solidFill>
+          <a:ln>
+            <a:noFill/>
+          </a:ln>
+          <a:effectLst/>
+        </p:spPr>
+        <p:style>
+          <a:lnRef idx="1">
+            <a:schemeClr val="accent1"/>
+          </a:lnRef>
+          <a:fillRef idx="3">
+            <a:schemeClr val="accent1"/>
+          </a:fillRef>
+          <a:effectRef idx="2">
+            <a:schemeClr val="accent1"/>
+          </a:effectRef>
+          <a:fontRef idx="minor">
+            <a:schemeClr val="lt1"/>
+          </a:fontRef>
+        </p:style>
+        <p:txBody>
+          <a:bodyPr rtlCol="0" anchor="ctr"/>
+          <a:lstStyle/>
+          <a:p>
+            <a:pPr algn="ctr"/>
+          </a:p>
+        </p:txBody>
+      </p:sp>
+      <p:sp>
+        <p:nvSpPr>
+          <p:cNvPr id="54" name="TextBox 53"/>
+          <p:cNvSpPr txBox="1"/>
+          <p:nvPr/>
+        </p:nvSpPr>
+        <p:spPr>
+          <a:xfrm>
+            <a:off x="987552" y="7303770"/>
+            <a:ext cx="1748536" cy="402336"/>
           </a:xfrm>
           <a:prstGeom prst="rect">
             <a:avLst/>
@@ -5652,7 +4821,302 @@
                 </a:solidFill>
                 <a:latin typeface="Arial"/>
               </a:rPr>
-              <a:t>Does the cache live in decode or in prefill?</a:t>
+              <a:t>S5</a:t>
+            </a:r>
+          </a:p>
+        </p:txBody>
+      </p:sp>
+      <p:sp>
+        <p:nvSpPr>
+          <p:cNvPr id="55" name="rule"/>
+          <p:cNvSpPr/>
+          <p:nvPr/>
+        </p:nvSpPr>
+        <p:spPr>
+          <a:xfrm>
+            <a:off x="2928112" y="7066026"/>
+            <a:ext cx="5945022" cy="10972"/>
+          </a:xfrm>
+          <a:prstGeom prst="rect">
+            <a:avLst/>
+          </a:prstGeom>
+          <a:solidFill>
+            <a:srgbClr val="E4E4E7"/>
+          </a:solidFill>
+          <a:ln>
+            <a:noFill/>
+          </a:ln>
+          <a:effectLst/>
+        </p:spPr>
+        <p:style>
+          <a:lnRef idx="1">
+            <a:schemeClr val="accent1"/>
+          </a:lnRef>
+          <a:fillRef idx="3">
+            <a:schemeClr val="accent1"/>
+          </a:fillRef>
+          <a:effectRef idx="2">
+            <a:schemeClr val="accent1"/>
+          </a:effectRef>
+          <a:fontRef idx="minor">
+            <a:schemeClr val="lt1"/>
+          </a:fontRef>
+        </p:style>
+        <p:txBody>
+          <a:bodyPr rtlCol="0" anchor="ctr"/>
+          <a:lstStyle/>
+          <a:p>
+            <a:pPr algn="ctr"/>
+          </a:p>
+        </p:txBody>
+      </p:sp>
+      <p:sp>
+        <p:nvSpPr>
+          <p:cNvPr id="56" name="TextBox 55"/>
+          <p:cNvSpPr txBox="1"/>
+          <p:nvPr/>
+        </p:nvSpPr>
+        <p:spPr>
+          <a:xfrm>
+            <a:off x="2928112" y="7303770"/>
+            <a:ext cx="5945022" cy="326898"/>
+          </a:xfrm>
+          <a:prstGeom prst="rect">
+            <a:avLst/>
+          </a:prstGeom>
+          <a:noFill/>
+        </p:spPr>
+        <p:txBody>
+          <a:bodyPr wrap="square" lIns="0" rIns="0" tIns="0" bIns="0" anchor="t">
+            <a:spAutoFit/>
+          </a:bodyPr>
+          <a:lstStyle/>
+          <a:p>
+            <a:pPr algn="l">
+              <a:lnSpc>
+                <a:spcPct val="132000"/>
+              </a:lnSpc>
+            </a:pPr>
+            <a:r>
+              <a:rPr sz="1950" b="0" u="none" i="0">
+                <a:solidFill>
+                  <a:srgbClr val="52525B"/>
+                </a:solidFill>
+                <a:latin typeface="Arial"/>
+              </a:rPr>
+              <a:t>End-to-end verification</a:t>
+            </a:r>
+          </a:p>
+        </p:txBody>
+      </p:sp>
+      <p:sp>
+        <p:nvSpPr>
+          <p:cNvPr id="57" name="rule"/>
+          <p:cNvSpPr/>
+          <p:nvPr/>
+        </p:nvSpPr>
+        <p:spPr>
+          <a:xfrm>
+            <a:off x="9065158" y="7066026"/>
+            <a:ext cx="2797657" cy="10972"/>
+          </a:xfrm>
+          <a:prstGeom prst="rect">
+            <a:avLst/>
+          </a:prstGeom>
+          <a:solidFill>
+            <a:srgbClr val="E4E4E7"/>
+          </a:solidFill>
+          <a:ln>
+            <a:noFill/>
+          </a:ln>
+          <a:effectLst/>
+        </p:spPr>
+        <p:style>
+          <a:lnRef idx="1">
+            <a:schemeClr val="accent1"/>
+          </a:lnRef>
+          <a:fillRef idx="3">
+            <a:schemeClr val="accent1"/>
+          </a:fillRef>
+          <a:effectRef idx="2">
+            <a:schemeClr val="accent1"/>
+          </a:effectRef>
+          <a:fontRef idx="minor">
+            <a:schemeClr val="lt1"/>
+          </a:fontRef>
+        </p:style>
+        <p:txBody>
+          <a:bodyPr rtlCol="0" anchor="ctr"/>
+          <a:lstStyle/>
+          <a:p>
+            <a:pPr algn="ctr"/>
+          </a:p>
+        </p:txBody>
+      </p:sp>
+      <p:sp>
+        <p:nvSpPr>
+          <p:cNvPr id="58" name="chip"/>
+          <p:cNvSpPr/>
+          <p:nvPr/>
+        </p:nvSpPr>
+        <p:spPr>
+          <a:xfrm>
+            <a:off x="9065158" y="7303770"/>
+            <a:ext cx="1484963" cy="495299"/>
+          </a:xfrm>
+          <a:prstGeom prst="roundRect">
+            <a:avLst>
+              <a:gd name="adj" fmla="val 50000"/>
+            </a:avLst>
+          </a:prstGeom>
+          <a:solidFill>
+            <a:srgbClr val="F4F4F5"/>
+          </a:solidFill>
+          <a:ln>
+            <a:noFill/>
+          </a:ln>
+          <a:effectLst/>
+        </p:spPr>
+        <p:style>
+          <a:lnRef idx="1">
+            <a:schemeClr val="accent1"/>
+          </a:lnRef>
+          <a:fillRef idx="3">
+            <a:schemeClr val="accent1"/>
+          </a:fillRef>
+          <a:effectRef idx="2">
+            <a:schemeClr val="accent1"/>
+          </a:effectRef>
+          <a:fontRef idx="minor">
+            <a:schemeClr val="lt1"/>
+          </a:fontRef>
+        </p:style>
+        <p:txBody>
+          <a:bodyPr rtlCol="0" anchor="ctr"/>
+          <a:lstStyle/>
+          <a:p>
+            <a:pPr algn="ctr"/>
+          </a:p>
+        </p:txBody>
+      </p:sp>
+      <p:sp>
+        <p:nvSpPr>
+          <p:cNvPr id="59" name="TextBox 58"/>
+          <p:cNvSpPr txBox="1"/>
+          <p:nvPr/>
+        </p:nvSpPr>
+        <p:spPr>
+          <a:xfrm>
+            <a:off x="9339478" y="7387971"/>
+            <a:ext cx="936323" cy="326898"/>
+          </a:xfrm>
+          <a:prstGeom prst="rect">
+            <a:avLst/>
+          </a:prstGeom>
+          <a:noFill/>
+        </p:spPr>
+        <p:txBody>
+          <a:bodyPr wrap="square" lIns="0" rIns="0" tIns="0" bIns="0" anchor="t">
+            <a:spAutoFit/>
+          </a:bodyPr>
+          <a:lstStyle/>
+          <a:p>
+            <a:pPr algn="l">
+              <a:lnSpc>
+                <a:spcPct val="132000"/>
+              </a:lnSpc>
+            </a:pPr>
+            <a:r>
+              <a:rPr sz="1950" b="0" u="none" i="0">
+                <a:solidFill>
+                  <a:srgbClr val="52525B"/>
+                </a:solidFill>
+                <a:latin typeface="Arial"/>
+              </a:rPr>
+              <a:t>planned</a:t>
+            </a:r>
+          </a:p>
+        </p:txBody>
+      </p:sp>
+      <p:sp>
+        <p:nvSpPr>
+          <p:cNvPr id="60" name="rule"/>
+          <p:cNvSpPr/>
+          <p:nvPr/>
+        </p:nvSpPr>
+        <p:spPr>
+          <a:xfrm>
+            <a:off x="12054840" y="7066026"/>
+            <a:ext cx="5245608" cy="10972"/>
+          </a:xfrm>
+          <a:prstGeom prst="rect">
+            <a:avLst/>
+          </a:prstGeom>
+          <a:solidFill>
+            <a:srgbClr val="E4E4E7"/>
+          </a:solidFill>
+          <a:ln>
+            <a:noFill/>
+          </a:ln>
+          <a:effectLst/>
+        </p:spPr>
+        <p:style>
+          <a:lnRef idx="1">
+            <a:schemeClr val="accent1"/>
+          </a:lnRef>
+          <a:fillRef idx="3">
+            <a:schemeClr val="accent1"/>
+          </a:fillRef>
+          <a:effectRef idx="2">
+            <a:schemeClr val="accent1"/>
+          </a:effectRef>
+          <a:fontRef idx="minor">
+            <a:schemeClr val="lt1"/>
+          </a:fontRef>
+        </p:style>
+        <p:txBody>
+          <a:bodyPr rtlCol="0" anchor="ctr"/>
+          <a:lstStyle/>
+          <a:p>
+            <a:pPr algn="ctr"/>
+          </a:p>
+        </p:txBody>
+      </p:sp>
+      <p:sp>
+        <p:nvSpPr>
+          <p:cNvPr id="61" name="TextBox 60"/>
+          <p:cNvSpPr txBox="1"/>
+          <p:nvPr/>
+        </p:nvSpPr>
+        <p:spPr>
+          <a:xfrm>
+            <a:off x="12054840" y="7303770"/>
+            <a:ext cx="5245608" cy="326898"/>
+          </a:xfrm>
+          <a:prstGeom prst="rect">
+            <a:avLst/>
+          </a:prstGeom>
+          <a:noFill/>
+        </p:spPr>
+        <p:txBody>
+          <a:bodyPr wrap="square" lIns="0" rIns="0" tIns="0" bIns="0" anchor="t">
+            <a:spAutoFit/>
+          </a:bodyPr>
+          <a:lstStyle/>
+          <a:p>
+            <a:pPr algn="l">
+              <a:lnSpc>
+                <a:spcPct val="132000"/>
+              </a:lnSpc>
+            </a:pPr>
+            <a:r>
+              <a:rPr sz="1950" b="0" u="none" i="0">
+                <a:solidFill>
+                  <a:srgbClr val="52525B"/>
+                </a:solidFill>
+                <a:latin typeface="Arial"/>
+              </a:rPr>
+              <a:t>Against a teacher-forced reference</a:t>
             </a:r>
           </a:p>
         </p:txBody>
@@ -5709,7 +5173,7 @@
                 </a:solidFill>
                 <a:latin typeface="Arial"/>
               </a:rPr>
-              <a:t>ALSO TO DISCUSS</a:t>
+              <a:t>TO DISCUSS</a:t>
             </a:r>
           </a:p>
         </p:txBody>
@@ -5748,27 +5212,146 @@
                 </a:solidFill>
                 <a:latin typeface="Arial"/>
               </a:rPr>
-              <a:t>Open routing calls</a:t>
-            </a:r>
-          </a:p>
-        </p:txBody>
-      </p:sp>
-      <p:sp>
-        <p:nvSpPr>
-          <p:cNvPr id="4" name="dot"/>
+              <a:t>The M2 questions</a:t>
+            </a:r>
+          </a:p>
+        </p:txBody>
+      </p:sp>
+      <p:sp>
+        <p:nvSpPr>
+          <p:cNvPr id="4" name="TextBox 3"/>
+          <p:cNvSpPr txBox="1"/>
+          <p:nvPr/>
+        </p:nvSpPr>
+        <p:spPr>
+          <a:xfrm>
+            <a:off x="987552" y="2484882"/>
+            <a:ext cx="8010144" cy="301752"/>
+          </a:xfrm>
+          <a:prstGeom prst="rect">
+            <a:avLst/>
+          </a:prstGeom>
+          <a:noFill/>
+        </p:spPr>
+        <p:txBody>
+          <a:bodyPr wrap="square" lIns="0" rIns="0" tIns="0" bIns="0" anchor="t">
+            <a:spAutoFit/>
+          </a:bodyPr>
+          <a:lstStyle/>
+          <a:p>
+            <a:pPr algn="l">
+              <a:lnSpc>
+                <a:spcPct val="132000"/>
+              </a:lnSpc>
+            </a:pPr>
+            <a:r>
+              <a:rPr sz="1800" b="0" u="none" i="0" spc="150">
+                <a:solidFill>
+                  <a:srgbClr val="A1A1AA"/>
+                </a:solidFill>
+                <a:latin typeface="Arial"/>
+              </a:rPr>
+              <a:t>WHY TOGETHER</a:t>
+            </a:r>
+          </a:p>
+        </p:txBody>
+      </p:sp>
+      <p:sp>
+        <p:nvSpPr>
+          <p:cNvPr id="5" name="TextBox 4"/>
+          <p:cNvSpPr txBox="1"/>
+          <p:nvPr/>
+        </p:nvSpPr>
+        <p:spPr>
+          <a:xfrm>
+            <a:off x="987552" y="3051810"/>
+            <a:ext cx="8010144" cy="1348739"/>
+          </a:xfrm>
+          <a:prstGeom prst="rect">
+            <a:avLst/>
+          </a:prstGeom>
+          <a:noFill/>
+        </p:spPr>
+        <p:txBody>
+          <a:bodyPr wrap="square" lIns="0" rIns="0" tIns="0" bIns="0" anchor="t">
+            <a:spAutoFit/>
+          </a:bodyPr>
+          <a:lstStyle/>
+          <a:p>
+            <a:pPr algn="l">
+              <a:lnSpc>
+                <a:spcPct val="118000"/>
+              </a:lnSpc>
+            </a:pPr>
+            <a:r>
+              <a:rPr sz="4500" b="0" u="none" i="0">
+                <a:solidFill>
+                  <a:srgbClr val="18181B"/>
+                </a:solidFill>
+                <a:latin typeface="Arial"/>
+              </a:rPr>
+              <a:t>One architecture, not four separate calls</a:t>
+            </a:r>
+          </a:p>
+        </p:txBody>
+      </p:sp>
+      <p:sp>
+        <p:nvSpPr>
+          <p:cNvPr id="6" name="TextBox 5"/>
+          <p:cNvSpPr txBox="1"/>
+          <p:nvPr/>
+        </p:nvSpPr>
+        <p:spPr>
+          <a:xfrm>
+            <a:off x="987552" y="4729733"/>
+            <a:ext cx="8010144" cy="2816352"/>
+          </a:xfrm>
+          <a:prstGeom prst="rect">
+            <a:avLst/>
+          </a:prstGeom>
+          <a:noFill/>
+        </p:spPr>
+        <p:txBody>
+          <a:bodyPr wrap="square" lIns="0" rIns="0" tIns="0" bIns="0" anchor="t">
+            <a:spAutoFit/>
+          </a:bodyPr>
+          <a:lstStyle/>
+          <a:p>
+            <a:pPr algn="l">
+              <a:lnSpc>
+                <a:spcPct val="132000"/>
+              </a:lnSpc>
+            </a:pPr>
+            <a:r>
+              <a:rPr sz="2400" b="0" u="none" i="0">
+                <a:solidFill>
+                  <a:srgbClr val="52525B"/>
+                </a:solidFill>
+                <a:latin typeface="Arial"/>
+              </a:rPr>
+              <a:t>These choices constrain each other. Paging's page table is exactly the per-PE mapping a distributed control plane would need, so picking one nearly picks the other. M1 commits to the simplest working defaults, fixed slots with control on the host and the cache in decode, and M2 tests each against a small benchmark rather than settling it by argument.</a:t>
+            </a:r>
+          </a:p>
+        </p:txBody>
+      </p:sp>
+      <p:sp>
+        <p:nvSpPr>
+          <p:cNvPr id="7" name="card"/>
           <p:cNvSpPr/>
           <p:nvPr/>
         </p:nvSpPr>
         <p:spPr>
           <a:xfrm>
-            <a:off x="987552" y="2612898"/>
-            <a:ext cx="109728" cy="109728"/>
-          </a:xfrm>
-          <a:prstGeom prst="ellipse">
-            <a:avLst/>
+            <a:off x="9528048" y="2484882"/>
+            <a:ext cx="7772400" cy="5404104"/>
+          </a:xfrm>
+          <a:prstGeom prst="roundRect">
+            <a:avLst>
+              <a:gd name="adj" fmla="val 6195"/>
+            </a:avLst>
           </a:prstGeom>
           <a:solidFill>
-            <a:srgbClr val="6D28D9"/>
+            <a:srgbClr val="F4F4F5"/>
           </a:solidFill>
           <a:ln>
             <a:noFill/>
@@ -5799,14 +5382,92 @@
       </p:sp>
       <p:sp>
         <p:nvSpPr>
-          <p:cNvPr id="5" name="TextBox 4"/>
-          <p:cNvSpPr txBox="1"/>
-          <p:nvPr/>
-        </p:nvSpPr>
-        <p:spPr>
-          <a:xfrm>
-            <a:off x="1353312" y="2484882"/>
-            <a:ext cx="15947136" cy="804672"/>
+          <p:cNvPr id="8" name="TextBox 7"/>
+          <p:cNvSpPr txBox="1"/>
+          <p:nvPr/>
+        </p:nvSpPr>
+        <p:spPr>
+          <a:xfrm>
+            <a:off x="10058400" y="3015234"/>
+            <a:ext cx="6711696" cy="301752"/>
+          </a:xfrm>
+          <a:prstGeom prst="rect">
+            <a:avLst/>
+          </a:prstGeom>
+          <a:noFill/>
+        </p:spPr>
+        <p:txBody>
+          <a:bodyPr wrap="square" lIns="0" rIns="0" tIns="0" bIns="0" anchor="t">
+            <a:spAutoFit/>
+          </a:bodyPr>
+          <a:lstStyle/>
+          <a:p>
+            <a:pPr algn="l">
+              <a:lnSpc>
+                <a:spcPct val="132000"/>
+              </a:lnSpc>
+            </a:pPr>
+            <a:r>
+              <a:rPr sz="1800" b="0" u="none" i="0" spc="150">
+                <a:solidFill>
+                  <a:srgbClr val="A1A1AA"/>
+                </a:solidFill>
+                <a:latin typeface="Arial"/>
+              </a:rPr>
+              <a:t>FOUR COUPLED QUESTIONS</a:t>
+            </a:r>
+          </a:p>
+        </p:txBody>
+      </p:sp>
+      <p:sp>
+        <p:nvSpPr>
+          <p:cNvPr id="9" name="TextBox 8"/>
+          <p:cNvSpPr txBox="1"/>
+          <p:nvPr/>
+        </p:nvSpPr>
+        <p:spPr>
+          <a:xfrm>
+            <a:off x="10058400" y="3499865"/>
+            <a:ext cx="548640" cy="402336"/>
+          </a:xfrm>
+          <a:prstGeom prst="rect">
+            <a:avLst/>
+          </a:prstGeom>
+          <a:noFill/>
+        </p:spPr>
+        <p:txBody>
+          <a:bodyPr wrap="square" lIns="0" rIns="0" tIns="0" bIns="0" anchor="t">
+            <a:spAutoFit/>
+          </a:bodyPr>
+          <a:lstStyle/>
+          <a:p>
+            <a:pPr algn="l">
+              <a:lnSpc>
+                <a:spcPct val="132000"/>
+              </a:lnSpc>
+            </a:pPr>
+            <a:r>
+              <a:rPr sz="2400" b="1" u="none" i="0">
+                <a:solidFill>
+                  <a:srgbClr val="6D28D9"/>
+                </a:solidFill>
+                <a:latin typeface="Arial"/>
+              </a:rPr>
+              <a:t>01</a:t>
+            </a:r>
+          </a:p>
+        </p:txBody>
+      </p:sp>
+      <p:sp>
+        <p:nvSpPr>
+          <p:cNvPr id="10" name="TextBox 9"/>
+          <p:cNvSpPr txBox="1"/>
+          <p:nvPr/>
+        </p:nvSpPr>
+        <p:spPr>
+          <a:xfrm>
+            <a:off x="10579608" y="3499865"/>
+            <a:ext cx="6190488" cy="804672"/>
           </a:xfrm>
           <a:prstGeom prst="rect">
             <a:avLst/>
@@ -5831,27 +5492,27 @@
                 </a:solidFill>
                 <a:latin typeface="Arial"/>
               </a:rPr>
-              <a:t>Continuous batching: M1 builds the substrate, but running requests concurrently needs ingress, egress and a scheduler reworked. Which milestone owns it?</a:t>
-            </a:r>
-          </a:p>
-        </p:txBody>
-      </p:sp>
-      <p:sp>
-        <p:nvSpPr>
-          <p:cNvPr id="6" name="dot"/>
+              <a:t>Does the control plane live on the host, or distributed across the compute PEs?</a:t>
+            </a:r>
+          </a:p>
+        </p:txBody>
+      </p:sp>
+      <p:sp>
+        <p:nvSpPr>
+          <p:cNvPr id="11" name="rule"/>
           <p:cNvSpPr/>
           <p:nvPr/>
         </p:nvSpPr>
         <p:spPr>
           <a:xfrm>
-            <a:off x="987552" y="3728465"/>
-            <a:ext cx="109728" cy="109728"/>
-          </a:xfrm>
-          <a:prstGeom prst="ellipse">
+            <a:off x="10058400" y="4472787"/>
+            <a:ext cx="6711696" cy="10972"/>
+          </a:xfrm>
+          <a:prstGeom prst="rect">
             <a:avLst/>
           </a:prstGeom>
           <a:solidFill>
-            <a:srgbClr val="6D28D9"/>
+            <a:srgbClr val="E4E4E7"/>
           </a:solidFill>
           <a:ln>
             <a:noFill/>
@@ -5882,14 +5543,53 @@
       </p:sp>
       <p:sp>
         <p:nvSpPr>
-          <p:cNvPr id="7" name="TextBox 6"/>
-          <p:cNvSpPr txBox="1"/>
-          <p:nvPr/>
-        </p:nvSpPr>
-        <p:spPr>
-          <a:xfrm>
-            <a:off x="1353312" y="3600450"/>
-            <a:ext cx="15947136" cy="402336"/>
+          <p:cNvPr id="12" name="TextBox 11"/>
+          <p:cNvSpPr txBox="1"/>
+          <p:nvPr/>
+        </p:nvSpPr>
+        <p:spPr>
+          <a:xfrm>
+            <a:off x="10058400" y="4652009"/>
+            <a:ext cx="548640" cy="402336"/>
+          </a:xfrm>
+          <a:prstGeom prst="rect">
+            <a:avLst/>
+          </a:prstGeom>
+          <a:noFill/>
+        </p:spPr>
+        <p:txBody>
+          <a:bodyPr wrap="square" lIns="0" rIns="0" tIns="0" bIns="0" anchor="t">
+            <a:spAutoFit/>
+          </a:bodyPr>
+          <a:lstStyle/>
+          <a:p>
+            <a:pPr algn="l">
+              <a:lnSpc>
+                <a:spcPct val="132000"/>
+              </a:lnSpc>
+            </a:pPr>
+            <a:r>
+              <a:rPr sz="2400" b="1" u="none" i="0">
+                <a:solidFill>
+                  <a:srgbClr val="6D28D9"/>
+                </a:solidFill>
+                <a:latin typeface="Arial"/>
+              </a:rPr>
+              <a:t>02</a:t>
+            </a:r>
+          </a:p>
+        </p:txBody>
+      </p:sp>
+      <p:sp>
+        <p:nvSpPr>
+          <p:cNvPr id="13" name="TextBox 12"/>
+          <p:cNvSpPr txBox="1"/>
+          <p:nvPr/>
+        </p:nvSpPr>
+        <p:spPr>
+          <a:xfrm>
+            <a:off x="10579608" y="4652009"/>
+            <a:ext cx="6190488" cy="804672"/>
           </a:xfrm>
           <a:prstGeom prst="rect">
             <a:avLst/>
@@ -5914,27 +5614,27 @@
                 </a:solidFill>
                 <a:latin typeface="Arial"/>
               </a:rPr>
-              <a:t>Do we run the control-plane comparison inside M1, or on a branch forked after M1-S2?</a:t>
-            </a:r>
-          </a:p>
-        </p:txBody>
-      </p:sp>
-      <p:sp>
-        <p:nvSpPr>
-          <p:cNvPr id="8" name="dot"/>
+              <a:t>Fixed-size slots, or paging for copy-free prefix sharing?</a:t>
+            </a:r>
+          </a:p>
+        </p:txBody>
+      </p:sp>
+      <p:sp>
+        <p:nvSpPr>
+          <p:cNvPr id="14" name="rule"/>
           <p:cNvSpPr/>
           <p:nvPr/>
         </p:nvSpPr>
         <p:spPr>
           <a:xfrm>
-            <a:off x="987552" y="4441698"/>
-            <a:ext cx="109728" cy="109728"/>
-          </a:xfrm>
-          <a:prstGeom prst="ellipse">
+            <a:off x="10058400" y="5624931"/>
+            <a:ext cx="6711696" cy="10972"/>
+          </a:xfrm>
+          <a:prstGeom prst="rect">
             <a:avLst/>
           </a:prstGeom>
           <a:solidFill>
-            <a:srgbClr val="6D28D9"/>
+            <a:srgbClr val="E4E4E7"/>
           </a:solidFill>
           <a:ln>
             <a:noFill/>
@@ -5965,14 +5665,53 @@
       </p:sp>
       <p:sp>
         <p:nvSpPr>
-          <p:cNvPr id="9" name="TextBox 8"/>
-          <p:cNvSpPr txBox="1"/>
-          <p:nvPr/>
-        </p:nvSpPr>
-        <p:spPr>
-          <a:xfrm>
-            <a:off x="1353312" y="4313682"/>
-            <a:ext cx="15947136" cy="402336"/>
+          <p:cNvPr id="15" name="TextBox 14"/>
+          <p:cNvSpPr txBox="1"/>
+          <p:nvPr/>
+        </p:nvSpPr>
+        <p:spPr>
+          <a:xfrm>
+            <a:off x="10058400" y="5804153"/>
+            <a:ext cx="548640" cy="402336"/>
+          </a:xfrm>
+          <a:prstGeom prst="rect">
+            <a:avLst/>
+          </a:prstGeom>
+          <a:noFill/>
+        </p:spPr>
+        <p:txBody>
+          <a:bodyPr wrap="square" lIns="0" rIns="0" tIns="0" bIns="0" anchor="t">
+            <a:spAutoFit/>
+          </a:bodyPr>
+          <a:lstStyle/>
+          <a:p>
+            <a:pPr algn="l">
+              <a:lnSpc>
+                <a:spcPct val="132000"/>
+              </a:lnSpc>
+            </a:pPr>
+            <a:r>
+              <a:rPr sz="2400" b="1" u="none" i="0">
+                <a:solidFill>
+                  <a:srgbClr val="6D28D9"/>
+                </a:solidFill>
+                <a:latin typeface="Arial"/>
+              </a:rPr>
+              <a:t>03</a:t>
+            </a:r>
+          </a:p>
+        </p:txBody>
+      </p:sp>
+      <p:sp>
+        <p:nvSpPr>
+          <p:cNvPr id="16" name="TextBox 15"/>
+          <p:cNvSpPr txBox="1"/>
+          <p:nvPr/>
+        </p:nvSpPr>
+        <p:spPr>
+          <a:xfrm>
+            <a:off x="10579608" y="5804153"/>
+            <a:ext cx="6190488" cy="804672"/>
           </a:xfrm>
           <a:prstGeom prst="rect">
             <a:avLst/>
@@ -5997,27 +5736,27 @@
                 </a:solidFill>
                 <a:latin typeface="Arial"/>
               </a:rPr>
-              <a:t>Measuring real-scale pipelining needs a compute-heavy configuration. Is it worth the wafer time?</a:t>
-            </a:r>
-          </a:p>
-        </p:txBody>
-      </p:sp>
-      <p:sp>
-        <p:nvSpPr>
-          <p:cNvPr id="10" name="dot"/>
+              <a:t>On a hit, continue in decode, or ship the KV back to prefill?</a:t>
+            </a:r>
+          </a:p>
+        </p:txBody>
+      </p:sp>
+      <p:sp>
+        <p:nvSpPr>
+          <p:cNvPr id="17" name="rule"/>
           <p:cNvSpPr/>
           <p:nvPr/>
         </p:nvSpPr>
         <p:spPr>
           <a:xfrm>
-            <a:off x="987552" y="5154930"/>
-            <a:ext cx="109728" cy="109728"/>
-          </a:xfrm>
-          <a:prstGeom prst="ellipse">
+            <a:off x="10058400" y="6777075"/>
+            <a:ext cx="6711696" cy="10972"/>
+          </a:xfrm>
+          <a:prstGeom prst="rect">
             <a:avLst/>
           </a:prstGeom>
           <a:solidFill>
-            <a:srgbClr val="6D28D9"/>
+            <a:srgbClr val="E4E4E7"/>
           </a:solidFill>
           <a:ln>
             <a:noFill/>
@@ -6048,14 +5787,53 @@
       </p:sp>
       <p:sp>
         <p:nvSpPr>
-          <p:cNvPr id="11" name="TextBox 10"/>
-          <p:cNvSpPr txBox="1"/>
-          <p:nvPr/>
-        </p:nvSpPr>
-        <p:spPr>
-          <a:xfrm>
-            <a:off x="1353312" y="5026914"/>
-            <a:ext cx="15947136" cy="402336"/>
+          <p:cNvPr id="18" name="TextBox 17"/>
+          <p:cNvSpPr txBox="1"/>
+          <p:nvPr/>
+        </p:nvSpPr>
+        <p:spPr>
+          <a:xfrm>
+            <a:off x="10058400" y="6956297"/>
+            <a:ext cx="548640" cy="402336"/>
+          </a:xfrm>
+          <a:prstGeom prst="rect">
+            <a:avLst/>
+          </a:prstGeom>
+          <a:noFill/>
+        </p:spPr>
+        <p:txBody>
+          <a:bodyPr wrap="square" lIns="0" rIns="0" tIns="0" bIns="0" anchor="t">
+            <a:spAutoFit/>
+          </a:bodyPr>
+          <a:lstStyle/>
+          <a:p>
+            <a:pPr algn="l">
+              <a:lnSpc>
+                <a:spcPct val="132000"/>
+              </a:lnSpc>
+            </a:pPr>
+            <a:r>
+              <a:rPr sz="2400" b="1" u="none" i="0">
+                <a:solidFill>
+                  <a:srgbClr val="6D28D9"/>
+                </a:solidFill>
+                <a:latin typeface="Arial"/>
+              </a:rPr>
+              <a:t>04</a:t>
+            </a:r>
+          </a:p>
+        </p:txBody>
+      </p:sp>
+      <p:sp>
+        <p:nvSpPr>
+          <p:cNvPr id="19" name="TextBox 18"/>
+          <p:cNvSpPr txBox="1"/>
+          <p:nvPr/>
+        </p:nvSpPr>
+        <p:spPr>
+          <a:xfrm>
+            <a:off x="10579608" y="6956297"/>
+            <a:ext cx="6190488" cy="402336"/>
           </a:xfrm>
           <a:prstGeom prst="rect">
             <a:avLst/>
@@ -6080,7 +5858,7 @@
                 </a:solidFill>
                 <a:latin typeface="Arial"/>
               </a:rPr>
-              <a:t>The CS-3 cluster is down, so M0's transport work stays parked. M1 runs in simulation meanwhile.</a:t>
+              <a:t>Does the cache live in decode or in prefill?</a:t>
             </a:r>
           </a:p>
         </p:txBody>
@@ -6137,7 +5915,7 @@
                 </a:solidFill>
                 <a:latin typeface="Arial"/>
               </a:rPr>
-              <a:t>NEXT STEPS</a:t>
+              <a:t>ALSO TO DISCUSS</a:t>
             </a:r>
           </a:p>
         </p:txBody>
@@ -6176,27 +5954,27 @@
                 </a:solidFill>
                 <a:latin typeface="Arial"/>
               </a:rPr>
-              <a:t>What happens next</a:t>
-            </a:r>
-          </a:p>
-        </p:txBody>
-      </p:sp>
-      <p:sp>
-        <p:nvSpPr>
-          <p:cNvPr id="4" name="rule"/>
+              <a:t>Open routing calls</a:t>
+            </a:r>
+          </a:p>
+        </p:txBody>
+      </p:sp>
+      <p:sp>
+        <p:nvSpPr>
+          <p:cNvPr id="4" name="dot"/>
           <p:cNvSpPr/>
           <p:nvPr/>
         </p:nvSpPr>
         <p:spPr>
           <a:xfrm>
-            <a:off x="987552" y="2484882"/>
-            <a:ext cx="14282928" cy="10972"/>
-          </a:xfrm>
-          <a:prstGeom prst="rect">
+            <a:off x="987552" y="2612898"/>
+            <a:ext cx="109728" cy="109728"/>
+          </a:xfrm>
+          <a:prstGeom prst="ellipse">
             <a:avLst/>
           </a:prstGeom>
           <a:solidFill>
-            <a:srgbClr val="E4E4E7"/>
+            <a:srgbClr val="6D28D9"/>
           </a:solidFill>
           <a:ln>
             <a:noFill/>
@@ -6233,47 +6011,8 @@
         </p:nvSpPr>
         <p:spPr>
           <a:xfrm>
-            <a:off x="987552" y="2740913"/>
-            <a:ext cx="2093976" cy="326898"/>
-          </a:xfrm>
-          <a:prstGeom prst="rect">
-            <a:avLst/>
-          </a:prstGeom>
-          <a:noFill/>
-        </p:spPr>
-        <p:txBody>
-          <a:bodyPr wrap="square" lIns="0" rIns="0" tIns="0" bIns="0" anchor="t">
-            <a:spAutoFit/>
-          </a:bodyPr>
-          <a:lstStyle/>
-          <a:p>
-            <a:pPr algn="l">
-              <a:lnSpc>
-                <a:spcPct val="132000"/>
-              </a:lnSpc>
-            </a:pPr>
-            <a:r>
-              <a:rPr sz="1950" b="0" u="none" i="0">
-                <a:solidFill>
-                  <a:srgbClr val="A1A1AA"/>
-                </a:solidFill>
-                <a:latin typeface="Arial"/>
-              </a:rPr>
-              <a:t>Le Xu</a:t>
-            </a:r>
-          </a:p>
-        </p:txBody>
-      </p:sp>
-      <p:sp>
-        <p:nvSpPr>
-          <p:cNvPr id="6" name="TextBox 5"/>
-          <p:cNvSpPr txBox="1"/>
-          <p:nvPr/>
-        </p:nvSpPr>
-        <p:spPr>
-          <a:xfrm>
-            <a:off x="3200400" y="2704337"/>
-            <a:ext cx="10972800" cy="402336"/>
+            <a:off x="1353312" y="2484882"/>
+            <a:ext cx="15947136" cy="804672"/>
           </a:xfrm>
           <a:prstGeom prst="rect">
             <a:avLst/>
@@ -6298,27 +6037,27 @@
                 </a:solidFill>
                 <a:latin typeface="Arial"/>
               </a:rPr>
-              <a:t>Review the M1 slot contract so implementation can start.</a:t>
-            </a:r>
-          </a:p>
-        </p:txBody>
-      </p:sp>
-      <p:sp>
-        <p:nvSpPr>
-          <p:cNvPr id="7" name="rule"/>
+              <a:t>Continuous batching: M1 builds the substrate, but running requests concurrently needs ingress, egress and a scheduler reworked. Which milestone owns it?</a:t>
+            </a:r>
+          </a:p>
+        </p:txBody>
+      </p:sp>
+      <p:sp>
+        <p:nvSpPr>
+          <p:cNvPr id="6" name="dot"/>
           <p:cNvSpPr/>
           <p:nvPr/>
         </p:nvSpPr>
         <p:spPr>
           <a:xfrm>
-            <a:off x="987552" y="3316986"/>
-            <a:ext cx="14282928" cy="10972"/>
-          </a:xfrm>
-          <a:prstGeom prst="rect">
+            <a:off x="987552" y="3728465"/>
+            <a:ext cx="109728" cy="109728"/>
+          </a:xfrm>
+          <a:prstGeom prst="ellipse">
             <a:avLst/>
           </a:prstGeom>
           <a:solidFill>
-            <a:srgbClr val="E4E4E7"/>
+            <a:srgbClr val="6D28D9"/>
           </a:solidFill>
           <a:ln>
             <a:noFill/>
@@ -6349,53 +6088,14 @@
       </p:sp>
       <p:sp>
         <p:nvSpPr>
-          <p:cNvPr id="8" name="TextBox 7"/>
-          <p:cNvSpPr txBox="1"/>
-          <p:nvPr/>
-        </p:nvSpPr>
-        <p:spPr>
-          <a:xfrm>
-            <a:off x="987552" y="3573018"/>
-            <a:ext cx="2093976" cy="326898"/>
-          </a:xfrm>
-          <a:prstGeom prst="rect">
-            <a:avLst/>
-          </a:prstGeom>
-          <a:noFill/>
-        </p:spPr>
-        <p:txBody>
-          <a:bodyPr wrap="square" lIns="0" rIns="0" tIns="0" bIns="0" anchor="t">
-            <a:spAutoFit/>
-          </a:bodyPr>
-          <a:lstStyle/>
-          <a:p>
-            <a:pPr algn="l">
-              <a:lnSpc>
-                <a:spcPct val="132000"/>
-              </a:lnSpc>
-            </a:pPr>
-            <a:r>
-              <a:rPr sz="1950" b="0" u="none" i="0">
-                <a:solidFill>
-                  <a:srgbClr val="A1A1AA"/>
-                </a:solidFill>
-                <a:latin typeface="Arial"/>
-              </a:rPr>
-              <a:t>Le Xu</a:t>
-            </a:r>
-          </a:p>
-        </p:txBody>
-      </p:sp>
-      <p:sp>
-        <p:nvSpPr>
-          <p:cNvPr id="9" name="TextBox 8"/>
-          <p:cNvSpPr txBox="1"/>
-          <p:nvPr/>
-        </p:nvSpPr>
-        <p:spPr>
-          <a:xfrm>
-            <a:off x="3200400" y="3536441"/>
-            <a:ext cx="10972800" cy="402336"/>
+          <p:cNvPr id="7" name="TextBox 6"/>
+          <p:cNvSpPr txBox="1"/>
+          <p:nvPr/>
+        </p:nvSpPr>
+        <p:spPr>
+          <a:xfrm>
+            <a:off x="1353312" y="3600450"/>
+            <a:ext cx="15947136" cy="804672"/>
           </a:xfrm>
           <a:prstGeom prst="rect">
             <a:avLst/>
@@ -6420,27 +6120,27 @@
                 </a:solidFill>
                 <a:latin typeface="Arial"/>
               </a:rPr>
-              <a:t>Branch from kv-feature and land M1-S1, the multi-slot seam, switched off.</a:t>
-            </a:r>
-          </a:p>
-        </p:txBody>
-      </p:sp>
-      <p:sp>
-        <p:nvSpPr>
-          <p:cNvPr id="10" name="rule"/>
+              <a:t>Ragged batch, meaning lanes sitting at different sequence positions. M1 declined it, but continuous batching needs it. Do we cost it on its own?</a:t>
+            </a:r>
+          </a:p>
+        </p:txBody>
+      </p:sp>
+      <p:sp>
+        <p:nvSpPr>
+          <p:cNvPr id="8" name="dot"/>
           <p:cNvSpPr/>
           <p:nvPr/>
         </p:nvSpPr>
         <p:spPr>
           <a:xfrm>
-            <a:off x="987552" y="4149089"/>
-            <a:ext cx="14282928" cy="10972"/>
-          </a:xfrm>
-          <a:prstGeom prst="rect">
+            <a:off x="987552" y="4844033"/>
+            <a:ext cx="109728" cy="109728"/>
+          </a:xfrm>
+          <a:prstGeom prst="ellipse">
             <a:avLst/>
           </a:prstGeom>
           <a:solidFill>
-            <a:srgbClr val="E4E4E7"/>
+            <a:srgbClr val="6D28D9"/>
           </a:solidFill>
           <a:ln>
             <a:noFill/>
@@ -6471,53 +6171,97 @@
       </p:sp>
       <p:sp>
         <p:nvSpPr>
+          <p:cNvPr id="9" name="TextBox 8"/>
+          <p:cNvSpPr txBox="1"/>
+          <p:nvPr/>
+        </p:nvSpPr>
+        <p:spPr>
+          <a:xfrm>
+            <a:off x="1353312" y="4716018"/>
+            <a:ext cx="15947136" cy="402336"/>
+          </a:xfrm>
+          <a:prstGeom prst="rect">
+            <a:avLst/>
+          </a:prstGeom>
+          <a:noFill/>
+        </p:spPr>
+        <p:txBody>
+          <a:bodyPr wrap="square" lIns="0" rIns="0" tIns="0" bIns="0" anchor="t">
+            <a:spAutoFit/>
+          </a:bodyPr>
+          <a:lstStyle/>
+          <a:p>
+            <a:pPr algn="l">
+              <a:lnSpc>
+                <a:spcPct val="132000"/>
+              </a:lnSpc>
+            </a:pPr>
+            <a:r>
+              <a:rPr sz="2400" b="0" u="none" i="0">
+                <a:solidFill>
+                  <a:srgbClr val="18181B"/>
+                </a:solidFill>
+                <a:latin typeface="Arial"/>
+              </a:rPr>
+              <a:t>Do we run the control-plane comparison inside M1, or on a branch forked after M1-S2?</a:t>
+            </a:r>
+          </a:p>
+        </p:txBody>
+      </p:sp>
+      <p:sp>
+        <p:nvSpPr>
+          <p:cNvPr id="10" name="dot"/>
+          <p:cNvSpPr/>
+          <p:nvPr/>
+        </p:nvSpPr>
+        <p:spPr>
+          <a:xfrm>
+            <a:off x="987552" y="5557266"/>
+            <a:ext cx="109728" cy="109728"/>
+          </a:xfrm>
+          <a:prstGeom prst="ellipse">
+            <a:avLst/>
+          </a:prstGeom>
+          <a:solidFill>
+            <a:srgbClr val="6D28D9"/>
+          </a:solidFill>
+          <a:ln>
+            <a:noFill/>
+          </a:ln>
+          <a:effectLst/>
+        </p:spPr>
+        <p:style>
+          <a:lnRef idx="1">
+            <a:schemeClr val="accent1"/>
+          </a:lnRef>
+          <a:fillRef idx="3">
+            <a:schemeClr val="accent1"/>
+          </a:fillRef>
+          <a:effectRef idx="2">
+            <a:schemeClr val="accent1"/>
+          </a:effectRef>
+          <a:fontRef idx="minor">
+            <a:schemeClr val="lt1"/>
+          </a:fontRef>
+        </p:style>
+        <p:txBody>
+          <a:bodyPr rtlCol="0" anchor="ctr"/>
+          <a:lstStyle/>
+          <a:p>
+            <a:pPr algn="ctr"/>
+          </a:p>
+        </p:txBody>
+      </p:sp>
+      <p:sp>
+        <p:nvSpPr>
           <p:cNvPr id="11" name="TextBox 10"/>
           <p:cNvSpPr txBox="1"/>
           <p:nvPr/>
         </p:nvSpPr>
         <p:spPr>
           <a:xfrm>
-            <a:off x="987552" y="4405122"/>
-            <a:ext cx="2093976" cy="326898"/>
-          </a:xfrm>
-          <a:prstGeom prst="rect">
-            <a:avLst/>
-          </a:prstGeom>
-          <a:noFill/>
-        </p:spPr>
-        <p:txBody>
-          <a:bodyPr wrap="square" lIns="0" rIns="0" tIns="0" bIns="0" anchor="t">
-            <a:spAutoFit/>
-          </a:bodyPr>
-          <a:lstStyle/>
-          <a:p>
-            <a:pPr algn="l">
-              <a:lnSpc>
-                <a:spcPct val="132000"/>
-              </a:lnSpc>
-            </a:pPr>
-            <a:r>
-              <a:rPr sz="1950" b="0" u="none" i="0">
-                <a:solidFill>
-                  <a:srgbClr val="A1A1AA"/>
-                </a:solidFill>
-                <a:latin typeface="Arial"/>
-              </a:rPr>
-              <a:t>Team</a:t>
-            </a:r>
-          </a:p>
-        </p:txBody>
-      </p:sp>
-      <p:sp>
-        <p:nvSpPr>
-          <p:cNvPr id="12" name="TextBox 11"/>
-          <p:cNvSpPr txBox="1"/>
-          <p:nvPr/>
-        </p:nvSpPr>
-        <p:spPr>
-          <a:xfrm>
-            <a:off x="3200400" y="4368546"/>
-            <a:ext cx="10972800" cy="402336"/>
+            <a:off x="1353312" y="5429250"/>
+            <a:ext cx="15947136" cy="402336"/>
           </a:xfrm>
           <a:prstGeom prst="rect">
             <a:avLst/>
@@ -6542,7 +6286,90 @@
                 </a:solidFill>
                 <a:latin typeface="Arial"/>
               </a:rPr>
-              <a:t>Decide which of the M2 questions gets a benchmark first.</a:t>
+              <a:t>Measuring real-scale pipelining needs a compute-heavy configuration. Is it worth the wafer time?</a:t>
+            </a:r>
+          </a:p>
+        </p:txBody>
+      </p:sp>
+      <p:sp>
+        <p:nvSpPr>
+          <p:cNvPr id="12" name="dot"/>
+          <p:cNvSpPr/>
+          <p:nvPr/>
+        </p:nvSpPr>
+        <p:spPr>
+          <a:xfrm>
+            <a:off x="987552" y="6270498"/>
+            <a:ext cx="109728" cy="109728"/>
+          </a:xfrm>
+          <a:prstGeom prst="ellipse">
+            <a:avLst/>
+          </a:prstGeom>
+          <a:solidFill>
+            <a:srgbClr val="6D28D9"/>
+          </a:solidFill>
+          <a:ln>
+            <a:noFill/>
+          </a:ln>
+          <a:effectLst/>
+        </p:spPr>
+        <p:style>
+          <a:lnRef idx="1">
+            <a:schemeClr val="accent1"/>
+          </a:lnRef>
+          <a:fillRef idx="3">
+            <a:schemeClr val="accent1"/>
+          </a:fillRef>
+          <a:effectRef idx="2">
+            <a:schemeClr val="accent1"/>
+          </a:effectRef>
+          <a:fontRef idx="minor">
+            <a:schemeClr val="lt1"/>
+          </a:fontRef>
+        </p:style>
+        <p:txBody>
+          <a:bodyPr rtlCol="0" anchor="ctr"/>
+          <a:lstStyle/>
+          <a:p>
+            <a:pPr algn="ctr"/>
+          </a:p>
+        </p:txBody>
+      </p:sp>
+      <p:sp>
+        <p:nvSpPr>
+          <p:cNvPr id="13" name="TextBox 12"/>
+          <p:cNvSpPr txBox="1"/>
+          <p:nvPr/>
+        </p:nvSpPr>
+        <p:spPr>
+          <a:xfrm>
+            <a:off x="1353312" y="6142482"/>
+            <a:ext cx="15947136" cy="402336"/>
+          </a:xfrm>
+          <a:prstGeom prst="rect">
+            <a:avLst/>
+          </a:prstGeom>
+          <a:noFill/>
+        </p:spPr>
+        <p:txBody>
+          <a:bodyPr wrap="square" lIns="0" rIns="0" tIns="0" bIns="0" anchor="t">
+            <a:spAutoFit/>
+          </a:bodyPr>
+          <a:lstStyle/>
+          <a:p>
+            <a:pPr algn="l">
+              <a:lnSpc>
+                <a:spcPct val="132000"/>
+              </a:lnSpc>
+            </a:pPr>
+            <a:r>
+              <a:rPr sz="2400" b="0" u="none" i="0">
+                <a:solidFill>
+                  <a:srgbClr val="18181B"/>
+                </a:solidFill>
+                <a:latin typeface="Arial"/>
+              </a:rPr>
+              <a:t>The CS-3 cluster is down, so M0's transport work stays parked. M1 runs in simulation meanwhile.</a:t>
             </a:r>
           </a:p>
         </p:txBody>
@@ -6567,6 +6394,468 @@
       <p:grpSpPr/>
       <p:sp>
         <p:nvSpPr>
+          <p:cNvPr id="2" name="TextBox 1"/>
+          <p:cNvSpPr txBox="1"/>
+          <p:nvPr/>
+        </p:nvSpPr>
+        <p:spPr>
+          <a:xfrm>
+            <a:off x="987552" y="914400"/>
+            <a:ext cx="16312896" cy="301752"/>
+          </a:xfrm>
+          <a:prstGeom prst="rect">
+            <a:avLst/>
+          </a:prstGeom>
+          <a:noFill/>
+        </p:spPr>
+        <p:txBody>
+          <a:bodyPr wrap="square" lIns="0" rIns="0" tIns="0" bIns="0" anchor="t">
+            <a:spAutoFit/>
+          </a:bodyPr>
+          <a:lstStyle/>
+          <a:p>
+            <a:pPr algn="l">
+              <a:lnSpc>
+                <a:spcPct val="132000"/>
+              </a:lnSpc>
+            </a:pPr>
+            <a:r>
+              <a:rPr sz="1800" b="0" u="none" i="0" spc="150">
+                <a:solidFill>
+                  <a:srgbClr val="A1A1AA"/>
+                </a:solidFill>
+                <a:latin typeface="Arial"/>
+              </a:rPr>
+              <a:t>NEXT STEPS</a:t>
+            </a:r>
+          </a:p>
+        </p:txBody>
+      </p:sp>
+      <p:sp>
+        <p:nvSpPr>
+          <p:cNvPr id="3" name="TextBox 2"/>
+          <p:cNvSpPr txBox="1"/>
+          <p:nvPr/>
+        </p:nvSpPr>
+        <p:spPr>
+          <a:xfrm>
+            <a:off x="987552" y="1371600"/>
+            <a:ext cx="16312896" cy="674369"/>
+          </a:xfrm>
+          <a:prstGeom prst="rect">
+            <a:avLst/>
+          </a:prstGeom>
+          <a:noFill/>
+        </p:spPr>
+        <p:txBody>
+          <a:bodyPr wrap="square" lIns="0" rIns="0" tIns="0" bIns="0" anchor="t">
+            <a:spAutoFit/>
+          </a:bodyPr>
+          <a:lstStyle/>
+          <a:p>
+            <a:pPr algn="l">
+              <a:lnSpc>
+                <a:spcPct val="118000"/>
+              </a:lnSpc>
+            </a:pPr>
+            <a:r>
+              <a:rPr sz="4500" b="0" u="none" i="0">
+                <a:solidFill>
+                  <a:srgbClr val="18181B"/>
+                </a:solidFill>
+                <a:latin typeface="Arial"/>
+              </a:rPr>
+              <a:t>What happens next</a:t>
+            </a:r>
+          </a:p>
+        </p:txBody>
+      </p:sp>
+      <p:sp>
+        <p:nvSpPr>
+          <p:cNvPr id="4" name="rule"/>
+          <p:cNvSpPr/>
+          <p:nvPr/>
+        </p:nvSpPr>
+        <p:spPr>
+          <a:xfrm>
+            <a:off x="987552" y="2484882"/>
+            <a:ext cx="14282928" cy="10972"/>
+          </a:xfrm>
+          <a:prstGeom prst="rect">
+            <a:avLst/>
+          </a:prstGeom>
+          <a:solidFill>
+            <a:srgbClr val="E4E4E7"/>
+          </a:solidFill>
+          <a:ln>
+            <a:noFill/>
+          </a:ln>
+          <a:effectLst/>
+        </p:spPr>
+        <p:style>
+          <a:lnRef idx="1">
+            <a:schemeClr val="accent1"/>
+          </a:lnRef>
+          <a:fillRef idx="3">
+            <a:schemeClr val="accent1"/>
+          </a:fillRef>
+          <a:effectRef idx="2">
+            <a:schemeClr val="accent1"/>
+          </a:effectRef>
+          <a:fontRef idx="minor">
+            <a:schemeClr val="lt1"/>
+          </a:fontRef>
+        </p:style>
+        <p:txBody>
+          <a:bodyPr rtlCol="0" anchor="ctr"/>
+          <a:lstStyle/>
+          <a:p>
+            <a:pPr algn="ctr"/>
+          </a:p>
+        </p:txBody>
+      </p:sp>
+      <p:sp>
+        <p:nvSpPr>
+          <p:cNvPr id="5" name="TextBox 4"/>
+          <p:cNvSpPr txBox="1"/>
+          <p:nvPr/>
+        </p:nvSpPr>
+        <p:spPr>
+          <a:xfrm>
+            <a:off x="987552" y="2740913"/>
+            <a:ext cx="2093976" cy="326898"/>
+          </a:xfrm>
+          <a:prstGeom prst="rect">
+            <a:avLst/>
+          </a:prstGeom>
+          <a:noFill/>
+        </p:spPr>
+        <p:txBody>
+          <a:bodyPr wrap="square" lIns="0" rIns="0" tIns="0" bIns="0" anchor="t">
+            <a:spAutoFit/>
+          </a:bodyPr>
+          <a:lstStyle/>
+          <a:p>
+            <a:pPr algn="l">
+              <a:lnSpc>
+                <a:spcPct val="132000"/>
+              </a:lnSpc>
+            </a:pPr>
+            <a:r>
+              <a:rPr sz="1950" b="0" u="none" i="0">
+                <a:solidFill>
+                  <a:srgbClr val="A1A1AA"/>
+                </a:solidFill>
+                <a:latin typeface="Arial"/>
+              </a:rPr>
+              <a:t>Le Xu</a:t>
+            </a:r>
+          </a:p>
+        </p:txBody>
+      </p:sp>
+      <p:sp>
+        <p:nvSpPr>
+          <p:cNvPr id="6" name="TextBox 5"/>
+          <p:cNvSpPr txBox="1"/>
+          <p:nvPr/>
+        </p:nvSpPr>
+        <p:spPr>
+          <a:xfrm>
+            <a:off x="3200400" y="2704337"/>
+            <a:ext cx="10972800" cy="402336"/>
+          </a:xfrm>
+          <a:prstGeom prst="rect">
+            <a:avLst/>
+          </a:prstGeom>
+          <a:noFill/>
+        </p:spPr>
+        <p:txBody>
+          <a:bodyPr wrap="square" lIns="0" rIns="0" tIns="0" bIns="0" anchor="t">
+            <a:spAutoFit/>
+          </a:bodyPr>
+          <a:lstStyle/>
+          <a:p>
+            <a:pPr algn="l">
+              <a:lnSpc>
+                <a:spcPct val="132000"/>
+              </a:lnSpc>
+            </a:pPr>
+            <a:r>
+              <a:rPr sz="2400" b="0" u="none" i="0">
+                <a:solidFill>
+                  <a:srgbClr val="18181B"/>
+                </a:solidFill>
+                <a:latin typeface="Arial"/>
+              </a:rPr>
+              <a:t>Commit the S1 working tree, which is the one thing holding up S2.</a:t>
+            </a:r>
+          </a:p>
+        </p:txBody>
+      </p:sp>
+      <p:sp>
+        <p:nvSpPr>
+          <p:cNvPr id="7" name="rule"/>
+          <p:cNvSpPr/>
+          <p:nvPr/>
+        </p:nvSpPr>
+        <p:spPr>
+          <a:xfrm>
+            <a:off x="987552" y="3316986"/>
+            <a:ext cx="14282928" cy="10972"/>
+          </a:xfrm>
+          <a:prstGeom prst="rect">
+            <a:avLst/>
+          </a:prstGeom>
+          <a:solidFill>
+            <a:srgbClr val="E4E4E7"/>
+          </a:solidFill>
+          <a:ln>
+            <a:noFill/>
+          </a:ln>
+          <a:effectLst/>
+        </p:spPr>
+        <p:style>
+          <a:lnRef idx="1">
+            <a:schemeClr val="accent1"/>
+          </a:lnRef>
+          <a:fillRef idx="3">
+            <a:schemeClr val="accent1"/>
+          </a:fillRef>
+          <a:effectRef idx="2">
+            <a:schemeClr val="accent1"/>
+          </a:effectRef>
+          <a:fontRef idx="minor">
+            <a:schemeClr val="lt1"/>
+          </a:fontRef>
+        </p:style>
+        <p:txBody>
+          <a:bodyPr rtlCol="0" anchor="ctr"/>
+          <a:lstStyle/>
+          <a:p>
+            <a:pPr algn="ctr"/>
+          </a:p>
+        </p:txBody>
+      </p:sp>
+      <p:sp>
+        <p:nvSpPr>
+          <p:cNvPr id="8" name="TextBox 7"/>
+          <p:cNvSpPr txBox="1"/>
+          <p:nvPr/>
+        </p:nvSpPr>
+        <p:spPr>
+          <a:xfrm>
+            <a:off x="987552" y="3573018"/>
+            <a:ext cx="2093976" cy="326898"/>
+          </a:xfrm>
+          <a:prstGeom prst="rect">
+            <a:avLst/>
+          </a:prstGeom>
+          <a:noFill/>
+        </p:spPr>
+        <p:txBody>
+          <a:bodyPr wrap="square" lIns="0" rIns="0" tIns="0" bIns="0" anchor="t">
+            <a:spAutoFit/>
+          </a:bodyPr>
+          <a:lstStyle/>
+          <a:p>
+            <a:pPr algn="l">
+              <a:lnSpc>
+                <a:spcPct val="132000"/>
+              </a:lnSpc>
+            </a:pPr>
+            <a:r>
+              <a:rPr sz="1950" b="0" u="none" i="0">
+                <a:solidFill>
+                  <a:srgbClr val="A1A1AA"/>
+                </a:solidFill>
+                <a:latin typeface="Arial"/>
+              </a:rPr>
+              <a:t>Le Xu</a:t>
+            </a:r>
+          </a:p>
+        </p:txBody>
+      </p:sp>
+      <p:sp>
+        <p:nvSpPr>
+          <p:cNvPr id="9" name="TextBox 8"/>
+          <p:cNvSpPr txBox="1"/>
+          <p:nvPr/>
+        </p:nvSpPr>
+        <p:spPr>
+          <a:xfrm>
+            <a:off x="3200400" y="3536441"/>
+            <a:ext cx="10972800" cy="402336"/>
+          </a:xfrm>
+          <a:prstGeom prst="rect">
+            <a:avLst/>
+          </a:prstGeom>
+          <a:noFill/>
+        </p:spPr>
+        <p:txBody>
+          <a:bodyPr wrap="square" lIns="0" rIns="0" tIns="0" bIns="0" anchor="t">
+            <a:spAutoFit/>
+          </a:bodyPr>
+          <a:lstStyle/>
+          <a:p>
+            <a:pPr algn="l">
+              <a:lnSpc>
+                <a:spcPct val="132000"/>
+              </a:lnSpc>
+            </a:pPr>
+            <a:r>
+              <a:rPr sz="2400" b="0" u="none" i="0">
+                <a:solidFill>
+                  <a:srgbClr val="18181B"/>
+                </a:solidFill>
+                <a:latin typeface="Arial"/>
+              </a:rPr>
+              <a:t>Build S2: per-slot lengths on the host, across a changing active set.</a:t>
+            </a:r>
+          </a:p>
+        </p:txBody>
+      </p:sp>
+      <p:sp>
+        <p:nvSpPr>
+          <p:cNvPr id="10" name="rule"/>
+          <p:cNvSpPr/>
+          <p:nvPr/>
+        </p:nvSpPr>
+        <p:spPr>
+          <a:xfrm>
+            <a:off x="987552" y="4149089"/>
+            <a:ext cx="14282928" cy="10972"/>
+          </a:xfrm>
+          <a:prstGeom prst="rect">
+            <a:avLst/>
+          </a:prstGeom>
+          <a:solidFill>
+            <a:srgbClr val="E4E4E7"/>
+          </a:solidFill>
+          <a:ln>
+            <a:noFill/>
+          </a:ln>
+          <a:effectLst/>
+        </p:spPr>
+        <p:style>
+          <a:lnRef idx="1">
+            <a:schemeClr val="accent1"/>
+          </a:lnRef>
+          <a:fillRef idx="3">
+            <a:schemeClr val="accent1"/>
+          </a:fillRef>
+          <a:effectRef idx="2">
+            <a:schemeClr val="accent1"/>
+          </a:effectRef>
+          <a:fontRef idx="minor">
+            <a:schemeClr val="lt1"/>
+          </a:fontRef>
+        </p:style>
+        <p:txBody>
+          <a:bodyPr rtlCol="0" anchor="ctr"/>
+          <a:lstStyle/>
+          <a:p>
+            <a:pPr algn="ctr"/>
+          </a:p>
+        </p:txBody>
+      </p:sp>
+      <p:sp>
+        <p:nvSpPr>
+          <p:cNvPr id="11" name="TextBox 10"/>
+          <p:cNvSpPr txBox="1"/>
+          <p:nvPr/>
+        </p:nvSpPr>
+        <p:spPr>
+          <a:xfrm>
+            <a:off x="987552" y="4405122"/>
+            <a:ext cx="2093976" cy="326898"/>
+          </a:xfrm>
+          <a:prstGeom prst="rect">
+            <a:avLst/>
+          </a:prstGeom>
+          <a:noFill/>
+        </p:spPr>
+        <p:txBody>
+          <a:bodyPr wrap="square" lIns="0" rIns="0" tIns="0" bIns="0" anchor="t">
+            <a:spAutoFit/>
+          </a:bodyPr>
+          <a:lstStyle/>
+          <a:p>
+            <a:pPr algn="l">
+              <a:lnSpc>
+                <a:spcPct val="132000"/>
+              </a:lnSpc>
+            </a:pPr>
+            <a:r>
+              <a:rPr sz="1950" b="0" u="none" i="0">
+                <a:solidFill>
+                  <a:srgbClr val="A1A1AA"/>
+                </a:solidFill>
+                <a:latin typeface="Arial"/>
+              </a:rPr>
+              <a:t>Team</a:t>
+            </a:r>
+          </a:p>
+        </p:txBody>
+      </p:sp>
+      <p:sp>
+        <p:nvSpPr>
+          <p:cNvPr id="12" name="TextBox 11"/>
+          <p:cNvSpPr txBox="1"/>
+          <p:nvPr/>
+        </p:nvSpPr>
+        <p:spPr>
+          <a:xfrm>
+            <a:off x="3200400" y="4368546"/>
+            <a:ext cx="10972800" cy="402336"/>
+          </a:xfrm>
+          <a:prstGeom prst="rect">
+            <a:avLst/>
+          </a:prstGeom>
+          <a:noFill/>
+        </p:spPr>
+        <p:txBody>
+          <a:bodyPr wrap="square" lIns="0" rIns="0" tIns="0" bIns="0" anchor="t">
+            <a:spAutoFit/>
+          </a:bodyPr>
+          <a:lstStyle/>
+          <a:p>
+            <a:pPr algn="l">
+              <a:lnSpc>
+                <a:spcPct val="132000"/>
+              </a:lnSpc>
+            </a:pPr>
+            <a:r>
+              <a:rPr sz="2400" b="0" u="none" i="0">
+                <a:solidFill>
+                  <a:srgbClr val="18181B"/>
+                </a:solidFill>
+                <a:latin typeface="Arial"/>
+              </a:rPr>
+              <a:t>Decide which of the M2 questions gets a benchmark first.</a:t>
+            </a:r>
+          </a:p>
+        </p:txBody>
+      </p:sp>
+    </p:spTree>
+  </p:cSld>
+  <p:clrMapOvr>
+    <a:masterClrMapping/>
+  </p:clrMapOvr>
+</p:sld>
+</file>
+
+<file path=ppt/slides/slide19.xml><?xml version="1.0" encoding="utf-8"?>
+<p:sld xmlns:a="http://schemas.openxmlformats.org/drawingml/2006/main" xmlns:p="http://schemas.openxmlformats.org/presentationml/2006/main" xmlns:r="http://schemas.openxmlformats.org/officeDocument/2006/relationships">
+  <p:cSld>
+    <p:spTree>
+      <p:nvGrpSpPr>
+        <p:cNvPr id="1" name=""/>
+        <p:cNvGrpSpPr/>
+        <p:nvPr/>
+      </p:nvGrpSpPr>
+      <p:grpSpPr/>
+      <p:sp>
+        <p:nvSpPr>
           <p:cNvPr id="2" name="dot"/>
           <p:cNvSpPr/>
           <p:nvPr/>
@@ -8177,7 +8466,7 @@
                 </a:solidFill>
                 <a:latin typeface="Arial"/>
               </a:rPr>
-              <a:t>M1 was broken into six subtasks, and its slot-addressing contract is written and awaiting review.</a:t>
+              <a:t>M1's slot contract was reviewed and approved, and the first subtask is already built and verified in simulation.</a:t>
             </a:r>
           </a:p>
         </p:txBody>
@@ -8235,6 +8524,89 @@
         <p:spPr>
           <a:xfrm>
             <a:off x="1353312" y="5740146"/>
+            <a:ext cx="15947136" cy="804672"/>
+          </a:xfrm>
+          <a:prstGeom prst="rect">
+            <a:avLst/>
+          </a:prstGeom>
+          <a:noFill/>
+        </p:spPr>
+        <p:txBody>
+          <a:bodyPr wrap="square" lIns="0" rIns="0" tIns="0" bIns="0" anchor="t">
+            <a:spAutoFit/>
+          </a:bodyPr>
+          <a:lstStyle/>
+          <a:p>
+            <a:pPr algn="l">
+              <a:lnSpc>
+                <a:spcPct val="132000"/>
+              </a:lnSpc>
+            </a:pPr>
+            <a:r>
+              <a:rPr sz="2400" b="0" u="none" i="0">
+                <a:solidFill>
+                  <a:srgbClr val="18181B"/>
+                </a:solidFill>
+                <a:latin typeface="Arial"/>
+              </a:rPr>
+              <a:t>Building it reversed two things the contract had assumed, so the design is now shaped by code rather than by argument.</a:t>
+            </a:r>
+          </a:p>
+        </p:txBody>
+      </p:sp>
+      <p:sp>
+        <p:nvSpPr>
+          <p:cNvPr id="14" name="dot"/>
+          <p:cNvSpPr/>
+          <p:nvPr/>
+        </p:nvSpPr>
+        <p:spPr>
+          <a:xfrm>
+            <a:off x="987552" y="6983729"/>
+            <a:ext cx="109728" cy="109728"/>
+          </a:xfrm>
+          <a:prstGeom prst="ellipse">
+            <a:avLst/>
+          </a:prstGeom>
+          <a:solidFill>
+            <a:srgbClr val="6D28D9"/>
+          </a:solidFill>
+          <a:ln>
+            <a:noFill/>
+          </a:ln>
+          <a:effectLst/>
+        </p:spPr>
+        <p:style>
+          <a:lnRef idx="1">
+            <a:schemeClr val="accent1"/>
+          </a:lnRef>
+          <a:fillRef idx="3">
+            <a:schemeClr val="accent1"/>
+          </a:fillRef>
+          <a:effectRef idx="2">
+            <a:schemeClr val="accent1"/>
+          </a:effectRef>
+          <a:fontRef idx="minor">
+            <a:schemeClr val="lt1"/>
+          </a:fontRef>
+        </p:style>
+        <p:txBody>
+          <a:bodyPr rtlCol="0" anchor="ctr"/>
+          <a:lstStyle/>
+          <a:p>
+            <a:pPr algn="ctr"/>
+          </a:p>
+        </p:txBody>
+      </p:sp>
+      <p:sp>
+        <p:nvSpPr>
+          <p:cNvPr id="15" name="TextBox 14"/>
+          <p:cNvSpPr txBox="1"/>
+          <p:nvPr/>
+        </p:nvSpPr>
+        <p:spPr>
+          <a:xfrm>
+            <a:off x="1353312" y="6855714"/>
             <a:ext cx="15947136" cy="402336"/>
           </a:xfrm>
           <a:prstGeom prst="rect">

--- a/projects/WaferEngine-staging/meetings/2026-07-26.pptx
+++ b/projects/WaferEngine-staging/meetings/2026-07-26.pptx
@@ -656,7 +656,7 @@
           <a:lstStyle/>
           <a:p>
             <a:r>
-              <a:t>The two effects cannot be switched on and off independently in the kernel: dropping the picking stage without also dropping the drain that feeds it unbalances the fabric and hangs. So they have to be told apart by the shape of the curve on the next slide.</a:t>
+              <a:t>Both effects are real, but they are not the same size. The next slide shows the measurement that separates them.</a:t>
             </a:r>
           </a:p>
         </p:txBody>
@@ -702,7 +702,7 @@
           <a:lstStyle/>
           <a:p>
             <a:r>
-              <a:t>Same configuration, pipelined against non-pipelined, was 17,149 to 13,096 cycles per token, a 24% saving. Correctness held at 9.8e-5 against the oracle.</a:t>
+              <a:t>Left: if the saving were skipped work, the ratio would climb toward 100% as the context grows and attention dwarfs the skipped stage. It does not move. Right: holding the model fixed and spreading it over more blocks tracks the predicted ratio at all three points.</a:t>
             </a:r>
           </a:p>
         </p:txBody>
@@ -1278,7 +1278,7 @@
                 </a:solidFill>
                 <a:latin typeface="Arial"/>
               </a:rPr>
-              <a:t>S6 closes M0's reuse line. M1 opens on holding several requests at once.</a:t>
+              <a:t>S6 closes M0's reuse line. Force-decode turns out to be 8.5x cheaper on the wafer, for a reason we had wrong.</a:t>
             </a:r>
           </a:p>
         </p:txBody>
@@ -1772,7 +1772,7 @@
                 </a:solidFill>
                 <a:latin typeface="Arial"/>
               </a:rPr>
-              <a:t>FORCE-DECODE, SIMULATOR</a:t>
+              <a:t>FORCE-DECODE, REAL WSE-3</a:t>
             </a:r>
           </a:p>
         </p:txBody>
@@ -1811,14 +1811,14 @@
                 </a:solidFill>
                 <a:latin typeface="Arial"/>
               </a:rPr>
-              <a:t>The line is straight, so it is skipped work, not overlap</a:t>
+              <a:t>The win is layer overlap, and the formula predicts it</a:t>
             </a:r>
           </a:p>
         </p:txBody>
       </p:sp>
       <p:pic>
         <p:nvPicPr>
-          <p:cNvPr id="4" name="figure" descr="fig_fsweep.png"/>
+          <p:cNvPr id="4" name="figure" descr="fig_verdict.png"/>
           <p:cNvPicPr>
             <a:picLocks noChangeAspect="1"/>
           </p:cNvPicPr>
@@ -1832,8 +1832,8 @@
         </p:blipFill>
         <p:spPr>
           <a:xfrm>
-            <a:off x="2430276" y="2484882"/>
-            <a:ext cx="13427446" cy="5271516"/>
+            <a:off x="2651899" y="2484882"/>
+            <a:ext cx="12984200" cy="4944618"/>
           </a:xfrm>
           <a:prstGeom prst="rect">
             <a:avLst/>
@@ -1848,8 +1848,8 @@
         </p:nvSpPr>
         <p:spPr>
           <a:xfrm>
-            <a:off x="987552" y="8030718"/>
-            <a:ext cx="16312896" cy="326898"/>
+            <a:off x="987552" y="7703820"/>
+            <a:ext cx="16312896" cy="653796"/>
           </a:xfrm>
           <a:prstGeom prst="rect">
             <a:avLst/>
@@ -1874,7 +1874,7 @@
                 </a:solidFill>
                 <a:latin typeface="Arial"/>
               </a:rPr>
-              <a:t>Toy layout: 2x2 blocks, width 64, vocabulary 24. A forced step costs about 28% of a plain step here, roughly 806 cycles against 2,856.</a:t>
+              <a:t>A forced token costs about 12% of a plain one, roughly 8.5 times cheaper. 524,288 PEs, 28 layers over 8 blocks, vocabulary 151,936. Device runs are timing-only.</a:t>
             </a:r>
           </a:p>
         </p:txBody>
@@ -1970,7 +1970,7 @@
                 </a:solidFill>
                 <a:latin typeface="Arial"/>
               </a:rPr>
-              <a:t>This partly falsified what we expected</a:t>
+              <a:t>We had this backwards a week ago</a:t>
             </a:r>
           </a:p>
         </p:txBody>
@@ -2028,7 +2028,7 @@
         <p:spPr>
           <a:xfrm>
             <a:off x="1353312" y="2484882"/>
-            <a:ext cx="15947136" cy="804672"/>
+            <a:ext cx="15947136" cy="402336"/>
           </a:xfrm>
           <a:prstGeom prst="rect">
             <a:avLst/>
@@ -2053,7 +2053,7 @@
                 </a:solidFill>
                 <a:latin typeface="Arial"/>
               </a:rPr>
-              <a:t>We expected the gain to come from layer pipelining: forced tokens let the front of the model run ahead and fill the pipeline.</a:t>
+              <a:t>Last week we said the saving was skipped work. That is now falsified, not narrowed: on the wafer it is layer overlap.</a:t>
             </a:r>
           </a:p>
         </p:txBody>
@@ -2066,7 +2066,7 @@
         </p:nvSpPr>
         <p:spPr>
           <a:xfrm>
-            <a:off x="987552" y="3728465"/>
+            <a:off x="987552" y="3326129"/>
             <a:ext cx="109728" cy="109728"/>
           </a:xfrm>
           <a:prstGeom prst="ellipse">
@@ -2110,8 +2110,8 @@
         </p:nvSpPr>
         <p:spPr>
           <a:xfrm>
-            <a:off x="1353312" y="3600450"/>
-            <a:ext cx="15947136" cy="804672"/>
+            <a:off x="1353312" y="3198113"/>
+            <a:ext cx="15947136" cy="402336"/>
           </a:xfrm>
           <a:prstGeom prst="rect">
             <a:avLst/>
@@ -2136,7 +2136,7 @@
                 </a:solidFill>
                 <a:latin typeface="Arial"/>
               </a:rPr>
-              <a:t>A straight line rules that out. Pipelining would flatten once the pipeline is full; a constant saving per forced step means work is simply not being done.</a:t>
+              <a:t>The old test could not have decided it. Once forced steps run open-loop, both explanations predict a straight line.</a:t>
             </a:r>
           </a:p>
         </p:txBody>
@@ -2149,7 +2149,7 @@
         </p:nvSpPr>
         <p:spPr>
           <a:xfrm>
-            <a:off x="987552" y="4844033"/>
+            <a:off x="987552" y="4039361"/>
             <a:ext cx="109728" cy="109728"/>
           </a:xfrm>
           <a:prstGeom prst="ellipse">
@@ -2193,7 +2193,7 @@
         </p:nvSpPr>
         <p:spPr>
           <a:xfrm>
-            <a:off x="1353312" y="4716018"/>
+            <a:off x="1353312" y="3911346"/>
             <a:ext cx="15947136" cy="402336"/>
           </a:xfrm>
           <a:prstGeom prst="rect">
@@ -2219,7 +2219,7 @@
                 </a:solidFill>
                 <a:latin typeface="Arial"/>
               </a:rPr>
-              <a:t>Each forced step drops its sampling and output-projection stage, and that should grow with a real 128k vocabulary.</a:t>
+              <a:t>The magnitudes never fitted either. The skipped stage is about 5% of a step, yet the saving was about 71%.</a:t>
             </a:r>
           </a:p>
         </p:txBody>
@@ -2232,7 +2232,7 @@
         </p:nvSpPr>
         <p:spPr>
           <a:xfrm>
-            <a:off x="987552" y="5557266"/>
+            <a:off x="987552" y="4752594"/>
             <a:ext cx="109728" cy="109728"/>
           </a:xfrm>
           <a:prstGeom prst="ellipse">
@@ -2276,7 +2276,90 @@
         </p:nvSpPr>
         <p:spPr>
           <a:xfrm>
-            <a:off x="1353312" y="5429250"/>
+            <a:off x="1353312" y="4624578"/>
+            <a:ext cx="15947136" cy="804672"/>
+          </a:xfrm>
+          <a:prstGeom prst="rect">
+            <a:avLst/>
+          </a:prstGeom>
+          <a:noFill/>
+        </p:spPr>
+        <p:txBody>
+          <a:bodyPr wrap="square" lIns="0" rIns="0" tIns="0" bIns="0" anchor="t">
+            <a:spAutoFit/>
+          </a:bodyPr>
+          <a:lstStyle/>
+          <a:p>
+            <a:pPr algn="l">
+              <a:lnSpc>
+                <a:spcPct val="132000"/>
+              </a:lnSpc>
+            </a:pPr>
+            <a:r>
+              <a:rPr sz="2400" b="0" u="none" i="0">
+                <a:solidFill>
+                  <a:srgbClr val="18181B"/>
+                </a:solidFill>
+                <a:latin typeface="Arial"/>
+              </a:rPr>
+              <a:t>The size of the win is set by how the layers are spread across the block pipeline, not by vocabulary as we had predicted.</a:t>
+            </a:r>
+          </a:p>
+        </p:txBody>
+      </p:sp>
+      <p:sp>
+        <p:nvSpPr>
+          <p:cNvPr id="12" name="dot"/>
+          <p:cNvSpPr/>
+          <p:nvPr/>
+        </p:nvSpPr>
+        <p:spPr>
+          <a:xfrm>
+            <a:off x="987552" y="5868162"/>
+            <a:ext cx="109728" cy="109728"/>
+          </a:xfrm>
+          <a:prstGeom prst="ellipse">
+            <a:avLst/>
+          </a:prstGeom>
+          <a:solidFill>
+            <a:srgbClr val="6D28D9"/>
+          </a:solidFill>
+          <a:ln>
+            <a:noFill/>
+          </a:ln>
+          <a:effectLst/>
+        </p:spPr>
+        <p:style>
+          <a:lnRef idx="1">
+            <a:schemeClr val="accent1"/>
+          </a:lnRef>
+          <a:fillRef idx="3">
+            <a:schemeClr val="accent1"/>
+          </a:fillRef>
+          <a:effectRef idx="2">
+            <a:schemeClr val="accent1"/>
+          </a:effectRef>
+          <a:fontRef idx="minor">
+            <a:schemeClr val="lt1"/>
+          </a:fontRef>
+        </p:style>
+        <p:txBody>
+          <a:bodyPr rtlCol="0" anchor="ctr"/>
+          <a:lstStyle/>
+          <a:p>
+            <a:pPr algn="ctr"/>
+          </a:p>
+        </p:txBody>
+      </p:sp>
+      <p:sp>
+        <p:nvSpPr>
+          <p:cNvPr id="13" name="TextBox 12"/>
+          <p:cNvSpPr txBox="1"/>
+          <p:nvPr/>
+        </p:nvSpPr>
+        <p:spPr>
+          <a:xfrm>
+            <a:off x="1353312" y="5740146"/>
             <a:ext cx="15947136" cy="402336"/>
           </a:xfrm>
           <a:prstGeom prst="rect">
@@ -2302,7 +2385,90 @@
                 </a:solidFill>
                 <a:latin typeface="Arial"/>
               </a:rPr>
-              <a:t>Still open: this layout has very little per-layer compute, so whether pipelining also helps at real scale is unmeasured.</a:t>
+              <a:t>It also explains the old 28%: seven layers at two per block gives 28.6%, which is what we had measured.</a:t>
+            </a:r>
+          </a:p>
+        </p:txBody>
+      </p:sp>
+      <p:sp>
+        <p:nvSpPr>
+          <p:cNvPr id="14" name="dot"/>
+          <p:cNvSpPr/>
+          <p:nvPr/>
+        </p:nvSpPr>
+        <p:spPr>
+          <a:xfrm>
+            <a:off x="987552" y="6581394"/>
+            <a:ext cx="109728" cy="109728"/>
+          </a:xfrm>
+          <a:prstGeom prst="ellipse">
+            <a:avLst/>
+          </a:prstGeom>
+          <a:solidFill>
+            <a:srgbClr val="6D28D9"/>
+          </a:solidFill>
+          <a:ln>
+            <a:noFill/>
+          </a:ln>
+          <a:effectLst/>
+        </p:spPr>
+        <p:style>
+          <a:lnRef idx="1">
+            <a:schemeClr val="accent1"/>
+          </a:lnRef>
+          <a:fillRef idx="3">
+            <a:schemeClr val="accent1"/>
+          </a:fillRef>
+          <a:effectRef idx="2">
+            <a:schemeClr val="accent1"/>
+          </a:effectRef>
+          <a:fontRef idx="minor">
+            <a:schemeClr val="lt1"/>
+          </a:fontRef>
+        </p:style>
+        <p:txBody>
+          <a:bodyPr rtlCol="0" anchor="ctr"/>
+          <a:lstStyle/>
+          <a:p>
+            <a:pPr algn="ctr"/>
+          </a:p>
+        </p:txBody>
+      </p:sp>
+      <p:sp>
+        <p:nvSpPr>
+          <p:cNvPr id="15" name="TextBox 14"/>
+          <p:cNvSpPr txBox="1"/>
+          <p:nvPr/>
+        </p:nvSpPr>
+        <p:spPr>
+          <a:xfrm>
+            <a:off x="1353312" y="6453378"/>
+            <a:ext cx="15947136" cy="804672"/>
+          </a:xfrm>
+          <a:prstGeom prst="rect">
+            <a:avLst/>
+          </a:prstGeom>
+          <a:noFill/>
+        </p:spPr>
+        <p:txBody>
+          <a:bodyPr wrap="square" lIns="0" rIns="0" tIns="0" bIns="0" anchor="t">
+            <a:spAutoFit/>
+          </a:bodyPr>
+          <a:lstStyle/>
+          <a:p>
+            <a:pPr algn="l">
+              <a:lnSpc>
+                <a:spcPct val="132000"/>
+              </a:lnSpc>
+            </a:pPr>
+            <a:r>
+              <a:rPr sz="2400" b="0" u="none" i="0">
+                <a:solidFill>
+                  <a:srgbClr val="18181B"/>
+                </a:solidFill>
+                <a:latin typeface="Arial"/>
+              </a:rPr>
+              <a:t>A stale divisor made absolute per-token figures about five times too low. Ratios hold, but throughput baselines need re-checking.</a:t>
             </a:r>
           </a:p>
         </p:txBody>
@@ -6037,7 +6203,7 @@
                 </a:solidFill>
                 <a:latin typeface="Arial"/>
               </a:rPr>
-              <a:t>Continuous batching: M1 builds the substrate, but running requests concurrently needs ingress, egress and a scheduler reworked. Which milestone owns it?</a:t>
+              <a:t>The cluster was available all along, so the standing assumption that it was down was stale. Does M0's transport work restart now?</a:t>
             </a:r>
           </a:p>
         </p:txBody>
@@ -6095,7 +6261,7 @@
         <p:spPr>
           <a:xfrm>
             <a:off x="1353312" y="3600450"/>
-            <a:ext cx="15947136" cy="804672"/>
+            <a:ext cx="15947136" cy="402336"/>
           </a:xfrm>
           <a:prstGeom prst="rect">
             <a:avLst/>
@@ -6120,7 +6286,7 @@
                 </a:solidFill>
                 <a:latin typeface="Arial"/>
               </a:rPr>
-              <a:t>Ragged batch, meaning lanes sitting at different sequence positions. M1 declined it, but continuous batching needs it. Do we cost it on its own?</a:t>
+              <a:t>Device runs are timing-only, with no correctness gate at device scale. When do we add one?</a:t>
             </a:r>
           </a:p>
         </p:txBody>
@@ -6133,7 +6299,7 @@
         </p:nvSpPr>
         <p:spPr>
           <a:xfrm>
-            <a:off x="987552" y="4844033"/>
+            <a:off x="987552" y="4441698"/>
             <a:ext cx="109728" cy="109728"/>
           </a:xfrm>
           <a:prstGeom prst="ellipse">
@@ -6177,8 +6343,8 @@
         </p:nvSpPr>
         <p:spPr>
           <a:xfrm>
-            <a:off x="1353312" y="4716018"/>
-            <a:ext cx="15947136" cy="402336"/>
+            <a:off x="1353312" y="4313682"/>
+            <a:ext cx="15947136" cy="804672"/>
           </a:xfrm>
           <a:prstGeom prst="rect">
             <a:avLst/>
@@ -6203,7 +6369,7 @@
                 </a:solidFill>
                 <a:latin typeface="Arial"/>
               </a:rPr>
-              <a:t>Do we run the control-plane comparison inside M1, or on a branch forked after M1-S2?</a:t>
+              <a:t>A forced token at 56 to 67 microseconds looks faster than our recorded prefill rate. A like-for-like run would settle force-decode against ship-to-prefill.</a:t>
             </a:r>
           </a:p>
         </p:txBody>
@@ -6261,7 +6427,7 @@
         <p:spPr>
           <a:xfrm>
             <a:off x="1353312" y="5429250"/>
-            <a:ext cx="15947136" cy="402336"/>
+            <a:ext cx="15947136" cy="804672"/>
           </a:xfrm>
           <a:prstGeom prst="rect">
             <a:avLst/>
@@ -6286,7 +6452,7 @@
                 </a:solidFill>
                 <a:latin typeface="Arial"/>
               </a:rPr>
-              <a:t>Measuring real-scale pipelining needs a compute-heavy configuration. Is it worth the wafer time?</a:t>
+              <a:t>Continuous batching: M1 builds the substrate, but running requests concurrently needs ingress, egress and a scheduler reworked. Which milestone owns it?</a:t>
             </a:r>
           </a:p>
         </p:txBody>
@@ -6299,7 +6465,7 @@
         </p:nvSpPr>
         <p:spPr>
           <a:xfrm>
-            <a:off x="987552" y="6270498"/>
+            <a:off x="987552" y="6672833"/>
             <a:ext cx="109728" cy="109728"/>
           </a:xfrm>
           <a:prstGeom prst="ellipse">
@@ -6343,7 +6509,7 @@
         </p:nvSpPr>
         <p:spPr>
           <a:xfrm>
-            <a:off x="1353312" y="6142482"/>
+            <a:off x="1353312" y="6544818"/>
             <a:ext cx="15947136" cy="402336"/>
           </a:xfrm>
           <a:prstGeom prst="rect">
@@ -6369,7 +6535,90 @@
                 </a:solidFill>
                 <a:latin typeface="Arial"/>
               </a:rPr>
-              <a:t>The CS-3 cluster is down, so M0's transport work stays parked. M1 runs in simulation meanwhile.</a:t>
+              <a:t>Ragged batch, meaning lanes at different sequence positions. M1 declined it, but continuous batching needs it.</a:t>
+            </a:r>
+          </a:p>
+        </p:txBody>
+      </p:sp>
+      <p:sp>
+        <p:nvSpPr>
+          <p:cNvPr id="14" name="dot"/>
+          <p:cNvSpPr/>
+          <p:nvPr/>
+        </p:nvSpPr>
+        <p:spPr>
+          <a:xfrm>
+            <a:off x="987552" y="7386066"/>
+            <a:ext cx="109728" cy="109728"/>
+          </a:xfrm>
+          <a:prstGeom prst="ellipse">
+            <a:avLst/>
+          </a:prstGeom>
+          <a:solidFill>
+            <a:srgbClr val="6D28D9"/>
+          </a:solidFill>
+          <a:ln>
+            <a:noFill/>
+          </a:ln>
+          <a:effectLst/>
+        </p:spPr>
+        <p:style>
+          <a:lnRef idx="1">
+            <a:schemeClr val="accent1"/>
+          </a:lnRef>
+          <a:fillRef idx="3">
+            <a:schemeClr val="accent1"/>
+          </a:fillRef>
+          <a:effectRef idx="2">
+            <a:schemeClr val="accent1"/>
+          </a:effectRef>
+          <a:fontRef idx="minor">
+            <a:schemeClr val="lt1"/>
+          </a:fontRef>
+        </p:style>
+        <p:txBody>
+          <a:bodyPr rtlCol="0" anchor="ctr"/>
+          <a:lstStyle/>
+          <a:p>
+            <a:pPr algn="ctr"/>
+          </a:p>
+        </p:txBody>
+      </p:sp>
+      <p:sp>
+        <p:nvSpPr>
+          <p:cNvPr id="15" name="TextBox 14"/>
+          <p:cNvSpPr txBox="1"/>
+          <p:nvPr/>
+        </p:nvSpPr>
+        <p:spPr>
+          <a:xfrm>
+            <a:off x="1353312" y="7258050"/>
+            <a:ext cx="15947136" cy="402336"/>
+          </a:xfrm>
+          <a:prstGeom prst="rect">
+            <a:avLst/>
+          </a:prstGeom>
+          <a:noFill/>
+        </p:spPr>
+        <p:txBody>
+          <a:bodyPr wrap="square" lIns="0" rIns="0" tIns="0" bIns="0" anchor="t">
+            <a:spAutoFit/>
+          </a:bodyPr>
+          <a:lstStyle/>
+          <a:p>
+            <a:pPr algn="l">
+              <a:lnSpc>
+                <a:spcPct val="132000"/>
+              </a:lnSpc>
+            </a:pPr>
+            <a:r>
+              <a:rPr sz="2400" b="0" u="none" i="0">
+                <a:solidFill>
+                  <a:srgbClr val="18181B"/>
+                </a:solidFill>
+                <a:latin typeface="Arial"/>
+              </a:rPr>
+              <a:t>Do we run the control-plane comparison inside M1, or on a branch forked after M1-S2?</a:t>
             </a:r>
           </a:p>
         </p:txBody>
@@ -7530,7 +7779,7 @@
         <p:spPr>
           <a:xfrm>
             <a:off x="4250131" y="4139946"/>
-            <a:ext cx="2896819" cy="653796"/>
+            <a:ext cx="2896819" cy="326898"/>
           </a:xfrm>
           <a:prstGeom prst="rect">
             <a:avLst/>
@@ -7555,7 +7804,7 @@
                 </a:solidFill>
                 <a:latin typeface="Arial"/>
               </a:rPr>
-              <a:t>KV transport, waiting on the cluster</a:t>
+              <a:t>KV transport, still to build</a:t>
             </a:r>
           </a:p>
         </p:txBody>
@@ -8217,7 +8466,7 @@
                 </a:solidFill>
                 <a:latin typeface="Arial"/>
               </a:rPr>
-              <a:t>Force-decode (S6b) was designed, built in three stages and verified in simulation, then merged.</a:t>
+              <a:t>Force-decode was re-measured on the wafer and the conclusion reversed: the win is layer overlap, not skipped work.</a:t>
             </a:r>
           </a:p>
         </p:txBody>
@@ -8275,7 +8524,7 @@
         <p:spPr>
           <a:xfrm>
             <a:off x="1353312" y="3198113"/>
-            <a:ext cx="15947136" cy="804672"/>
+            <a:ext cx="15947136" cy="402336"/>
           </a:xfrm>
           <a:prstGeom prst="rect">
             <a:avLst/>
@@ -8300,7 +8549,7 @@
                 </a:solidFill>
                 <a:latin typeface="Arial"/>
               </a:rPr>
-              <a:t>That closes S6, so M0's reuse line is complete: decode retain, prefill warm-start and force-decode all sit on one branch.</a:t>
+              <a:t>A forced token costs about 12% of a plain one, roughly 8.5 times cheaper, and that holds across a 15x context range.</a:t>
             </a:r>
           </a:p>
         </p:txBody>
@@ -8313,7 +8562,7 @@
         </p:nvSpPr>
         <p:spPr>
           <a:xfrm>
-            <a:off x="987552" y="4441697"/>
+            <a:off x="987552" y="4039361"/>
             <a:ext cx="109728" cy="109728"/>
           </a:xfrm>
           <a:prstGeom prst="ellipse">
@@ -8357,7 +8606,7 @@
         </p:nvSpPr>
         <p:spPr>
           <a:xfrm>
-            <a:off x="1353312" y="4313681"/>
+            <a:off x="1353312" y="3911346"/>
             <a:ext cx="15947136" cy="402336"/>
           </a:xfrm>
           <a:prstGeom prst="rect">
@@ -8383,7 +8632,7 @@
                 </a:solidFill>
                 <a:latin typeface="Arial"/>
               </a:rPr>
-              <a:t>Two device sweeps finished on real silicon: prefill at a 16,384-token prompt and decode at a 4,096-token context.</a:t>
+              <a:t>S6b merged, which closes S6, so M0's reuse line is complete on a single branch.</a:t>
             </a:r>
           </a:p>
         </p:txBody>
@@ -8396,7 +8645,7 @@
         </p:nvSpPr>
         <p:spPr>
           <a:xfrm>
-            <a:off x="987552" y="5154929"/>
+            <a:off x="987552" y="4752594"/>
             <a:ext cx="109728" cy="109728"/>
           </a:xfrm>
           <a:prstGeom prst="ellipse">
@@ -8440,7 +8689,7 @@
         </p:nvSpPr>
         <p:spPr>
           <a:xfrm>
-            <a:off x="1353312" y="5026914"/>
+            <a:off x="1353312" y="4624578"/>
             <a:ext cx="15947136" cy="402336"/>
           </a:xfrm>
           <a:prstGeom prst="rect">
@@ -8466,7 +8715,7 @@
                 </a:solidFill>
                 <a:latin typeface="Arial"/>
               </a:rPr>
-              <a:t>M1's slot contract was reviewed and approved, and the first subtask is already built and verified in simulation.</a:t>
+              <a:t>Two more device sweeps landed: prefill at a 16,384-token prompt and decode at a 4,096-token context.</a:t>
             </a:r>
           </a:p>
         </p:txBody>
@@ -8479,7 +8728,7 @@
         </p:nvSpPr>
         <p:spPr>
           <a:xfrm>
-            <a:off x="987552" y="5868162"/>
+            <a:off x="987552" y="5465826"/>
             <a:ext cx="109728" cy="109728"/>
           </a:xfrm>
           <a:prstGeom prst="ellipse">
@@ -8523,8 +8772,8 @@
         </p:nvSpPr>
         <p:spPr>
           <a:xfrm>
-            <a:off x="1353312" y="5740146"/>
-            <a:ext cx="15947136" cy="804672"/>
+            <a:off x="1353312" y="5337810"/>
+            <a:ext cx="15947136" cy="402336"/>
           </a:xfrm>
           <a:prstGeom prst="rect">
             <a:avLst/>
@@ -8549,7 +8798,7 @@
                 </a:solidFill>
                 <a:latin typeface="Arial"/>
               </a:rPr>
-              <a:t>Building it reversed two things the contract had assumed, so the design is now shaped by code rather than by argument.</a:t>
+              <a:t>M1's slot contract was approved and its first subtask is already built and verified in simulation.</a:t>
             </a:r>
           </a:p>
         </p:txBody>
@@ -8562,7 +8811,7 @@
         </p:nvSpPr>
         <p:spPr>
           <a:xfrm>
-            <a:off x="987552" y="6983729"/>
+            <a:off x="987552" y="6179058"/>
             <a:ext cx="109728" cy="109728"/>
           </a:xfrm>
           <a:prstGeom prst="ellipse">
@@ -8606,7 +8855,7 @@
         </p:nvSpPr>
         <p:spPr>
           <a:xfrm>
-            <a:off x="1353312" y="6855714"/>
+            <a:off x="1353312" y="6051042"/>
             <a:ext cx="15947136" cy="402336"/>
           </a:xfrm>
           <a:prstGeom prst="rect">
@@ -8632,7 +8881,7 @@
                 </a:solidFill>
                 <a:latin typeface="Arial"/>
               </a:rPr>
-              <a:t>M2 grew from a single cost model into a cluster of coupled architecture questions, each to be settled by a benchmark.</a:t>
+              <a:t>M2 grew from a single cost model into a cluster of coupled architecture questions.</a:t>
             </a:r>
           </a:p>
         </p:txBody>
@@ -9246,7 +9495,7 @@
         <p:spPr>
           <a:xfrm>
             <a:off x="1353312" y="4716018"/>
-            <a:ext cx="15947136" cy="402336"/>
+            <a:ext cx="15947136" cy="804672"/>
           </a:xfrm>
           <a:prstGeom prst="rect">
             <a:avLst/>
@@ -9271,7 +9520,7 @@
                 </a:solidFill>
                 <a:latin typeface="Arial"/>
               </a:rPr>
-              <a:t>New text can be appended to a kept context by force-decoding it. Verified in simulation only so far.</a:t>
+              <a:t>New text can be appended to a kept context by force-decoding it. Correctness checked in simulation; speed now measured on the wafer.</a:t>
             </a:r>
           </a:p>
         </p:txBody>
@@ -9284,7 +9533,7 @@
         </p:nvSpPr>
         <p:spPr>
           <a:xfrm>
-            <a:off x="987552" y="5557266"/>
+            <a:off x="987552" y="5959601"/>
             <a:ext cx="109728" cy="109728"/>
           </a:xfrm>
           <a:prstGeom prst="ellipse">
@@ -9328,7 +9577,7 @@
         </p:nvSpPr>
         <p:spPr>
           <a:xfrm>
-            <a:off x="1353312" y="5429250"/>
+            <a:off x="1353312" y="5831586"/>
             <a:ext cx="15947136" cy="402336"/>
           </a:xfrm>
           <a:prstGeom prst="rect">
@@ -9489,7 +9738,7 @@
                 </a:solidFill>
                 <a:latin typeface="Arial"/>
               </a:rPr>
-              <a:t>Two sweeps on real silicon, one finding that changed our mind.</a:t>
+              <a:t>Three sweeps on real silicon, and a conclusion we had to reverse.</a:t>
             </a:r>
           </a:p>
         </p:txBody>
